--- a/class-2/docs/class-2-slides.pptx
+++ b/class-2/docs/class-2-slides.pptx
@@ -7,7 +7,7 @@
   <p:sldIdLst>
     <p:sldId id="256" r:id="rId2"/>
     <p:sldId id="257" r:id="rId3"/>
-    <p:sldId id="307" r:id="rId63"/>
+    <p:sldId id="301" r:id="rId57"/>
     <p:sldId id="281" r:id="rId37"/>
     <p:sldId id="262" r:id="rId8"/>
     <p:sldId id="263" r:id="rId9"/>
@@ -30,12 +30,6 @@
     <p:sldId id="298" r:id="rId54"/>
     <p:sldId id="299" r:id="rId55"/>
     <p:sldId id="300" r:id="rId56"/>
-    <p:sldId id="301" r:id="rId57"/>
-    <p:sldId id="302" r:id="rId58"/>
-    <p:sldId id="303" r:id="rId59"/>
-    <p:sldId id="304" r:id="rId60"/>
-    <p:sldId id="305" r:id="rId61"/>
-    <p:sldId id="306" r:id="rId62"/>
   </p:sldIdLst>
   <p:notesMasterIdLst>
     <p:notesMasterId r:id="rId27"/>
@@ -3403,7 +3397,7 @@
                 </a:solidFill>
                 <a:latin typeface="Carlito"/>
               </a:rPr>
-              <a:t>Install FastAPI</a:t>
+              <a:t>VS Code opens your folder</a:t>
             </a:r>
           </a:p>
         </p:txBody>
@@ -3438,7 +3432,7 @@
                 </a:solidFill>
                 <a:latin typeface="Carlito"/>
               </a:rPr>
-              <a:t>pip install fastapi uvicorn      (Mac: pip3 install fastapi uvicorn)</a:t>
+              <a:t>Open the course folder, then Terminal, New Terminal</a:t>
             </a:r>
           </a:p>
         </p:txBody>
@@ -3598,7 +3592,7 @@
                 </a:solidFill>
                 <a:latin typeface="Carlito"/>
               </a:rPr>
-              <a:t>Check the install</a:t>
+              <a:t>You can run a file</a:t>
             </a:r>
           </a:p>
         </p:txBody>
@@ -3633,7 +3627,7 @@
                 </a:solidFill>
                 <a:latin typeface="Carlito"/>
               </a:rPr>
-              <a:t>python3 -c "import fastapi"      prints nothing = good</a:t>
+              <a:t>Save print("Hello") in a .py file and run it</a:t>
             </a:r>
           </a:p>
         </p:txBody>
@@ -13036,43 +13030,691 @@
       <p:grpSpPr/>
       <p:sp>
         <p:nvSpPr>
-          <p:cNvPr id="2" name="Text 0"/>
-          <p:cNvSpPr/>
-          <p:nvPr/>
-        </p:nvSpPr>
-        <p:spPr>
-          <a:xfrm>
-            <a:off x="1256475" y="2314377"/>
-            <a:ext cx="10484778" cy="1950641"/>
-          </a:xfrm>
-          <a:prstGeom prst="rect">
-            <a:avLst/>
-          </a:prstGeom>
-          <a:noFill/>
-          <a:ln/>
-        </p:spPr>
-        <p:txBody>
-          <a:bodyPr wrap="none" lIns="0" tIns="0" rIns="0" bIns="0" rtlCol="0" anchor="t"/>
-          <a:lstStyle/>
-          <a:p>
-            <a:pPr algn="l" indent="0" marL="0">
-              <a:lnSpc>
-                <a:spcPct val="100000"/>
-              </a:lnSpc>
-              <a:buNone/>
-            </a:pPr>
-            <a:r>
-              <a:rPr lang="en-US" sz="12800" b="1" spc="141" kern="100" dirty="0">
+          <p:cNvPr id="2" name="Title"/>
+          <p:cNvSpPr txBox="1"/>
+          <p:nvPr/>
+        </p:nvSpPr>
+        <p:spPr>
+          <a:xfrm>
+            <a:off x="612648" y="594360"/>
+            <a:ext cx="10972800" cy="612648"/>
+          </a:xfrm>
+          <a:prstGeom prst="rect">
+            <a:avLst/>
+          </a:prstGeom>
+          <a:noFill/>
+        </p:spPr>
+        <p:txBody>
+          <a:bodyPr wrap="square" lIns="0" rIns="0" tIns="0" bIns="0" anchor="t">
+            <a:spAutoFit/>
+          </a:bodyPr>
+          <a:lstStyle/>
+          <a:p>
+            <a:pPr algn="l"/>
+            <a:r>
+              <a:rPr sz="4000" b="1">
+                <a:solidFill>
+                  <a:srgbClr val="0B1F2A"/>
+                </a:solidFill>
+                <a:latin typeface="Caladea Bold"/>
+              </a:rPr>
+              <a:t>Homework</a:t>
+            </a:r>
+          </a:p>
+        </p:txBody>
+      </p:sp>
+      <p:sp>
+        <p:nvSpPr>
+          <p:cNvPr id="3" name="SlideNo"/>
+          <p:cNvSpPr txBox="1"/>
+          <p:nvPr/>
+        </p:nvSpPr>
+        <p:spPr>
+          <a:xfrm>
+            <a:off x="11219688" y="6373368"/>
+            <a:ext cx="694944" cy="256032"/>
+          </a:xfrm>
+          <a:prstGeom prst="rect">
+            <a:avLst/>
+          </a:prstGeom>
+          <a:noFill/>
+        </p:spPr>
+        <p:txBody>
+          <a:bodyPr wrap="square" lIns="0" rIns="0" tIns="0" bIns="0" anchor="t">
+            <a:spAutoFit/>
+          </a:bodyPr>
+          <a:lstStyle/>
+          <a:p>
+            <a:pPr algn="l"/>
+            <a:r>
+              <a:rPr sz="1350" b="0">
+                <a:solidFill>
+                  <a:srgbClr val="6B7F8A"/>
+                </a:solidFill>
+                <a:latin typeface="Carlito"/>
+              </a:rPr>
+              <a:t>22</a:t>
+            </a:r>
+          </a:p>
+        </p:txBody>
+      </p:sp>
+      <p:sp>
+        <p:nvSpPr>
+          <p:cNvPr id="4" name="Rounded Rectangle 3"/>
+          <p:cNvSpPr/>
+          <p:nvPr/>
+        </p:nvSpPr>
+        <p:spPr>
+          <a:xfrm>
+            <a:off x="612648" y="1709928"/>
+            <a:ext cx="10972800" cy="1207008"/>
+          </a:xfrm>
+          <a:prstGeom prst="roundRect">
+            <a:avLst>
+              <a:gd name="adj" fmla="val 12000"/>
+            </a:avLst>
+          </a:prstGeom>
+          <a:solidFill>
+            <a:srgbClr val="EEF3F5"/>
+          </a:solidFill>
+          <a:ln>
+            <a:noFill/>
+          </a:ln>
+          <a:effectLst/>
+        </p:spPr>
+        <p:style>
+          <a:lnRef idx="1">
+            <a:schemeClr val="accent1"/>
+          </a:lnRef>
+          <a:fillRef idx="3">
+            <a:schemeClr val="accent1"/>
+          </a:fillRef>
+          <a:effectRef idx="2">
+            <a:schemeClr val="accent1"/>
+          </a:effectRef>
+          <a:fontRef idx="minor">
+            <a:schemeClr val="lt1"/>
+          </a:fontRef>
+        </p:style>
+        <p:txBody>
+          <a:bodyPr rtlCol="0" anchor="ctr"/>
+          <a:lstStyle/>
+          <a:p>
+            <a:pPr algn="ctr"/>
+          </a:p>
+        </p:txBody>
+      </p:sp>
+      <p:sp>
+        <p:nvSpPr>
+          <p:cNvPr id="5" name="Oval 4"/>
+          <p:cNvSpPr/>
+          <p:nvPr/>
+        </p:nvSpPr>
+        <p:spPr>
+          <a:xfrm>
+            <a:off x="868680" y="2057400"/>
+            <a:ext cx="512064" cy="512064"/>
+          </a:xfrm>
+          <a:prstGeom prst="ellipse">
+            <a:avLst/>
+          </a:prstGeom>
+          <a:solidFill>
+            <a:srgbClr val="3B82C4"/>
+          </a:solidFill>
+          <a:ln>
+            <a:noFill/>
+          </a:ln>
+          <a:effectLst/>
+        </p:spPr>
+        <p:style>
+          <a:lnRef idx="1">
+            <a:schemeClr val="accent1"/>
+          </a:lnRef>
+          <a:fillRef idx="3">
+            <a:schemeClr val="accent1"/>
+          </a:fillRef>
+          <a:effectRef idx="2">
+            <a:schemeClr val="accent1"/>
+          </a:effectRef>
+          <a:fontRef idx="minor">
+            <a:schemeClr val="lt1"/>
+          </a:fontRef>
+        </p:style>
+        <p:txBody>
+          <a:bodyPr rtlCol="0" anchor="ctr"/>
+          <a:lstStyle/>
+          <a:p>
+            <a:pPr algn="ctr"/>
+          </a:p>
+        </p:txBody>
+      </p:sp>
+      <p:sp>
+        <p:nvSpPr>
+          <p:cNvPr id="6" name="TextBox 5"/>
+          <p:cNvSpPr txBox="1"/>
+          <p:nvPr/>
+        </p:nvSpPr>
+        <p:spPr>
+          <a:xfrm>
+            <a:off x="868680" y="2057400"/>
+            <a:ext cx="512064" cy="512064"/>
+          </a:xfrm>
+          <a:prstGeom prst="rect">
+            <a:avLst/>
+          </a:prstGeom>
+          <a:noFill/>
+        </p:spPr>
+        <p:txBody>
+          <a:bodyPr wrap="square" lIns="0" rIns="0" tIns="0" bIns="0" anchor="ctr">
+            <a:spAutoFit/>
+          </a:bodyPr>
+          <a:lstStyle/>
+          <a:p>
+            <a:pPr algn="ctr"/>
+            <a:r>
+              <a:rPr sz="2000" b="1">
                 <a:solidFill>
                   <a:srgbClr val="FFFFFF"/>
                 </a:solidFill>
-                <a:latin typeface="Caladea Bold" pitchFamily="34" charset="0"/>
-                <a:ea typeface="Caladea Bold" pitchFamily="34" charset="-122"/>
-                <a:cs typeface="Caladea Bold" pitchFamily="34" charset="-120"/>
-              </a:rPr>
-              <a:t>Q&amp;A</a:t>
-            </a:r>
-            <a:endParaRPr lang="en-US" sz="12800" dirty="0"/>
+                <a:latin typeface="Carlito"/>
+              </a:rPr>
+              <a:t>1</a:t>
+            </a:r>
+          </a:p>
+        </p:txBody>
+      </p:sp>
+      <p:sp>
+        <p:nvSpPr>
+          <p:cNvPr id="7" name="TextBox 6"/>
+          <p:cNvSpPr txBox="1"/>
+          <p:nvPr/>
+        </p:nvSpPr>
+        <p:spPr>
+          <a:xfrm>
+            <a:off x="1645920" y="1801368"/>
+            <a:ext cx="9601200" cy="411480"/>
+          </a:xfrm>
+          <a:prstGeom prst="rect">
+            <a:avLst/>
+          </a:prstGeom>
+          <a:noFill/>
+        </p:spPr>
+        <p:txBody>
+          <a:bodyPr wrap="square" lIns="0" rIns="0" tIns="0" bIns="0" anchor="t">
+            <a:spAutoFit/>
+          </a:bodyPr>
+          <a:lstStyle/>
+          <a:p>
+            <a:pPr algn="l"/>
+            <a:r>
+              <a:rPr sz="2250" b="1">
+                <a:solidFill>
+                  <a:srgbClr val="0B1F2A"/>
+                </a:solidFill>
+                <a:latin typeface="Carlito"/>
+              </a:rPr>
+              <a:t>Multiplication table</a:t>
+            </a:r>
+          </a:p>
+        </p:txBody>
+      </p:sp>
+      <p:sp>
+        <p:nvSpPr>
+          <p:cNvPr id="8" name="TextBox 7"/>
+          <p:cNvSpPr txBox="1"/>
+          <p:nvPr/>
+        </p:nvSpPr>
+        <p:spPr>
+          <a:xfrm>
+            <a:off x="1645920" y="2167128"/>
+            <a:ext cx="9601200" cy="365760"/>
+          </a:xfrm>
+          <a:prstGeom prst="rect">
+            <a:avLst/>
+          </a:prstGeom>
+          <a:noFill/>
+        </p:spPr>
+        <p:txBody>
+          <a:bodyPr wrap="square" lIns="0" rIns="0" tIns="0" bIns="0" anchor="t">
+            <a:spAutoFit/>
+          </a:bodyPr>
+          <a:lstStyle/>
+          <a:p>
+            <a:pPr algn="l"/>
+            <a:r>
+              <a:rPr sz="1850" b="0">
+                <a:solidFill>
+                  <a:srgbClr val="6B7F8A"/>
+                </a:solidFill>
+                <a:latin typeface="Carlito"/>
+              </a:rPr>
+              <a:t>Ask for a number and print its table from 1 to 10</a:t>
+            </a:r>
+          </a:p>
+        </p:txBody>
+      </p:sp>
+      <p:sp>
+        <p:nvSpPr>
+          <p:cNvPr id="9" name="Rounded Rectangle 8"/>
+          <p:cNvSpPr/>
+          <p:nvPr/>
+        </p:nvSpPr>
+        <p:spPr>
+          <a:xfrm>
+            <a:off x="612648" y="3081528"/>
+            <a:ext cx="10972800" cy="1207008"/>
+          </a:xfrm>
+          <a:prstGeom prst="roundRect">
+            <a:avLst>
+              <a:gd name="adj" fmla="val 12000"/>
+            </a:avLst>
+          </a:prstGeom>
+          <a:solidFill>
+            <a:srgbClr val="EEF3F5"/>
+          </a:solidFill>
+          <a:ln>
+            <a:noFill/>
+          </a:ln>
+          <a:effectLst/>
+        </p:spPr>
+        <p:style>
+          <a:lnRef idx="1">
+            <a:schemeClr val="accent1"/>
+          </a:lnRef>
+          <a:fillRef idx="3">
+            <a:schemeClr val="accent1"/>
+          </a:fillRef>
+          <a:effectRef idx="2">
+            <a:schemeClr val="accent1"/>
+          </a:effectRef>
+          <a:fontRef idx="minor">
+            <a:schemeClr val="lt1"/>
+          </a:fontRef>
+        </p:style>
+        <p:txBody>
+          <a:bodyPr rtlCol="0" anchor="ctr"/>
+          <a:lstStyle/>
+          <a:p>
+            <a:pPr algn="ctr"/>
+          </a:p>
+        </p:txBody>
+      </p:sp>
+      <p:sp>
+        <p:nvSpPr>
+          <p:cNvPr id="10" name="Oval 9"/>
+          <p:cNvSpPr/>
+          <p:nvPr/>
+        </p:nvSpPr>
+        <p:spPr>
+          <a:xfrm>
+            <a:off x="868680" y="3429000"/>
+            <a:ext cx="512064" cy="512064"/>
+          </a:xfrm>
+          <a:prstGeom prst="ellipse">
+            <a:avLst/>
+          </a:prstGeom>
+          <a:solidFill>
+            <a:srgbClr val="3B82C4"/>
+          </a:solidFill>
+          <a:ln>
+            <a:noFill/>
+          </a:ln>
+          <a:effectLst/>
+        </p:spPr>
+        <p:style>
+          <a:lnRef idx="1">
+            <a:schemeClr val="accent1"/>
+          </a:lnRef>
+          <a:fillRef idx="3">
+            <a:schemeClr val="accent1"/>
+          </a:fillRef>
+          <a:effectRef idx="2">
+            <a:schemeClr val="accent1"/>
+          </a:effectRef>
+          <a:fontRef idx="minor">
+            <a:schemeClr val="lt1"/>
+          </a:fontRef>
+        </p:style>
+        <p:txBody>
+          <a:bodyPr rtlCol="0" anchor="ctr"/>
+          <a:lstStyle/>
+          <a:p>
+            <a:pPr algn="ctr"/>
+          </a:p>
+        </p:txBody>
+      </p:sp>
+      <p:sp>
+        <p:nvSpPr>
+          <p:cNvPr id="11" name="TextBox 10"/>
+          <p:cNvSpPr txBox="1"/>
+          <p:nvPr/>
+        </p:nvSpPr>
+        <p:spPr>
+          <a:xfrm>
+            <a:off x="868680" y="3429000"/>
+            <a:ext cx="512064" cy="512064"/>
+          </a:xfrm>
+          <a:prstGeom prst="rect">
+            <a:avLst/>
+          </a:prstGeom>
+          <a:noFill/>
+        </p:spPr>
+        <p:txBody>
+          <a:bodyPr wrap="square" lIns="0" rIns="0" tIns="0" bIns="0" anchor="ctr">
+            <a:spAutoFit/>
+          </a:bodyPr>
+          <a:lstStyle/>
+          <a:p>
+            <a:pPr algn="ctr"/>
+            <a:r>
+              <a:rPr sz="2000" b="1">
+                <a:solidFill>
+                  <a:srgbClr val="FFFFFF"/>
+                </a:solidFill>
+                <a:latin typeface="Carlito"/>
+              </a:rPr>
+              <a:t>2</a:t>
+            </a:r>
+          </a:p>
+        </p:txBody>
+      </p:sp>
+      <p:sp>
+        <p:nvSpPr>
+          <p:cNvPr id="12" name="TextBox 11"/>
+          <p:cNvSpPr txBox="1"/>
+          <p:nvPr/>
+        </p:nvSpPr>
+        <p:spPr>
+          <a:xfrm>
+            <a:off x="1645920" y="3172968"/>
+            <a:ext cx="9601200" cy="411480"/>
+          </a:xfrm>
+          <a:prstGeom prst="rect">
+            <a:avLst/>
+          </a:prstGeom>
+          <a:noFill/>
+        </p:spPr>
+        <p:txBody>
+          <a:bodyPr wrap="square" lIns="0" rIns="0" tIns="0" bIns="0" anchor="t">
+            <a:spAutoFit/>
+          </a:bodyPr>
+          <a:lstStyle/>
+          <a:p>
+            <a:pPr algn="l"/>
+            <a:r>
+              <a:rPr sz="2250" b="1">
+                <a:solidFill>
+                  <a:srgbClr val="0B1F2A"/>
+                </a:solidFill>
+                <a:latin typeface="Carlito"/>
+              </a:rPr>
+              <a:t>Temperature converter</a:t>
+            </a:r>
+          </a:p>
+        </p:txBody>
+      </p:sp>
+      <p:sp>
+        <p:nvSpPr>
+          <p:cNvPr id="13" name="TextBox 12"/>
+          <p:cNvSpPr txBox="1"/>
+          <p:nvPr/>
+        </p:nvSpPr>
+        <p:spPr>
+          <a:xfrm>
+            <a:off x="1645920" y="3538728"/>
+            <a:ext cx="9601200" cy="365760"/>
+          </a:xfrm>
+          <a:prstGeom prst="rect">
+            <a:avLst/>
+          </a:prstGeom>
+          <a:noFill/>
+        </p:spPr>
+        <p:txBody>
+          <a:bodyPr wrap="square" lIns="0" rIns="0" tIns="0" bIns="0" anchor="t">
+            <a:spAutoFit/>
+          </a:bodyPr>
+          <a:lstStyle/>
+          <a:p>
+            <a:pPr algn="l"/>
+            <a:r>
+              <a:rPr sz="1850" b="0">
+                <a:solidFill>
+                  <a:srgbClr val="6B7F8A"/>
+                </a:solidFill>
+                <a:latin typeface="Carlito"/>
+              </a:rPr>
+              <a:t>A function that returns Fahrenheit, then say Hot or not</a:t>
+            </a:r>
+          </a:p>
+        </p:txBody>
+      </p:sp>
+      <p:sp>
+        <p:nvSpPr>
+          <p:cNvPr id="14" name="Rounded Rectangle 13"/>
+          <p:cNvSpPr/>
+          <p:nvPr/>
+        </p:nvSpPr>
+        <p:spPr>
+          <a:xfrm>
+            <a:off x="612648" y="4453128"/>
+            <a:ext cx="10972800" cy="1207008"/>
+          </a:xfrm>
+          <a:prstGeom prst="roundRect">
+            <a:avLst>
+              <a:gd name="adj" fmla="val 12000"/>
+            </a:avLst>
+          </a:prstGeom>
+          <a:solidFill>
+            <a:srgbClr val="EEF3F5"/>
+          </a:solidFill>
+          <a:ln>
+            <a:noFill/>
+          </a:ln>
+          <a:effectLst/>
+        </p:spPr>
+        <p:style>
+          <a:lnRef idx="1">
+            <a:schemeClr val="accent1"/>
+          </a:lnRef>
+          <a:fillRef idx="3">
+            <a:schemeClr val="accent1"/>
+          </a:fillRef>
+          <a:effectRef idx="2">
+            <a:schemeClr val="accent1"/>
+          </a:effectRef>
+          <a:fontRef idx="minor">
+            <a:schemeClr val="lt1"/>
+          </a:fontRef>
+        </p:style>
+        <p:txBody>
+          <a:bodyPr rtlCol="0" anchor="ctr"/>
+          <a:lstStyle/>
+          <a:p>
+            <a:pPr algn="ctr"/>
+          </a:p>
+        </p:txBody>
+      </p:sp>
+      <p:sp>
+        <p:nvSpPr>
+          <p:cNvPr id="15" name="Oval 14"/>
+          <p:cNvSpPr/>
+          <p:nvPr/>
+        </p:nvSpPr>
+        <p:spPr>
+          <a:xfrm>
+            <a:off x="868680" y="4800600"/>
+            <a:ext cx="512064" cy="512064"/>
+          </a:xfrm>
+          <a:prstGeom prst="ellipse">
+            <a:avLst/>
+          </a:prstGeom>
+          <a:solidFill>
+            <a:srgbClr val="3B82C4"/>
+          </a:solidFill>
+          <a:ln>
+            <a:noFill/>
+          </a:ln>
+          <a:effectLst/>
+        </p:spPr>
+        <p:style>
+          <a:lnRef idx="1">
+            <a:schemeClr val="accent1"/>
+          </a:lnRef>
+          <a:fillRef idx="3">
+            <a:schemeClr val="accent1"/>
+          </a:fillRef>
+          <a:effectRef idx="2">
+            <a:schemeClr val="accent1"/>
+          </a:effectRef>
+          <a:fontRef idx="minor">
+            <a:schemeClr val="lt1"/>
+          </a:fontRef>
+        </p:style>
+        <p:txBody>
+          <a:bodyPr rtlCol="0" anchor="ctr"/>
+          <a:lstStyle/>
+          <a:p>
+            <a:pPr algn="ctr"/>
+          </a:p>
+        </p:txBody>
+      </p:sp>
+      <p:sp>
+        <p:nvSpPr>
+          <p:cNvPr id="16" name="TextBox 15"/>
+          <p:cNvSpPr txBox="1"/>
+          <p:nvPr/>
+        </p:nvSpPr>
+        <p:spPr>
+          <a:xfrm>
+            <a:off x="868680" y="4800600"/>
+            <a:ext cx="512064" cy="512064"/>
+          </a:xfrm>
+          <a:prstGeom prst="rect">
+            <a:avLst/>
+          </a:prstGeom>
+          <a:noFill/>
+        </p:spPr>
+        <p:txBody>
+          <a:bodyPr wrap="square" lIns="0" rIns="0" tIns="0" bIns="0" anchor="ctr">
+            <a:spAutoFit/>
+          </a:bodyPr>
+          <a:lstStyle/>
+          <a:p>
+            <a:pPr algn="ctr"/>
+            <a:r>
+              <a:rPr sz="2000" b="1">
+                <a:solidFill>
+                  <a:srgbClr val="FFFFFF"/>
+                </a:solidFill>
+                <a:latin typeface="Carlito"/>
+              </a:rPr>
+              <a:t>3</a:t>
+            </a:r>
+          </a:p>
+        </p:txBody>
+      </p:sp>
+      <p:sp>
+        <p:nvSpPr>
+          <p:cNvPr id="17" name="TextBox 16"/>
+          <p:cNvSpPr txBox="1"/>
+          <p:nvPr/>
+        </p:nvSpPr>
+        <p:spPr>
+          <a:xfrm>
+            <a:off x="1645920" y="4544568"/>
+            <a:ext cx="9601200" cy="411480"/>
+          </a:xfrm>
+          <a:prstGeom prst="rect">
+            <a:avLst/>
+          </a:prstGeom>
+          <a:noFill/>
+        </p:spPr>
+        <p:txBody>
+          <a:bodyPr wrap="square" lIns="0" rIns="0" tIns="0" bIns="0" anchor="t">
+            <a:spAutoFit/>
+          </a:bodyPr>
+          <a:lstStyle/>
+          <a:p>
+            <a:pPr algn="l"/>
+            <a:r>
+              <a:rPr sz="2250" b="1">
+                <a:solidFill>
+                  <a:srgbClr val="0B1F2A"/>
+                </a:solidFill>
+                <a:latin typeface="Carlito"/>
+              </a:rPr>
+              <a:t>Guess the number</a:t>
+            </a:r>
+          </a:p>
+        </p:txBody>
+      </p:sp>
+      <p:sp>
+        <p:nvSpPr>
+          <p:cNvPr id="18" name="TextBox 17"/>
+          <p:cNvSpPr txBox="1"/>
+          <p:nvPr/>
+        </p:nvSpPr>
+        <p:spPr>
+          <a:xfrm>
+            <a:off x="1645920" y="4910328"/>
+            <a:ext cx="9601200" cy="365760"/>
+          </a:xfrm>
+          <a:prstGeom prst="rect">
+            <a:avLst/>
+          </a:prstGeom>
+          <a:noFill/>
+        </p:spPr>
+        <p:txBody>
+          <a:bodyPr wrap="square" lIns="0" rIns="0" tIns="0" bIns="0" anchor="t">
+            <a:spAutoFit/>
+          </a:bodyPr>
+          <a:lstStyle/>
+          <a:p>
+            <a:pPr algn="l"/>
+            <a:r>
+              <a:rPr sz="1850" b="0">
+                <a:solidFill>
+                  <a:srgbClr val="6B7F8A"/>
+                </a:solidFill>
+                <a:latin typeface="Carlito"/>
+              </a:rPr>
+              <a:t>Loop until the guess is right and count the tries</a:t>
+            </a:r>
+          </a:p>
+        </p:txBody>
+      </p:sp>
+      <p:sp>
+        <p:nvSpPr>
+          <p:cNvPr id="19" name="TextBox 18"/>
+          <p:cNvSpPr txBox="1"/>
+          <p:nvPr/>
+        </p:nvSpPr>
+        <p:spPr>
+          <a:xfrm>
+            <a:off x="612648" y="5989320"/>
+            <a:ext cx="10515600" cy="365760"/>
+          </a:xfrm>
+          <a:prstGeom prst="rect">
+            <a:avLst/>
+          </a:prstGeom>
+          <a:noFill/>
+        </p:spPr>
+        <p:txBody>
+          <a:bodyPr wrap="square" lIns="0" rIns="0" tIns="0" bIns="0" anchor="t">
+            <a:spAutoFit/>
+          </a:bodyPr>
+          <a:lstStyle/>
+          <a:p>
+            <a:pPr algn="l"/>
+            <a:r>
+              <a:rPr sz="1850" b="0">
+                <a:solidFill>
+                  <a:srgbClr val="6B7F8A"/>
+                </a:solidFill>
+                <a:latin typeface="Carlito"/>
+              </a:rPr>
+              <a:t>Files are in the homework folder. Push your work to your GitHub repo.</a:t>
+            </a:r>
           </a:p>
         </p:txBody>
       </p:sp>
@@ -13096,508 +13738,43 @@
       <p:grpSpPr/>
       <p:sp>
         <p:nvSpPr>
-          <p:cNvPr id="2" name="Title"/>
-          <p:cNvSpPr txBox="1"/>
-          <p:nvPr/>
-        </p:nvSpPr>
-        <p:spPr>
-          <a:xfrm>
-            <a:off x="612648" y="594360"/>
-            <a:ext cx="10972800" cy="612648"/>
-          </a:xfrm>
-          <a:prstGeom prst="rect">
-            <a:avLst/>
-          </a:prstGeom>
-          <a:noFill/>
-        </p:spPr>
-        <p:txBody>
-          <a:bodyPr wrap="square" lIns="0" rIns="0" tIns="0" bIns="0" anchor="t">
-            <a:spAutoFit/>
-          </a:bodyPr>
-          <a:lstStyle/>
-          <a:p>
-            <a:pPr algn="l"/>
-            <a:r>
-              <a:rPr sz="4000" b="1">
-                <a:solidFill>
-                  <a:srgbClr val="0B1F2A"/>
-                </a:solidFill>
-                <a:latin typeface="Caladea Bold"/>
-              </a:rPr>
-              <a:t>8. What is a server?</a:t>
-            </a:r>
-          </a:p>
-        </p:txBody>
-      </p:sp>
-      <p:sp>
-        <p:nvSpPr>
-          <p:cNvPr id="3" name="SlideNo"/>
-          <p:cNvSpPr txBox="1"/>
-          <p:nvPr/>
-        </p:nvSpPr>
-        <p:spPr>
-          <a:xfrm>
-            <a:off x="11219688" y="6373368"/>
-            <a:ext cx="694944" cy="256032"/>
-          </a:xfrm>
-          <a:prstGeom prst="rect">
-            <a:avLst/>
-          </a:prstGeom>
-          <a:noFill/>
-        </p:spPr>
-        <p:txBody>
-          <a:bodyPr wrap="square" lIns="0" rIns="0" tIns="0" bIns="0" anchor="t">
-            <a:spAutoFit/>
-          </a:bodyPr>
-          <a:lstStyle/>
-          <a:p>
-            <a:pPr algn="l"/>
-            <a:r>
-              <a:rPr sz="1350" b="0">
-                <a:solidFill>
-                  <a:srgbClr val="6B7F8A"/>
-                </a:solidFill>
-                <a:latin typeface="Carlito"/>
-              </a:rPr>
-              <a:t>23</a:t>
-            </a:r>
-          </a:p>
-        </p:txBody>
-      </p:sp>
-      <p:sp>
-        <p:nvSpPr>
-          <p:cNvPr id="4" name="Rounded Rectangle 3"/>
-          <p:cNvSpPr/>
-          <p:nvPr/>
-        </p:nvSpPr>
-        <p:spPr>
-          <a:xfrm>
-            <a:off x="612648" y="1828800"/>
-            <a:ext cx="3291840" cy="2194560"/>
-          </a:xfrm>
-          <a:prstGeom prst="roundRect">
-            <a:avLst>
-              <a:gd name="adj" fmla="val 12000"/>
-            </a:avLst>
-          </a:prstGeom>
-          <a:solidFill>
-            <a:srgbClr val="0B1F2A"/>
-          </a:solidFill>
-          <a:ln>
-            <a:noFill/>
-          </a:ln>
-          <a:effectLst/>
-        </p:spPr>
-        <p:style>
-          <a:lnRef idx="1">
-            <a:schemeClr val="accent1"/>
-          </a:lnRef>
-          <a:fillRef idx="3">
-            <a:schemeClr val="accent1"/>
-          </a:fillRef>
-          <a:effectRef idx="2">
-            <a:schemeClr val="accent1"/>
-          </a:effectRef>
-          <a:fontRef idx="minor">
-            <a:schemeClr val="lt1"/>
-          </a:fontRef>
-        </p:style>
-        <p:txBody>
-          <a:bodyPr rtlCol="0" anchor="ctr"/>
-          <a:lstStyle/>
-          <a:p>
-            <a:pPr algn="ctr"/>
-          </a:p>
-        </p:txBody>
-      </p:sp>
-      <p:sp>
-        <p:nvSpPr>
-          <p:cNvPr id="5" name="TextBox 4"/>
-          <p:cNvSpPr txBox="1"/>
-          <p:nvPr/>
-        </p:nvSpPr>
-        <p:spPr>
-          <a:xfrm>
-            <a:off x="612648" y="1828800"/>
-            <a:ext cx="3291840" cy="2194560"/>
-          </a:xfrm>
-          <a:prstGeom prst="rect">
-            <a:avLst/>
-          </a:prstGeom>
-          <a:noFill/>
-        </p:spPr>
-        <p:txBody>
-          <a:bodyPr wrap="square" lIns="0" rIns="0" tIns="0" bIns="0" anchor="ctr">
-            <a:spAutoFit/>
-          </a:bodyPr>
-          <a:lstStyle/>
-          <a:p>
-            <a:pPr algn="ctr"/>
-            <a:r>
-              <a:rPr sz="2400" b="1">
+          <p:cNvPr id="2" name="Text 0"/>
+          <p:cNvSpPr/>
+          <p:nvPr/>
+        </p:nvSpPr>
+        <p:spPr>
+          <a:xfrm>
+            <a:off x="1256475" y="2314377"/>
+            <a:ext cx="10484778" cy="1950641"/>
+          </a:xfrm>
+          <a:prstGeom prst="rect">
+            <a:avLst/>
+          </a:prstGeom>
+          <a:noFill/>
+          <a:ln/>
+        </p:spPr>
+        <p:txBody>
+          <a:bodyPr wrap="none" lIns="0" tIns="0" rIns="0" bIns="0" rtlCol="0" anchor="t"/>
+          <a:lstStyle/>
+          <a:p>
+            <a:pPr algn="l" indent="0" marL="0">
+              <a:lnSpc>
+                <a:spcPct val="100000"/>
+              </a:lnSpc>
+              <a:buNone/>
+            </a:pPr>
+            <a:r>
+              <a:rPr lang="en-US" sz="12800" b="1" spc="141" kern="100" dirty="0">
                 <a:solidFill>
                   <a:srgbClr val="FFFFFF"/>
                 </a:solidFill>
-                <a:latin typeface="Carlito"/>
-              </a:rPr>
-              <a:t>Client</a:t>
-            </a:r>
-          </a:p>
-          <a:p>
-            <a:pPr algn="ctr"/>
-            <a:r>
-              <a:rPr sz="2400" b="1">
-                <a:solidFill>
-                  <a:srgbClr val="FFFFFF"/>
-                </a:solidFill>
-                <a:latin typeface="Carlito"/>
-              </a:rPr>
-              <a:t>your browser</a:t>
-            </a:r>
-          </a:p>
-        </p:txBody>
-      </p:sp>
-      <p:sp>
-        <p:nvSpPr>
-          <p:cNvPr id="6" name="Rounded Rectangle 5"/>
-          <p:cNvSpPr/>
-          <p:nvPr/>
-        </p:nvSpPr>
-        <p:spPr>
-          <a:xfrm>
-            <a:off x="8293608" y="1828800"/>
-            <a:ext cx="3291840" cy="2194560"/>
-          </a:xfrm>
-          <a:prstGeom prst="roundRect">
-            <a:avLst>
-              <a:gd name="adj" fmla="val 12000"/>
-            </a:avLst>
-          </a:prstGeom>
-          <a:solidFill>
-            <a:srgbClr val="1FA67A"/>
-          </a:solidFill>
-          <a:ln>
-            <a:noFill/>
-          </a:ln>
-          <a:effectLst/>
-        </p:spPr>
-        <p:style>
-          <a:lnRef idx="1">
-            <a:schemeClr val="accent1"/>
-          </a:lnRef>
-          <a:fillRef idx="3">
-            <a:schemeClr val="accent1"/>
-          </a:fillRef>
-          <a:effectRef idx="2">
-            <a:schemeClr val="accent1"/>
-          </a:effectRef>
-          <a:fontRef idx="minor">
-            <a:schemeClr val="lt1"/>
-          </a:fontRef>
-        </p:style>
-        <p:txBody>
-          <a:bodyPr rtlCol="0" anchor="ctr"/>
-          <a:lstStyle/>
-          <a:p>
-            <a:pPr algn="ctr"/>
-          </a:p>
-        </p:txBody>
-      </p:sp>
-      <p:sp>
-        <p:nvSpPr>
-          <p:cNvPr id="7" name="TextBox 6"/>
-          <p:cNvSpPr txBox="1"/>
-          <p:nvPr/>
-        </p:nvSpPr>
-        <p:spPr>
-          <a:xfrm>
-            <a:off x="8293608" y="1828800"/>
-            <a:ext cx="3291840" cy="2194560"/>
-          </a:xfrm>
-          <a:prstGeom prst="rect">
-            <a:avLst/>
-          </a:prstGeom>
-          <a:noFill/>
-        </p:spPr>
-        <p:txBody>
-          <a:bodyPr wrap="square" lIns="0" rIns="0" tIns="0" bIns="0" anchor="ctr">
-            <a:spAutoFit/>
-          </a:bodyPr>
-          <a:lstStyle/>
-          <a:p>
-            <a:pPr algn="ctr"/>
-            <a:r>
-              <a:rPr sz="2400" b="1">
-                <a:solidFill>
-                  <a:srgbClr val="FFFFFF"/>
-                </a:solidFill>
-                <a:latin typeface="Carlito"/>
-              </a:rPr>
-              <a:t>Server</a:t>
-            </a:r>
-          </a:p>
-          <a:p>
-            <a:pPr algn="ctr"/>
-            <a:r>
-              <a:rPr sz="2400" b="1">
-                <a:solidFill>
-                  <a:srgbClr val="FFFFFF"/>
-                </a:solidFill>
-                <a:latin typeface="Carlito"/>
-              </a:rPr>
-              <a:t>listens on a port</a:t>
-            </a:r>
-          </a:p>
-        </p:txBody>
-      </p:sp>
-      <p:sp>
-        <p:nvSpPr>
-          <p:cNvPr id="8" name="Right Arrow 7"/>
-          <p:cNvSpPr/>
-          <p:nvPr/>
-        </p:nvSpPr>
-        <p:spPr>
-          <a:xfrm>
-            <a:off x="4114800" y="2148840"/>
-            <a:ext cx="3931920" cy="640080"/>
-          </a:xfrm>
-          <a:prstGeom prst="rightArrow">
-            <a:avLst/>
-          </a:prstGeom>
-          <a:solidFill>
-            <a:srgbClr val="3B82C4"/>
-          </a:solidFill>
-          <a:ln>
-            <a:noFill/>
-          </a:ln>
-          <a:effectLst/>
-        </p:spPr>
-        <p:style>
-          <a:lnRef idx="1">
-            <a:schemeClr val="accent1"/>
-          </a:lnRef>
-          <a:fillRef idx="3">
-            <a:schemeClr val="accent1"/>
-          </a:fillRef>
-          <a:effectRef idx="2">
-            <a:schemeClr val="accent1"/>
-          </a:effectRef>
-          <a:fontRef idx="minor">
-            <a:schemeClr val="lt1"/>
-          </a:fontRef>
-        </p:style>
-        <p:txBody>
-          <a:bodyPr rtlCol="0" anchor="ctr"/>
-          <a:lstStyle/>
-          <a:p>
-            <a:pPr algn="ctr"/>
-          </a:p>
-        </p:txBody>
-      </p:sp>
-      <p:sp>
-        <p:nvSpPr>
-          <p:cNvPr id="9" name="TextBox 8"/>
-          <p:cNvSpPr txBox="1"/>
-          <p:nvPr/>
-        </p:nvSpPr>
-        <p:spPr>
-          <a:xfrm>
-            <a:off x="4114800" y="1828800"/>
-            <a:ext cx="3931920" cy="320040"/>
-          </a:xfrm>
-          <a:prstGeom prst="rect">
-            <a:avLst/>
-          </a:prstGeom>
-          <a:noFill/>
-        </p:spPr>
-        <p:txBody>
-          <a:bodyPr wrap="square" lIns="0" rIns="0" tIns="0" bIns="0" anchor="t">
-            <a:spAutoFit/>
-          </a:bodyPr>
-          <a:lstStyle/>
-          <a:p>
-            <a:pPr algn="ctr"/>
-            <a:r>
-              <a:rPr sz="2000" b="1">
-                <a:solidFill>
-                  <a:srgbClr val="0B1F2A"/>
-                </a:solidFill>
-                <a:latin typeface="Carlito"/>
-              </a:rPr>
-              <a:t>Request</a:t>
-            </a:r>
-          </a:p>
-        </p:txBody>
-      </p:sp>
-      <p:sp>
-        <p:nvSpPr>
-          <p:cNvPr id="10" name="Left Arrow 9"/>
-          <p:cNvSpPr/>
-          <p:nvPr/>
-        </p:nvSpPr>
-        <p:spPr>
-          <a:xfrm>
-            <a:off x="4114800" y="3108960"/>
-            <a:ext cx="3931920" cy="640080"/>
-          </a:xfrm>
-          <a:prstGeom prst="leftArrow">
-            <a:avLst/>
-          </a:prstGeom>
-          <a:solidFill>
-            <a:srgbClr val="F2B134"/>
-          </a:solidFill>
-          <a:ln>
-            <a:noFill/>
-          </a:ln>
-          <a:effectLst/>
-        </p:spPr>
-        <p:style>
-          <a:lnRef idx="1">
-            <a:schemeClr val="accent1"/>
-          </a:lnRef>
-          <a:fillRef idx="3">
-            <a:schemeClr val="accent1"/>
-          </a:fillRef>
-          <a:effectRef idx="2">
-            <a:schemeClr val="accent1"/>
-          </a:effectRef>
-          <a:fontRef idx="minor">
-            <a:schemeClr val="lt1"/>
-          </a:fontRef>
-        </p:style>
-        <p:txBody>
-          <a:bodyPr rtlCol="0" anchor="ctr"/>
-          <a:lstStyle/>
-          <a:p>
-            <a:pPr algn="ctr"/>
-          </a:p>
-        </p:txBody>
-      </p:sp>
-      <p:sp>
-        <p:nvSpPr>
-          <p:cNvPr id="11" name="TextBox 10"/>
-          <p:cNvSpPr txBox="1"/>
-          <p:nvPr/>
-        </p:nvSpPr>
-        <p:spPr>
-          <a:xfrm>
-            <a:off x="4114800" y="3794760"/>
-            <a:ext cx="3931920" cy="320040"/>
-          </a:xfrm>
-          <a:prstGeom prst="rect">
-            <a:avLst/>
-          </a:prstGeom>
-          <a:noFill/>
-        </p:spPr>
-        <p:txBody>
-          <a:bodyPr wrap="square" lIns="0" rIns="0" tIns="0" bIns="0" anchor="t">
-            <a:spAutoFit/>
-          </a:bodyPr>
-          <a:lstStyle/>
-          <a:p>
-            <a:pPr algn="ctr"/>
-            <a:r>
-              <a:rPr sz="2000" b="1">
-                <a:solidFill>
-                  <a:srgbClr val="0B1F2A"/>
-                </a:solidFill>
-                <a:latin typeface="Carlito"/>
-              </a:rPr>
-              <a:t>Response</a:t>
-            </a:r>
-          </a:p>
-        </p:txBody>
-      </p:sp>
-      <p:sp>
-        <p:nvSpPr>
-          <p:cNvPr id="12" name="Rounded Rectangle 11"/>
-          <p:cNvSpPr/>
-          <p:nvPr/>
-        </p:nvSpPr>
-        <p:spPr>
-          <a:xfrm>
-            <a:off x="612648" y="4480560"/>
-            <a:ext cx="10972800" cy="1371600"/>
-          </a:xfrm>
-          <a:prstGeom prst="roundRect">
-            <a:avLst>
-              <a:gd name="adj" fmla="val 12000"/>
-            </a:avLst>
-          </a:prstGeom>
-          <a:solidFill>
-            <a:srgbClr val="EEF3F5"/>
-          </a:solidFill>
-          <a:ln>
-            <a:noFill/>
-          </a:ln>
-          <a:effectLst/>
-        </p:spPr>
-        <p:style>
-          <a:lnRef idx="1">
-            <a:schemeClr val="accent1"/>
-          </a:lnRef>
-          <a:fillRef idx="3">
-            <a:schemeClr val="accent1"/>
-          </a:fillRef>
-          <a:effectRef idx="2">
-            <a:schemeClr val="accent1"/>
-          </a:effectRef>
-          <a:fontRef idx="minor">
-            <a:schemeClr val="lt1"/>
-          </a:fontRef>
-        </p:style>
-        <p:txBody>
-          <a:bodyPr rtlCol="0" anchor="ctr"/>
-          <a:lstStyle/>
-          <a:p>
-            <a:pPr algn="ctr"/>
-          </a:p>
-        </p:txBody>
-      </p:sp>
-      <p:sp>
-        <p:nvSpPr>
-          <p:cNvPr id="13" name="TextBox 12"/>
-          <p:cNvSpPr txBox="1"/>
-          <p:nvPr/>
-        </p:nvSpPr>
-        <p:spPr>
-          <a:xfrm>
-            <a:off x="914400" y="4480560"/>
-            <a:ext cx="10424160" cy="1371600"/>
-          </a:xfrm>
-          <a:prstGeom prst="rect">
-            <a:avLst/>
-          </a:prstGeom>
-          <a:noFill/>
-        </p:spPr>
-        <p:txBody>
-          <a:bodyPr wrap="square" lIns="0" rIns="0" tIns="0" bIns="0" anchor="ctr">
-            <a:spAutoFit/>
-          </a:bodyPr>
-          <a:lstStyle/>
-          <a:p>
-            <a:pPr algn="l"/>
-            <a:r>
-              <a:rPr sz="2250" b="0">
-                <a:solidFill>
-                  <a:srgbClr val="0B1F2A"/>
-                </a:solidFill>
-                <a:latin typeface="Carlito"/>
-              </a:rPr>
-              <a:t>A server is a program that listens on a port and answers requests.</a:t>
-            </a:r>
-          </a:p>
-          <a:p>
-            <a:pPr algn="l"/>
-            <a:r>
-              <a:rPr sz="2250" b="0">
-                <a:solidFill>
-                  <a:srgbClr val="0B1F2A"/>
-                </a:solidFill>
-                <a:latin typeface="Carlito"/>
-              </a:rPr>
-              <a:t>http://127.0.0.1:8000  =  this computer, port 8000</a:t>
-            </a:r>
+                <a:latin typeface="Caladea Bold" pitchFamily="34" charset="0"/>
+                <a:ea typeface="Caladea Bold" pitchFamily="34" charset="-122"/>
+                <a:cs typeface="Caladea Bold" pitchFamily="34" charset="-120"/>
+              </a:rPr>
+              <a:t>Q&amp;A</a:t>
+            </a:r>
+            <a:endParaRPr lang="en-US" sz="12800" dirty="0"/>
           </a:p>
         </p:txBody>
       </p:sp>
@@ -13649,7 +13826,7 @@
                 </a:solidFill>
                 <a:latin typeface="Caladea Bold"/>
               </a:rPr>
-              <a:t>9. Your first FastAPI server</a:t>
+              <a:t>The 8-week roadmap</a:t>
             </a:r>
           </a:p>
         </p:txBody>
@@ -13698,7 +13875,7 @@
         <p:spPr>
           <a:xfrm>
             <a:off x="612648" y="1709928"/>
-            <a:ext cx="4937760" cy="822960"/>
+            <a:ext cx="5367528" cy="978408"/>
           </a:xfrm>
           <a:prstGeom prst="roundRect">
             <a:avLst>
@@ -13706,7 +13883,7 @@
             </a:avLst>
           </a:prstGeom>
           <a:solidFill>
-            <a:srgbClr val="EEF3F5"/>
+            <a:srgbClr val="1FA67A"/>
           </a:solidFill>
           <a:ln>
             <a:noFill/>
@@ -13743,14 +13920,14 @@
         </p:nvSpPr>
         <p:spPr>
           <a:xfrm>
-            <a:off x="841248" y="2020824"/>
-            <a:ext cx="201168" cy="201168"/>
+            <a:off x="850392" y="1920240"/>
+            <a:ext cx="557784" cy="557784"/>
           </a:xfrm>
           <a:prstGeom prst="ellipse">
             <a:avLst/>
           </a:prstGeom>
           <a:solidFill>
-            <a:srgbClr val="1FA67A"/>
+            <a:srgbClr val="FFFFFF"/>
           </a:solidFill>
           <a:ln>
             <a:noFill/>
@@ -13787,8 +13964,8 @@
         </p:nvSpPr>
         <p:spPr>
           <a:xfrm>
-            <a:off x="1252728" y="1709928"/>
-            <a:ext cx="4069080" cy="822960"/>
+            <a:off x="850392" y="1920240"/>
+            <a:ext cx="557784" cy="557784"/>
           </a:xfrm>
           <a:prstGeom prst="rect">
             <a:avLst/>
@@ -13801,37 +13978,72 @@
           </a:bodyPr>
           <a:lstStyle/>
           <a:p>
-            <a:pPr algn="l"/>
-            <a:r>
-              <a:rPr sz="2000" b="0">
-                <a:solidFill>
-                  <a:srgbClr val="0B1F2A"/>
+            <a:pPr algn="ctr"/>
+            <a:r>
+              <a:rPr sz="2000" b="1">
+                <a:solidFill>
+                  <a:srgbClr val="1FA67A"/>
                 </a:solidFill>
                 <a:latin typeface="Carlito"/>
               </a:rPr>
-              <a:t>FastAPI turns Python functions into routes</a:t>
-            </a:r>
-          </a:p>
-        </p:txBody>
-      </p:sp>
-      <p:sp>
-        <p:nvSpPr>
-          <p:cNvPr id="7" name="Rounded Rectangle 6"/>
-          <p:cNvSpPr/>
-          <p:nvPr/>
-        </p:nvSpPr>
-        <p:spPr>
-          <a:xfrm>
-            <a:off x="612648" y="2715768"/>
-            <a:ext cx="4937760" cy="822960"/>
+              <a:t>1</a:t>
+            </a:r>
+          </a:p>
+        </p:txBody>
+      </p:sp>
+      <p:sp>
+        <p:nvSpPr>
+          <p:cNvPr id="7" name="TextBox 6"/>
+          <p:cNvSpPr txBox="1"/>
+          <p:nvPr/>
+        </p:nvSpPr>
+        <p:spPr>
+          <a:xfrm>
+            <a:off x="1645919" y="1709928"/>
+            <a:ext cx="3108960" cy="978408"/>
+          </a:xfrm>
+          <a:prstGeom prst="rect">
+            <a:avLst/>
+          </a:prstGeom>
+          <a:noFill/>
+        </p:spPr>
+        <p:txBody>
+          <a:bodyPr wrap="square" lIns="0" rIns="0" tIns="0" bIns="0" anchor="ctr">
+            <a:spAutoFit/>
+          </a:bodyPr>
+          <a:lstStyle/>
+          <a:p>
+            <a:pPr algn="l"/>
+            <a:r>
+              <a:rPr sz="2250" b="1">
+                <a:solidFill>
+                  <a:srgbClr val="FFFFFF"/>
+                </a:solidFill>
+                <a:latin typeface="Carlito"/>
+              </a:rPr>
+              <a:t>Setup &amp; Tooling</a:t>
+            </a:r>
+          </a:p>
+        </p:txBody>
+      </p:sp>
+      <p:sp>
+        <p:nvSpPr>
+          <p:cNvPr id="8" name="Rounded Rectangle 7"/>
+          <p:cNvSpPr/>
+          <p:nvPr/>
+        </p:nvSpPr>
+        <p:spPr>
+          <a:xfrm>
+            <a:off x="4507992" y="2011680"/>
+            <a:ext cx="1344168" cy="365760"/>
           </a:xfrm>
           <a:prstGeom prst="roundRect">
             <a:avLst>
-              <a:gd name="adj" fmla="val 12000"/>
+              <a:gd name="adj" fmla="val 30000"/>
             </a:avLst>
           </a:prstGeom>
           <a:solidFill>
-            <a:srgbClr val="EEF3F5"/>
+            <a:srgbClr val="0B1F2A"/>
           </a:solidFill>
           <a:ln>
             <a:noFill/>
@@ -13862,17 +14074,54 @@
       </p:sp>
       <p:sp>
         <p:nvSpPr>
-          <p:cNvPr id="8" name="Oval 7"/>
-          <p:cNvSpPr/>
-          <p:nvPr/>
-        </p:nvSpPr>
-        <p:spPr>
-          <a:xfrm>
-            <a:off x="841248" y="3026664"/>
-            <a:ext cx="201168" cy="201168"/>
-          </a:xfrm>
-          <a:prstGeom prst="ellipse">
-            <a:avLst/>
+          <p:cNvPr id="9" name="TextBox 8"/>
+          <p:cNvSpPr txBox="1"/>
+          <p:nvPr/>
+        </p:nvSpPr>
+        <p:spPr>
+          <a:xfrm>
+            <a:off x="4507992" y="2011680"/>
+            <a:ext cx="1344168" cy="365760"/>
+          </a:xfrm>
+          <a:prstGeom prst="rect">
+            <a:avLst/>
+          </a:prstGeom>
+          <a:noFill/>
+        </p:spPr>
+        <p:txBody>
+          <a:bodyPr wrap="square" lIns="0" rIns="0" tIns="0" bIns="0" anchor="ctr">
+            <a:spAutoFit/>
+          </a:bodyPr>
+          <a:lstStyle/>
+          <a:p>
+            <a:pPr algn="ctr"/>
+            <a:r>
+              <a:rPr sz="1600" b="1">
+                <a:solidFill>
+                  <a:srgbClr val="FFFFFF"/>
+                </a:solidFill>
+                <a:latin typeface="Carlito"/>
+              </a:rPr>
+              <a:t>Complete</a:t>
+            </a:r>
+          </a:p>
+        </p:txBody>
+      </p:sp>
+      <p:sp>
+        <p:nvSpPr>
+          <p:cNvPr id="10" name="Rounded Rectangle 9"/>
+          <p:cNvSpPr/>
+          <p:nvPr/>
+        </p:nvSpPr>
+        <p:spPr>
+          <a:xfrm>
+            <a:off x="612648" y="2871216"/>
+            <a:ext cx="5367528" cy="978408"/>
+          </a:xfrm>
+          <a:prstGeom prst="roundRect">
+            <a:avLst>
+              <a:gd name="adj" fmla="val 12000"/>
+            </a:avLst>
           </a:prstGeom>
           <a:solidFill>
             <a:srgbClr val="1FA67A"/>
@@ -13906,57 +14155,20 @@
       </p:sp>
       <p:sp>
         <p:nvSpPr>
-          <p:cNvPr id="9" name="TextBox 8"/>
-          <p:cNvSpPr txBox="1"/>
-          <p:nvPr/>
-        </p:nvSpPr>
-        <p:spPr>
-          <a:xfrm>
-            <a:off x="1252728" y="2715768"/>
-            <a:ext cx="4069080" cy="822960"/>
-          </a:xfrm>
-          <a:prstGeom prst="rect">
-            <a:avLst/>
-          </a:prstGeom>
-          <a:noFill/>
-        </p:spPr>
-        <p:txBody>
-          <a:bodyPr wrap="square" lIns="0" rIns="0" tIns="0" bIns="0" anchor="ctr">
-            <a:spAutoFit/>
-          </a:bodyPr>
-          <a:lstStyle/>
-          <a:p>
-            <a:pPr algn="l"/>
-            <a:r>
-              <a:rPr sz="2000" b="0">
-                <a:solidFill>
-                  <a:srgbClr val="0B1F2A"/>
-                </a:solidFill>
-                <a:latin typeface="Carlito"/>
-              </a:rPr>
-              <a:t>@app.get makes a route</a:t>
-            </a:r>
-          </a:p>
-        </p:txBody>
-      </p:sp>
-      <p:sp>
-        <p:nvSpPr>
-          <p:cNvPr id="10" name="Rounded Rectangle 9"/>
-          <p:cNvSpPr/>
-          <p:nvPr/>
-        </p:nvSpPr>
-        <p:spPr>
-          <a:xfrm>
-            <a:off x="612648" y="3721608"/>
-            <a:ext cx="4937760" cy="822960"/>
-          </a:xfrm>
-          <a:prstGeom prst="roundRect">
-            <a:avLst>
-              <a:gd name="adj" fmla="val 12000"/>
-            </a:avLst>
-          </a:prstGeom>
-          <a:solidFill>
-            <a:srgbClr val="EEF3F5"/>
+          <p:cNvPr id="11" name="Oval 10"/>
+          <p:cNvSpPr/>
+          <p:nvPr/>
+        </p:nvSpPr>
+        <p:spPr>
+          <a:xfrm>
+            <a:off x="850392" y="3081528"/>
+            <a:ext cx="557784" cy="557784"/>
+          </a:xfrm>
+          <a:prstGeom prst="ellipse">
+            <a:avLst/>
+          </a:prstGeom>
+          <a:solidFill>
+            <a:srgbClr val="FFFFFF"/>
           </a:solidFill>
           <a:ln>
             <a:noFill/>
@@ -13987,20 +14199,92 @@
       </p:sp>
       <p:sp>
         <p:nvSpPr>
-          <p:cNvPr id="11" name="Oval 10"/>
-          <p:cNvSpPr/>
-          <p:nvPr/>
-        </p:nvSpPr>
-        <p:spPr>
-          <a:xfrm>
-            <a:off x="841248" y="4032504"/>
-            <a:ext cx="201168" cy="201168"/>
-          </a:xfrm>
-          <a:prstGeom prst="ellipse">
-            <a:avLst/>
-          </a:prstGeom>
-          <a:solidFill>
-            <a:srgbClr val="1FA67A"/>
+          <p:cNvPr id="12" name="TextBox 11"/>
+          <p:cNvSpPr txBox="1"/>
+          <p:nvPr/>
+        </p:nvSpPr>
+        <p:spPr>
+          <a:xfrm>
+            <a:off x="850392" y="3081528"/>
+            <a:ext cx="557784" cy="557784"/>
+          </a:xfrm>
+          <a:prstGeom prst="rect">
+            <a:avLst/>
+          </a:prstGeom>
+          <a:noFill/>
+        </p:spPr>
+        <p:txBody>
+          <a:bodyPr wrap="square" lIns="0" rIns="0" tIns="0" bIns="0" anchor="ctr">
+            <a:spAutoFit/>
+          </a:bodyPr>
+          <a:lstStyle/>
+          <a:p>
+            <a:pPr algn="ctr"/>
+            <a:r>
+              <a:rPr sz="2000" b="1">
+                <a:solidFill>
+                  <a:srgbClr val="1FA67A"/>
+                </a:solidFill>
+                <a:latin typeface="Carlito"/>
+              </a:rPr>
+              <a:t>2</a:t>
+            </a:r>
+          </a:p>
+        </p:txBody>
+      </p:sp>
+      <p:sp>
+        <p:nvSpPr>
+          <p:cNvPr id="13" name="TextBox 12"/>
+          <p:cNvSpPr txBox="1"/>
+          <p:nvPr/>
+        </p:nvSpPr>
+        <p:spPr>
+          <a:xfrm>
+            <a:off x="1645919" y="2871216"/>
+            <a:ext cx="3108960" cy="978408"/>
+          </a:xfrm>
+          <a:prstGeom prst="rect">
+            <a:avLst/>
+          </a:prstGeom>
+          <a:noFill/>
+        </p:spPr>
+        <p:txBody>
+          <a:bodyPr wrap="square" lIns="0" rIns="0" tIns="0" bIns="0" anchor="ctr">
+            <a:spAutoFit/>
+          </a:bodyPr>
+          <a:lstStyle/>
+          <a:p>
+            <a:pPr algn="l"/>
+            <a:r>
+              <a:rPr sz="2250" b="1">
+                <a:solidFill>
+                  <a:srgbClr val="FFFFFF"/>
+                </a:solidFill>
+                <a:latin typeface="Carlito"/>
+              </a:rPr>
+              <a:t>Python Fundamentals</a:t>
+            </a:r>
+          </a:p>
+        </p:txBody>
+      </p:sp>
+      <p:sp>
+        <p:nvSpPr>
+          <p:cNvPr id="14" name="Rounded Rectangle 13"/>
+          <p:cNvSpPr/>
+          <p:nvPr/>
+        </p:nvSpPr>
+        <p:spPr>
+          <a:xfrm>
+            <a:off x="4507992" y="3172968"/>
+            <a:ext cx="1344168" cy="365760"/>
+          </a:xfrm>
+          <a:prstGeom prst="roundRect">
+            <a:avLst>
+              <a:gd name="adj" fmla="val 30000"/>
+            </a:avLst>
+          </a:prstGeom>
+          <a:solidFill>
+            <a:srgbClr val="0B1F2A"/>
           </a:solidFill>
           <a:ln>
             <a:noFill/>
@@ -14031,14 +14315,14 @@
       </p:sp>
       <p:sp>
         <p:nvSpPr>
-          <p:cNvPr id="12" name="TextBox 11"/>
+          <p:cNvPr id="15" name="TextBox 14"/>
           <p:cNvSpPr txBox="1"/>
           <p:nvPr/>
         </p:nvSpPr>
         <p:spPr>
           <a:xfrm>
-            <a:off x="1252728" y="3721608"/>
-            <a:ext cx="4069080" cy="822960"/>
+            <a:off x="4507992" y="3172968"/>
+            <a:ext cx="1344168" cy="365760"/>
           </a:xfrm>
           <a:prstGeom prst="rect">
             <a:avLst/>
@@ -14051,29 +14335,29 @@
           </a:bodyPr>
           <a:lstStyle/>
           <a:p>
-            <a:pPr algn="l"/>
-            <a:r>
-              <a:rPr sz="2000" b="0">
-                <a:solidFill>
-                  <a:srgbClr val="0B1F2A"/>
+            <a:pPr algn="ctr"/>
+            <a:r>
+              <a:rPr sz="1600" b="1">
+                <a:solidFill>
+                  <a:srgbClr val="FFFFFF"/>
                 </a:solidFill>
                 <a:latin typeface="Carlito"/>
               </a:rPr>
-              <a:t>Run: uvicorn 09_first_server:app --reload</a:t>
-            </a:r>
-          </a:p>
-        </p:txBody>
-      </p:sp>
-      <p:sp>
-        <p:nvSpPr>
-          <p:cNvPr id="13" name="Rounded Rectangle 12"/>
-          <p:cNvSpPr/>
-          <p:nvPr/>
-        </p:nvSpPr>
-        <p:spPr>
-          <a:xfrm>
-            <a:off x="612648" y="4727448"/>
-            <a:ext cx="4937760" cy="822960"/>
+              <a:t>Complete</a:t>
+            </a:r>
+          </a:p>
+        </p:txBody>
+      </p:sp>
+      <p:sp>
+        <p:nvSpPr>
+          <p:cNvPr id="16" name="Rounded Rectangle 15"/>
+          <p:cNvSpPr/>
+          <p:nvPr/>
+        </p:nvSpPr>
+        <p:spPr>
+          <a:xfrm>
+            <a:off x="612648" y="4032504"/>
+            <a:ext cx="5367528" cy="978408"/>
           </a:xfrm>
           <a:prstGeom prst="roundRect">
             <a:avLst>
@@ -14081,7 +14365,7 @@
             </a:avLst>
           </a:prstGeom>
           <a:solidFill>
-            <a:srgbClr val="EEF3F5"/>
+            <a:srgbClr val="3B82C4"/>
           </a:solidFill>
           <a:ln>
             <a:noFill/>
@@ -14112,20 +14396,20 @@
       </p:sp>
       <p:sp>
         <p:nvSpPr>
-          <p:cNvPr id="14" name="Oval 13"/>
-          <p:cNvSpPr/>
-          <p:nvPr/>
-        </p:nvSpPr>
-        <p:spPr>
-          <a:xfrm>
-            <a:off x="841248" y="5038344"/>
-            <a:ext cx="201168" cy="201168"/>
+          <p:cNvPr id="17" name="Oval 16"/>
+          <p:cNvSpPr/>
+          <p:nvPr/>
+        </p:nvSpPr>
+        <p:spPr>
+          <a:xfrm>
+            <a:off x="850392" y="4242816"/>
+            <a:ext cx="557784" cy="557784"/>
           </a:xfrm>
           <a:prstGeom prst="ellipse">
             <a:avLst/>
           </a:prstGeom>
           <a:solidFill>
-            <a:srgbClr val="1FA67A"/>
+            <a:srgbClr val="FFFFFF"/>
           </a:solidFill>
           <a:ln>
             <a:noFill/>
@@ -14156,14 +14440,14 @@
       </p:sp>
       <p:sp>
         <p:nvSpPr>
-          <p:cNvPr id="15" name="TextBox 14"/>
+          <p:cNvPr id="18" name="TextBox 17"/>
           <p:cNvSpPr txBox="1"/>
           <p:nvPr/>
         </p:nvSpPr>
         <p:spPr>
           <a:xfrm>
-            <a:off x="1252728" y="4727448"/>
-            <a:ext cx="4069080" cy="822960"/>
+            <a:off x="850392" y="4242816"/>
+            <a:ext cx="557784" cy="557784"/>
           </a:xfrm>
           <a:prstGeom prst="rect">
             <a:avLst/>
@@ -14176,33 +14460,68 @@
           </a:bodyPr>
           <a:lstStyle/>
           <a:p>
-            <a:pPr algn="l"/>
-            <a:r>
-              <a:rPr sz="2000" b="0">
-                <a:solidFill>
-                  <a:srgbClr val="0B1F2A"/>
+            <a:pPr algn="ctr"/>
+            <a:r>
+              <a:rPr sz="2000" b="1">
+                <a:solidFill>
+                  <a:srgbClr val="3B82C4"/>
                 </a:solidFill>
                 <a:latin typeface="Carlito"/>
               </a:rPr>
-              <a:t>Open the address, then add /docs</a:t>
-            </a:r>
-          </a:p>
-        </p:txBody>
-      </p:sp>
-      <p:sp>
-        <p:nvSpPr>
-          <p:cNvPr id="16" name="Rounded Rectangle 15"/>
-          <p:cNvSpPr/>
-          <p:nvPr/>
-        </p:nvSpPr>
-        <p:spPr>
-          <a:xfrm>
-            <a:off x="5852160" y="1709928"/>
-            <a:ext cx="5733288" cy="4023360"/>
+              <a:t>3</a:t>
+            </a:r>
+          </a:p>
+        </p:txBody>
+      </p:sp>
+      <p:sp>
+        <p:nvSpPr>
+          <p:cNvPr id="19" name="TextBox 18"/>
+          <p:cNvSpPr txBox="1"/>
+          <p:nvPr/>
+        </p:nvSpPr>
+        <p:spPr>
+          <a:xfrm>
+            <a:off x="1645919" y="4032504"/>
+            <a:ext cx="3108960" cy="978408"/>
+          </a:xfrm>
+          <a:prstGeom prst="rect">
+            <a:avLst/>
+          </a:prstGeom>
+          <a:noFill/>
+        </p:spPr>
+        <p:txBody>
+          <a:bodyPr wrap="square" lIns="0" rIns="0" tIns="0" bIns="0" anchor="ctr">
+            <a:spAutoFit/>
+          </a:bodyPr>
+          <a:lstStyle/>
+          <a:p>
+            <a:pPr algn="l"/>
+            <a:r>
+              <a:rPr sz="2250" b="1">
+                <a:solidFill>
+                  <a:srgbClr val="FFFFFF"/>
+                </a:solidFill>
+                <a:latin typeface="Carlito"/>
+              </a:rPr>
+              <a:t>JavaScript Fundamentals</a:t>
+            </a:r>
+          </a:p>
+        </p:txBody>
+      </p:sp>
+      <p:sp>
+        <p:nvSpPr>
+          <p:cNvPr id="20" name="Rounded Rectangle 19"/>
+          <p:cNvSpPr/>
+          <p:nvPr/>
+        </p:nvSpPr>
+        <p:spPr>
+          <a:xfrm>
+            <a:off x="4507992" y="4334256"/>
+            <a:ext cx="1344168" cy="365760"/>
           </a:xfrm>
           <a:prstGeom prst="roundRect">
             <a:avLst>
-              <a:gd name="adj" fmla="val 4000"/>
+              <a:gd name="adj" fmla="val 30000"/>
             </a:avLst>
           </a:prstGeom>
           <a:solidFill>
@@ -14237,154 +14556,835 @@
       </p:sp>
       <p:sp>
         <p:nvSpPr>
-          <p:cNvPr id="17" name="TextBox 16"/>
+          <p:cNvPr id="21" name="TextBox 20"/>
           <p:cNvSpPr txBox="1"/>
           <p:nvPr/>
         </p:nvSpPr>
         <p:spPr>
           <a:xfrm>
-            <a:off x="6126480" y="1938528"/>
-            <a:ext cx="5184648" cy="3566160"/>
-          </a:xfrm>
-          <a:prstGeom prst="rect">
-            <a:avLst/>
-          </a:prstGeom>
-          <a:noFill/>
-        </p:spPr>
-        <p:txBody>
-          <a:bodyPr wrap="square" lIns="0" rIns="0" tIns="0" bIns="0" anchor="t">
+            <a:off x="4507992" y="4334256"/>
+            <a:ext cx="1344168" cy="365760"/>
+          </a:xfrm>
+          <a:prstGeom prst="rect">
+            <a:avLst/>
+          </a:prstGeom>
+          <a:noFill/>
+        </p:spPr>
+        <p:txBody>
+          <a:bodyPr wrap="square" lIns="0" rIns="0" tIns="0" bIns="0" anchor="ctr">
             <a:spAutoFit/>
           </a:bodyPr>
           <a:lstStyle/>
           <a:p>
-            <a:pPr algn="l"/>
-            <a:r>
-              <a:rPr sz="1800" b="0">
-                <a:solidFill>
-                  <a:srgbClr val="E2E8F0"/>
-                </a:solidFill>
-                <a:latin typeface="Courier New"/>
-              </a:rPr>
-              <a:t>from fastapi import FastAPI</a:t>
-            </a:r>
-          </a:p>
-          <a:p>
-            <a:pPr algn="l"/>
-            <a:r>
-              <a:rPr sz="1800" b="0">
-                <a:solidFill>
-                  <a:srgbClr val="E2E8F0"/>
-                </a:solidFill>
-                <a:latin typeface="Courier New"/>
-              </a:rPr>
-              <a:t/>
-            </a:r>
-          </a:p>
-          <a:p>
-            <a:pPr algn="l"/>
-            <a:r>
-              <a:rPr sz="1800" b="0">
-                <a:solidFill>
-                  <a:srgbClr val="E2E8F0"/>
-                </a:solidFill>
-                <a:latin typeface="Courier New"/>
-              </a:rPr>
-              <a:t>app = FastAPI()</a:t>
-            </a:r>
-          </a:p>
-          <a:p>
-            <a:pPr algn="l"/>
-            <a:r>
-              <a:rPr sz="1800" b="0">
-                <a:solidFill>
-                  <a:srgbClr val="E2E8F0"/>
-                </a:solidFill>
-                <a:latin typeface="Courier New"/>
-              </a:rPr>
-              <a:t/>
-            </a:r>
-          </a:p>
-          <a:p>
-            <a:pPr algn="l"/>
-            <a:r>
-              <a:rPr sz="1800" b="0">
-                <a:solidFill>
-                  <a:srgbClr val="E2E8F0"/>
-                </a:solidFill>
-                <a:latin typeface="Courier New"/>
-              </a:rPr>
-              <a:t/>
-            </a:r>
-          </a:p>
-          <a:p>
-            <a:pPr algn="l"/>
-            <a:r>
-              <a:rPr sz="1800" b="0">
-                <a:solidFill>
-                  <a:srgbClr val="E2E8F0"/>
-                </a:solidFill>
-                <a:latin typeface="Courier New"/>
-              </a:rPr>
-              <a:t>@app.get("/")</a:t>
-            </a:r>
-          </a:p>
-          <a:p>
-            <a:pPr algn="l"/>
-            <a:r>
-              <a:rPr sz="1800" b="0">
-                <a:solidFill>
-                  <a:srgbClr val="E2E8F0"/>
-                </a:solidFill>
-                <a:latin typeface="Courier New"/>
-              </a:rPr>
-              <a:t>def home():</a:t>
-            </a:r>
-          </a:p>
-          <a:p>
-            <a:pPr algn="l"/>
-            <a:r>
-              <a:rPr sz="1800" b="0">
-                <a:solidFill>
-                  <a:srgbClr val="E2E8F0"/>
-                </a:solidFill>
-                <a:latin typeface="Courier New"/>
-              </a:rPr>
-              <a:t>    return {"message": "Hello"}</a:t>
-            </a:r>
-          </a:p>
-        </p:txBody>
-      </p:sp>
-      <p:sp>
-        <p:nvSpPr>
-          <p:cNvPr id="18" name="TextBox 17"/>
+            <a:pPr algn="ctr"/>
+            <a:r>
+              <a:rPr sz="1600" b="1">
+                <a:solidFill>
+                  <a:srgbClr val="FFFFFF"/>
+                </a:solidFill>
+                <a:latin typeface="Carlito"/>
+              </a:rPr>
+              <a:t>Next Class</a:t>
+            </a:r>
+          </a:p>
+        </p:txBody>
+      </p:sp>
+      <p:sp>
+        <p:nvSpPr>
+          <p:cNvPr id="22" name="Rounded Rectangle 21"/>
+          <p:cNvSpPr/>
+          <p:nvPr/>
+        </p:nvSpPr>
+        <p:spPr>
+          <a:xfrm>
+            <a:off x="612648" y="5193792"/>
+            <a:ext cx="5367528" cy="978408"/>
+          </a:xfrm>
+          <a:prstGeom prst="roundRect">
+            <a:avLst>
+              <a:gd name="adj" fmla="val 12000"/>
+            </a:avLst>
+          </a:prstGeom>
+          <a:solidFill>
+            <a:srgbClr val="EEF3F5"/>
+          </a:solidFill>
+          <a:ln>
+            <a:noFill/>
+          </a:ln>
+          <a:effectLst/>
+        </p:spPr>
+        <p:style>
+          <a:lnRef idx="1">
+            <a:schemeClr val="accent1"/>
+          </a:lnRef>
+          <a:fillRef idx="3">
+            <a:schemeClr val="accent1"/>
+          </a:fillRef>
+          <a:effectRef idx="2">
+            <a:schemeClr val="accent1"/>
+          </a:effectRef>
+          <a:fontRef idx="minor">
+            <a:schemeClr val="lt1"/>
+          </a:fontRef>
+        </p:style>
+        <p:txBody>
+          <a:bodyPr rtlCol="0" anchor="ctr"/>
+          <a:lstStyle/>
+          <a:p>
+            <a:pPr algn="ctr"/>
+          </a:p>
+        </p:txBody>
+      </p:sp>
+      <p:sp>
+        <p:nvSpPr>
+          <p:cNvPr id="23" name="Oval 22"/>
+          <p:cNvSpPr/>
+          <p:nvPr/>
+        </p:nvSpPr>
+        <p:spPr>
+          <a:xfrm>
+            <a:off x="850392" y="5404104"/>
+            <a:ext cx="557784" cy="557784"/>
+          </a:xfrm>
+          <a:prstGeom prst="ellipse">
+            <a:avLst/>
+          </a:prstGeom>
+          <a:solidFill>
+            <a:srgbClr val="3B82C4"/>
+          </a:solidFill>
+          <a:ln>
+            <a:noFill/>
+          </a:ln>
+          <a:effectLst/>
+        </p:spPr>
+        <p:style>
+          <a:lnRef idx="1">
+            <a:schemeClr val="accent1"/>
+          </a:lnRef>
+          <a:fillRef idx="3">
+            <a:schemeClr val="accent1"/>
+          </a:fillRef>
+          <a:effectRef idx="2">
+            <a:schemeClr val="accent1"/>
+          </a:effectRef>
+          <a:fontRef idx="minor">
+            <a:schemeClr val="lt1"/>
+          </a:fontRef>
+        </p:style>
+        <p:txBody>
+          <a:bodyPr rtlCol="0" anchor="ctr"/>
+          <a:lstStyle/>
+          <a:p>
+            <a:pPr algn="ctr"/>
+          </a:p>
+        </p:txBody>
+      </p:sp>
+      <p:sp>
+        <p:nvSpPr>
+          <p:cNvPr id="24" name="TextBox 23"/>
           <p:cNvSpPr txBox="1"/>
           <p:nvPr/>
         </p:nvSpPr>
         <p:spPr>
           <a:xfrm>
-            <a:off x="612648" y="5943600"/>
-            <a:ext cx="10515600" cy="365760"/>
-          </a:xfrm>
-          <a:prstGeom prst="rect">
-            <a:avLst/>
-          </a:prstGeom>
-          <a:noFill/>
-        </p:spPr>
-        <p:txBody>
-          <a:bodyPr wrap="square" lIns="0" rIns="0" tIns="0" bIns="0" anchor="t">
+            <a:off x="850392" y="5404104"/>
+            <a:ext cx="557784" cy="557784"/>
+          </a:xfrm>
+          <a:prstGeom prst="rect">
+            <a:avLst/>
+          </a:prstGeom>
+          <a:noFill/>
+        </p:spPr>
+        <p:txBody>
+          <a:bodyPr wrap="square" lIns="0" rIns="0" tIns="0" bIns="0" anchor="ctr">
             <a:spAutoFit/>
           </a:bodyPr>
           <a:lstStyle/>
           <a:p>
-            <a:pPr algn="l"/>
-            <a:r>
-              <a:rPr sz="1850" b="0">
-                <a:solidFill>
-                  <a:srgbClr val="6B7F8A"/>
+            <a:pPr algn="ctr"/>
+            <a:r>
+              <a:rPr sz="2000" b="1">
+                <a:solidFill>
+                  <a:srgbClr val="FFFFFF"/>
                 </a:solidFill>
                 <a:latin typeface="Carlito"/>
               </a:rPr>
-              <a:t>Live: run the file, then refresh the browser.   |   File: lecture/09_first_server.py</a:t>
+              <a:t>4</a:t>
+            </a:r>
+          </a:p>
+        </p:txBody>
+      </p:sp>
+      <p:sp>
+        <p:nvSpPr>
+          <p:cNvPr id="25" name="TextBox 24"/>
+          <p:cNvSpPr txBox="1"/>
+          <p:nvPr/>
+        </p:nvSpPr>
+        <p:spPr>
+          <a:xfrm>
+            <a:off x="1645919" y="5193792"/>
+            <a:ext cx="4206240" cy="978408"/>
+          </a:xfrm>
+          <a:prstGeom prst="rect">
+            <a:avLst/>
+          </a:prstGeom>
+          <a:noFill/>
+        </p:spPr>
+        <p:txBody>
+          <a:bodyPr wrap="square" lIns="0" rIns="0" tIns="0" bIns="0" anchor="ctr">
+            <a:spAutoFit/>
+          </a:bodyPr>
+          <a:lstStyle/>
+          <a:p>
+            <a:pPr algn="l"/>
+            <a:r>
+              <a:rPr sz="2250" b="1">
+                <a:solidFill>
+                  <a:srgbClr val="0B1F2A"/>
+                </a:solidFill>
+                <a:latin typeface="Carlito"/>
+              </a:rPr>
+              <a:t>Backend with FastAPI</a:t>
+            </a:r>
+          </a:p>
+        </p:txBody>
+      </p:sp>
+      <p:sp>
+        <p:nvSpPr>
+          <p:cNvPr id="26" name="Rounded Rectangle 25"/>
+          <p:cNvSpPr/>
+          <p:nvPr/>
+        </p:nvSpPr>
+        <p:spPr>
+          <a:xfrm>
+            <a:off x="6217920" y="1709928"/>
+            <a:ext cx="5367528" cy="978408"/>
+          </a:xfrm>
+          <a:prstGeom prst="roundRect">
+            <a:avLst>
+              <a:gd name="adj" fmla="val 12000"/>
+            </a:avLst>
+          </a:prstGeom>
+          <a:solidFill>
+            <a:srgbClr val="EEF3F5"/>
+          </a:solidFill>
+          <a:ln>
+            <a:noFill/>
+          </a:ln>
+          <a:effectLst/>
+        </p:spPr>
+        <p:style>
+          <a:lnRef idx="1">
+            <a:schemeClr val="accent1"/>
+          </a:lnRef>
+          <a:fillRef idx="3">
+            <a:schemeClr val="accent1"/>
+          </a:fillRef>
+          <a:effectRef idx="2">
+            <a:schemeClr val="accent1"/>
+          </a:effectRef>
+          <a:fontRef idx="minor">
+            <a:schemeClr val="lt1"/>
+          </a:fontRef>
+        </p:style>
+        <p:txBody>
+          <a:bodyPr rtlCol="0" anchor="ctr"/>
+          <a:lstStyle/>
+          <a:p>
+            <a:pPr algn="ctr"/>
+          </a:p>
+        </p:txBody>
+      </p:sp>
+      <p:sp>
+        <p:nvSpPr>
+          <p:cNvPr id="27" name="Oval 26"/>
+          <p:cNvSpPr/>
+          <p:nvPr/>
+        </p:nvSpPr>
+        <p:spPr>
+          <a:xfrm>
+            <a:off x="6455664" y="1920240"/>
+            <a:ext cx="557784" cy="557784"/>
+          </a:xfrm>
+          <a:prstGeom prst="ellipse">
+            <a:avLst/>
+          </a:prstGeom>
+          <a:solidFill>
+            <a:srgbClr val="3B82C4"/>
+          </a:solidFill>
+          <a:ln>
+            <a:noFill/>
+          </a:ln>
+          <a:effectLst/>
+        </p:spPr>
+        <p:style>
+          <a:lnRef idx="1">
+            <a:schemeClr val="accent1"/>
+          </a:lnRef>
+          <a:fillRef idx="3">
+            <a:schemeClr val="accent1"/>
+          </a:fillRef>
+          <a:effectRef idx="2">
+            <a:schemeClr val="accent1"/>
+          </a:effectRef>
+          <a:fontRef idx="minor">
+            <a:schemeClr val="lt1"/>
+          </a:fontRef>
+        </p:style>
+        <p:txBody>
+          <a:bodyPr rtlCol="0" anchor="ctr"/>
+          <a:lstStyle/>
+          <a:p>
+            <a:pPr algn="ctr"/>
+          </a:p>
+        </p:txBody>
+      </p:sp>
+      <p:sp>
+        <p:nvSpPr>
+          <p:cNvPr id="28" name="TextBox 27"/>
+          <p:cNvSpPr txBox="1"/>
+          <p:nvPr/>
+        </p:nvSpPr>
+        <p:spPr>
+          <a:xfrm>
+            <a:off x="6455664" y="1920240"/>
+            <a:ext cx="557784" cy="557784"/>
+          </a:xfrm>
+          <a:prstGeom prst="rect">
+            <a:avLst/>
+          </a:prstGeom>
+          <a:noFill/>
+        </p:spPr>
+        <p:txBody>
+          <a:bodyPr wrap="square" lIns="0" rIns="0" tIns="0" bIns="0" anchor="ctr">
+            <a:spAutoFit/>
+          </a:bodyPr>
+          <a:lstStyle/>
+          <a:p>
+            <a:pPr algn="ctr"/>
+            <a:r>
+              <a:rPr sz="2000" b="1">
+                <a:solidFill>
+                  <a:srgbClr val="FFFFFF"/>
+                </a:solidFill>
+                <a:latin typeface="Carlito"/>
+              </a:rPr>
+              <a:t>5</a:t>
+            </a:r>
+          </a:p>
+        </p:txBody>
+      </p:sp>
+      <p:sp>
+        <p:nvSpPr>
+          <p:cNvPr id="29" name="TextBox 28"/>
+          <p:cNvSpPr txBox="1"/>
+          <p:nvPr/>
+        </p:nvSpPr>
+        <p:spPr>
+          <a:xfrm>
+            <a:off x="7251192" y="1709928"/>
+            <a:ext cx="4206240" cy="978408"/>
+          </a:xfrm>
+          <a:prstGeom prst="rect">
+            <a:avLst/>
+          </a:prstGeom>
+          <a:noFill/>
+        </p:spPr>
+        <p:txBody>
+          <a:bodyPr wrap="square" lIns="0" rIns="0" tIns="0" bIns="0" anchor="ctr">
+            <a:spAutoFit/>
+          </a:bodyPr>
+          <a:lstStyle/>
+          <a:p>
+            <a:pPr algn="l"/>
+            <a:r>
+              <a:rPr sz="2250" b="1">
+                <a:solidFill>
+                  <a:srgbClr val="0B1F2A"/>
+                </a:solidFill>
+                <a:latin typeface="Carlito"/>
+              </a:rPr>
+              <a:t>HTML, CSS &amp; Vanilla JS</a:t>
+            </a:r>
+          </a:p>
+        </p:txBody>
+      </p:sp>
+      <p:sp>
+        <p:nvSpPr>
+          <p:cNvPr id="30" name="Rounded Rectangle 29"/>
+          <p:cNvSpPr/>
+          <p:nvPr/>
+        </p:nvSpPr>
+        <p:spPr>
+          <a:xfrm>
+            <a:off x="6217920" y="2871216"/>
+            <a:ext cx="5367528" cy="978408"/>
+          </a:xfrm>
+          <a:prstGeom prst="roundRect">
+            <a:avLst>
+              <a:gd name="adj" fmla="val 12000"/>
+            </a:avLst>
+          </a:prstGeom>
+          <a:solidFill>
+            <a:srgbClr val="EEF3F5"/>
+          </a:solidFill>
+          <a:ln>
+            <a:noFill/>
+          </a:ln>
+          <a:effectLst/>
+        </p:spPr>
+        <p:style>
+          <a:lnRef idx="1">
+            <a:schemeClr val="accent1"/>
+          </a:lnRef>
+          <a:fillRef idx="3">
+            <a:schemeClr val="accent1"/>
+          </a:fillRef>
+          <a:effectRef idx="2">
+            <a:schemeClr val="accent1"/>
+          </a:effectRef>
+          <a:fontRef idx="minor">
+            <a:schemeClr val="lt1"/>
+          </a:fontRef>
+        </p:style>
+        <p:txBody>
+          <a:bodyPr rtlCol="0" anchor="ctr"/>
+          <a:lstStyle/>
+          <a:p>
+            <a:pPr algn="ctr"/>
+          </a:p>
+        </p:txBody>
+      </p:sp>
+      <p:sp>
+        <p:nvSpPr>
+          <p:cNvPr id="31" name="Oval 30"/>
+          <p:cNvSpPr/>
+          <p:nvPr/>
+        </p:nvSpPr>
+        <p:spPr>
+          <a:xfrm>
+            <a:off x="6455664" y="3081528"/>
+            <a:ext cx="557784" cy="557784"/>
+          </a:xfrm>
+          <a:prstGeom prst="ellipse">
+            <a:avLst/>
+          </a:prstGeom>
+          <a:solidFill>
+            <a:srgbClr val="3B82C4"/>
+          </a:solidFill>
+          <a:ln>
+            <a:noFill/>
+          </a:ln>
+          <a:effectLst/>
+        </p:spPr>
+        <p:style>
+          <a:lnRef idx="1">
+            <a:schemeClr val="accent1"/>
+          </a:lnRef>
+          <a:fillRef idx="3">
+            <a:schemeClr val="accent1"/>
+          </a:fillRef>
+          <a:effectRef idx="2">
+            <a:schemeClr val="accent1"/>
+          </a:effectRef>
+          <a:fontRef idx="minor">
+            <a:schemeClr val="lt1"/>
+          </a:fontRef>
+        </p:style>
+        <p:txBody>
+          <a:bodyPr rtlCol="0" anchor="ctr"/>
+          <a:lstStyle/>
+          <a:p>
+            <a:pPr algn="ctr"/>
+          </a:p>
+        </p:txBody>
+      </p:sp>
+      <p:sp>
+        <p:nvSpPr>
+          <p:cNvPr id="32" name="TextBox 31"/>
+          <p:cNvSpPr txBox="1"/>
+          <p:nvPr/>
+        </p:nvSpPr>
+        <p:spPr>
+          <a:xfrm>
+            <a:off x="6455664" y="3081528"/>
+            <a:ext cx="557784" cy="557784"/>
+          </a:xfrm>
+          <a:prstGeom prst="rect">
+            <a:avLst/>
+          </a:prstGeom>
+          <a:noFill/>
+        </p:spPr>
+        <p:txBody>
+          <a:bodyPr wrap="square" lIns="0" rIns="0" tIns="0" bIns="0" anchor="ctr">
+            <a:spAutoFit/>
+          </a:bodyPr>
+          <a:lstStyle/>
+          <a:p>
+            <a:pPr algn="ctr"/>
+            <a:r>
+              <a:rPr sz="2000" b="1">
+                <a:solidFill>
+                  <a:srgbClr val="FFFFFF"/>
+                </a:solidFill>
+                <a:latin typeface="Carlito"/>
+              </a:rPr>
+              <a:t>6</a:t>
+            </a:r>
+          </a:p>
+        </p:txBody>
+      </p:sp>
+      <p:sp>
+        <p:nvSpPr>
+          <p:cNvPr id="33" name="TextBox 32"/>
+          <p:cNvSpPr txBox="1"/>
+          <p:nvPr/>
+        </p:nvSpPr>
+        <p:spPr>
+          <a:xfrm>
+            <a:off x="7251192" y="2871216"/>
+            <a:ext cx="4206240" cy="978408"/>
+          </a:xfrm>
+          <a:prstGeom prst="rect">
+            <a:avLst/>
+          </a:prstGeom>
+          <a:noFill/>
+        </p:spPr>
+        <p:txBody>
+          <a:bodyPr wrap="square" lIns="0" rIns="0" tIns="0" bIns="0" anchor="ctr">
+            <a:spAutoFit/>
+          </a:bodyPr>
+          <a:lstStyle/>
+          <a:p>
+            <a:pPr algn="l"/>
+            <a:r>
+              <a:rPr sz="2250" b="1">
+                <a:solidFill>
+                  <a:srgbClr val="0B1F2A"/>
+                </a:solidFill>
+                <a:latin typeface="Carlito"/>
+              </a:rPr>
+              <a:t>React, Rebuilt</a:t>
+            </a:r>
+          </a:p>
+        </p:txBody>
+      </p:sp>
+      <p:sp>
+        <p:nvSpPr>
+          <p:cNvPr id="34" name="Rounded Rectangle 33"/>
+          <p:cNvSpPr/>
+          <p:nvPr/>
+        </p:nvSpPr>
+        <p:spPr>
+          <a:xfrm>
+            <a:off x="6217920" y="4032504"/>
+            <a:ext cx="5367528" cy="978408"/>
+          </a:xfrm>
+          <a:prstGeom prst="roundRect">
+            <a:avLst>
+              <a:gd name="adj" fmla="val 12000"/>
+            </a:avLst>
+          </a:prstGeom>
+          <a:solidFill>
+            <a:srgbClr val="EEF3F5"/>
+          </a:solidFill>
+          <a:ln>
+            <a:noFill/>
+          </a:ln>
+          <a:effectLst/>
+        </p:spPr>
+        <p:style>
+          <a:lnRef idx="1">
+            <a:schemeClr val="accent1"/>
+          </a:lnRef>
+          <a:fillRef idx="3">
+            <a:schemeClr val="accent1"/>
+          </a:fillRef>
+          <a:effectRef idx="2">
+            <a:schemeClr val="accent1"/>
+          </a:effectRef>
+          <a:fontRef idx="minor">
+            <a:schemeClr val="lt1"/>
+          </a:fontRef>
+        </p:style>
+        <p:txBody>
+          <a:bodyPr rtlCol="0" anchor="ctr"/>
+          <a:lstStyle/>
+          <a:p>
+            <a:pPr algn="ctr"/>
+          </a:p>
+        </p:txBody>
+      </p:sp>
+      <p:sp>
+        <p:nvSpPr>
+          <p:cNvPr id="35" name="Oval 34"/>
+          <p:cNvSpPr/>
+          <p:nvPr/>
+        </p:nvSpPr>
+        <p:spPr>
+          <a:xfrm>
+            <a:off x="6455664" y="4242816"/>
+            <a:ext cx="557784" cy="557784"/>
+          </a:xfrm>
+          <a:prstGeom prst="ellipse">
+            <a:avLst/>
+          </a:prstGeom>
+          <a:solidFill>
+            <a:srgbClr val="3B82C4"/>
+          </a:solidFill>
+          <a:ln>
+            <a:noFill/>
+          </a:ln>
+          <a:effectLst/>
+        </p:spPr>
+        <p:style>
+          <a:lnRef idx="1">
+            <a:schemeClr val="accent1"/>
+          </a:lnRef>
+          <a:fillRef idx="3">
+            <a:schemeClr val="accent1"/>
+          </a:fillRef>
+          <a:effectRef idx="2">
+            <a:schemeClr val="accent1"/>
+          </a:effectRef>
+          <a:fontRef idx="minor">
+            <a:schemeClr val="lt1"/>
+          </a:fontRef>
+        </p:style>
+        <p:txBody>
+          <a:bodyPr rtlCol="0" anchor="ctr"/>
+          <a:lstStyle/>
+          <a:p>
+            <a:pPr algn="ctr"/>
+          </a:p>
+        </p:txBody>
+      </p:sp>
+      <p:sp>
+        <p:nvSpPr>
+          <p:cNvPr id="36" name="TextBox 35"/>
+          <p:cNvSpPr txBox="1"/>
+          <p:nvPr/>
+        </p:nvSpPr>
+        <p:spPr>
+          <a:xfrm>
+            <a:off x="6455664" y="4242816"/>
+            <a:ext cx="557784" cy="557784"/>
+          </a:xfrm>
+          <a:prstGeom prst="rect">
+            <a:avLst/>
+          </a:prstGeom>
+          <a:noFill/>
+        </p:spPr>
+        <p:txBody>
+          <a:bodyPr wrap="square" lIns="0" rIns="0" tIns="0" bIns="0" anchor="ctr">
+            <a:spAutoFit/>
+          </a:bodyPr>
+          <a:lstStyle/>
+          <a:p>
+            <a:pPr algn="ctr"/>
+            <a:r>
+              <a:rPr sz="2000" b="1">
+                <a:solidFill>
+                  <a:srgbClr val="FFFFFF"/>
+                </a:solidFill>
+                <a:latin typeface="Carlito"/>
+              </a:rPr>
+              <a:t>7</a:t>
+            </a:r>
+          </a:p>
+        </p:txBody>
+      </p:sp>
+      <p:sp>
+        <p:nvSpPr>
+          <p:cNvPr id="37" name="TextBox 36"/>
+          <p:cNvSpPr txBox="1"/>
+          <p:nvPr/>
+        </p:nvSpPr>
+        <p:spPr>
+          <a:xfrm>
+            <a:off x="7251192" y="4032504"/>
+            <a:ext cx="4206240" cy="978408"/>
+          </a:xfrm>
+          <a:prstGeom prst="rect">
+            <a:avLst/>
+          </a:prstGeom>
+          <a:noFill/>
+        </p:spPr>
+        <p:txBody>
+          <a:bodyPr wrap="square" lIns="0" rIns="0" tIns="0" bIns="0" anchor="ctr">
+            <a:spAutoFit/>
+          </a:bodyPr>
+          <a:lstStyle/>
+          <a:p>
+            <a:pPr algn="l"/>
+            <a:r>
+              <a:rPr sz="2250" b="1">
+                <a:solidFill>
+                  <a:srgbClr val="0B1F2A"/>
+                </a:solidFill>
+                <a:latin typeface="Carlito"/>
+              </a:rPr>
+              <a:t>Full-Stack Integration</a:t>
+            </a:r>
+          </a:p>
+        </p:txBody>
+      </p:sp>
+      <p:sp>
+        <p:nvSpPr>
+          <p:cNvPr id="38" name="Rounded Rectangle 37"/>
+          <p:cNvSpPr/>
+          <p:nvPr/>
+        </p:nvSpPr>
+        <p:spPr>
+          <a:xfrm>
+            <a:off x="6217920" y="5193792"/>
+            <a:ext cx="5367528" cy="978408"/>
+          </a:xfrm>
+          <a:prstGeom prst="roundRect">
+            <a:avLst>
+              <a:gd name="adj" fmla="val 12000"/>
+            </a:avLst>
+          </a:prstGeom>
+          <a:solidFill>
+            <a:srgbClr val="EEF3F5"/>
+          </a:solidFill>
+          <a:ln>
+            <a:noFill/>
+          </a:ln>
+          <a:effectLst/>
+        </p:spPr>
+        <p:style>
+          <a:lnRef idx="1">
+            <a:schemeClr val="accent1"/>
+          </a:lnRef>
+          <a:fillRef idx="3">
+            <a:schemeClr val="accent1"/>
+          </a:fillRef>
+          <a:effectRef idx="2">
+            <a:schemeClr val="accent1"/>
+          </a:effectRef>
+          <a:fontRef idx="minor">
+            <a:schemeClr val="lt1"/>
+          </a:fontRef>
+        </p:style>
+        <p:txBody>
+          <a:bodyPr rtlCol="0" anchor="ctr"/>
+          <a:lstStyle/>
+          <a:p>
+            <a:pPr algn="ctr"/>
+          </a:p>
+        </p:txBody>
+      </p:sp>
+      <p:sp>
+        <p:nvSpPr>
+          <p:cNvPr id="39" name="Oval 38"/>
+          <p:cNvSpPr/>
+          <p:nvPr/>
+        </p:nvSpPr>
+        <p:spPr>
+          <a:xfrm>
+            <a:off x="6455664" y="5404104"/>
+            <a:ext cx="557784" cy="557784"/>
+          </a:xfrm>
+          <a:prstGeom prst="ellipse">
+            <a:avLst/>
+          </a:prstGeom>
+          <a:solidFill>
+            <a:srgbClr val="3B82C4"/>
+          </a:solidFill>
+          <a:ln>
+            <a:noFill/>
+          </a:ln>
+          <a:effectLst/>
+        </p:spPr>
+        <p:style>
+          <a:lnRef idx="1">
+            <a:schemeClr val="accent1"/>
+          </a:lnRef>
+          <a:fillRef idx="3">
+            <a:schemeClr val="accent1"/>
+          </a:fillRef>
+          <a:effectRef idx="2">
+            <a:schemeClr val="accent1"/>
+          </a:effectRef>
+          <a:fontRef idx="minor">
+            <a:schemeClr val="lt1"/>
+          </a:fontRef>
+        </p:style>
+        <p:txBody>
+          <a:bodyPr rtlCol="0" anchor="ctr"/>
+          <a:lstStyle/>
+          <a:p>
+            <a:pPr algn="ctr"/>
+          </a:p>
+        </p:txBody>
+      </p:sp>
+      <p:sp>
+        <p:nvSpPr>
+          <p:cNvPr id="40" name="TextBox 39"/>
+          <p:cNvSpPr txBox="1"/>
+          <p:nvPr/>
+        </p:nvSpPr>
+        <p:spPr>
+          <a:xfrm>
+            <a:off x="6455664" y="5404104"/>
+            <a:ext cx="557784" cy="557784"/>
+          </a:xfrm>
+          <a:prstGeom prst="rect">
+            <a:avLst/>
+          </a:prstGeom>
+          <a:noFill/>
+        </p:spPr>
+        <p:txBody>
+          <a:bodyPr wrap="square" lIns="0" rIns="0" tIns="0" bIns="0" anchor="ctr">
+            <a:spAutoFit/>
+          </a:bodyPr>
+          <a:lstStyle/>
+          <a:p>
+            <a:pPr algn="ctr"/>
+            <a:r>
+              <a:rPr sz="2000" b="1">
+                <a:solidFill>
+                  <a:srgbClr val="FFFFFF"/>
+                </a:solidFill>
+                <a:latin typeface="Carlito"/>
+              </a:rPr>
+              <a:t>8</a:t>
+            </a:r>
+          </a:p>
+        </p:txBody>
+      </p:sp>
+      <p:sp>
+        <p:nvSpPr>
+          <p:cNvPr id="41" name="TextBox 40"/>
+          <p:cNvSpPr txBox="1"/>
+          <p:nvPr/>
+        </p:nvSpPr>
+        <p:spPr>
+          <a:xfrm>
+            <a:off x="7251192" y="5193792"/>
+            <a:ext cx="4206240" cy="978408"/>
+          </a:xfrm>
+          <a:prstGeom prst="rect">
+            <a:avLst/>
+          </a:prstGeom>
+          <a:noFill/>
+        </p:spPr>
+        <p:txBody>
+          <a:bodyPr wrap="square" lIns="0" rIns="0" tIns="0" bIns="0" anchor="ctr">
+            <a:spAutoFit/>
+          </a:bodyPr>
+          <a:lstStyle/>
+          <a:p>
+            <a:pPr algn="l"/>
+            <a:r>
+              <a:rPr sz="2250" b="1">
+                <a:solidFill>
+                  <a:srgbClr val="0B1F2A"/>
+                </a:solidFill>
+                <a:latin typeface="Carlito"/>
+              </a:rPr>
+              <a:t>Capstone &amp; Demo Day</a:t>
             </a:r>
           </a:p>
         </p:txBody>
@@ -14409,759 +15409,43 @@
       <p:grpSpPr/>
       <p:sp>
         <p:nvSpPr>
-          <p:cNvPr id="2" name="Title"/>
-          <p:cNvSpPr txBox="1"/>
-          <p:nvPr/>
-        </p:nvSpPr>
-        <p:spPr>
-          <a:xfrm>
-            <a:off x="612648" y="594360"/>
-            <a:ext cx="10972800" cy="612648"/>
-          </a:xfrm>
-          <a:prstGeom prst="rect">
-            <a:avLst/>
-          </a:prstGeom>
-          <a:noFill/>
-        </p:spPr>
-        <p:txBody>
-          <a:bodyPr wrap="square" lIns="0" rIns="0" tIns="0" bIns="0" anchor="t">
-            <a:spAutoFit/>
-          </a:bodyPr>
-          <a:lstStyle/>
-          <a:p>
-            <a:pPr algn="l"/>
-            <a:r>
-              <a:rPr sz="4000" b="1">
-                <a:solidFill>
-                  <a:srgbClr val="0B1F2A"/>
-                </a:solidFill>
-                <a:latin typeface="Caladea Bold"/>
-              </a:rPr>
-              <a:t>FastAPI: GET</a:t>
-            </a:r>
-          </a:p>
-        </p:txBody>
-      </p:sp>
-      <p:sp>
-        <p:nvSpPr>
-          <p:cNvPr id="3" name="SlideNo"/>
-          <p:cNvSpPr txBox="1"/>
-          <p:nvPr/>
-        </p:nvSpPr>
-        <p:spPr>
-          <a:xfrm>
-            <a:off x="11219688" y="6373368"/>
-            <a:ext cx="694944" cy="256032"/>
-          </a:xfrm>
-          <a:prstGeom prst="rect">
-            <a:avLst/>
-          </a:prstGeom>
-          <a:noFill/>
-        </p:spPr>
-        <p:txBody>
-          <a:bodyPr wrap="square" lIns="0" rIns="0" tIns="0" bIns="0" anchor="t">
-            <a:spAutoFit/>
-          </a:bodyPr>
-          <a:lstStyle/>
-          <a:p>
-            <a:pPr algn="l"/>
-            <a:r>
-              <a:rPr sz="1350" b="0">
-                <a:solidFill>
-                  <a:srgbClr val="6B7F8A"/>
-                </a:solidFill>
-                <a:latin typeface="Carlito"/>
-              </a:rPr>
-              <a:t>25</a:t>
-            </a:r>
-          </a:p>
-        </p:txBody>
-      </p:sp>
-      <p:sp>
-        <p:nvSpPr>
-          <p:cNvPr id="4" name="Rounded Rectangle 3"/>
-          <p:cNvSpPr/>
-          <p:nvPr/>
-        </p:nvSpPr>
-        <p:spPr>
-          <a:xfrm>
-            <a:off x="612648" y="1709928"/>
-            <a:ext cx="4937760" cy="822960"/>
-          </a:xfrm>
-          <a:prstGeom prst="roundRect">
-            <a:avLst>
-              <a:gd name="adj" fmla="val 12000"/>
-            </a:avLst>
-          </a:prstGeom>
-          <a:solidFill>
-            <a:srgbClr val="EEF3F5"/>
-          </a:solidFill>
-          <a:ln>
-            <a:noFill/>
-          </a:ln>
-          <a:effectLst/>
-        </p:spPr>
-        <p:style>
-          <a:lnRef idx="1">
-            <a:schemeClr val="accent1"/>
-          </a:lnRef>
-          <a:fillRef idx="3">
-            <a:schemeClr val="accent1"/>
-          </a:fillRef>
-          <a:effectRef idx="2">
-            <a:schemeClr val="accent1"/>
-          </a:effectRef>
-          <a:fontRef idx="minor">
-            <a:schemeClr val="lt1"/>
-          </a:fontRef>
-        </p:style>
-        <p:txBody>
-          <a:bodyPr rtlCol="0" anchor="ctr"/>
-          <a:lstStyle/>
-          <a:p>
-            <a:pPr algn="ctr"/>
-          </a:p>
-        </p:txBody>
-      </p:sp>
-      <p:sp>
-        <p:nvSpPr>
-          <p:cNvPr id="5" name="Oval 4"/>
-          <p:cNvSpPr/>
-          <p:nvPr/>
-        </p:nvSpPr>
-        <p:spPr>
-          <a:xfrm>
-            <a:off x="841248" y="2020824"/>
-            <a:ext cx="201168" cy="201168"/>
-          </a:xfrm>
-          <a:prstGeom prst="ellipse">
-            <a:avLst/>
-          </a:prstGeom>
-          <a:solidFill>
-            <a:srgbClr val="1FA67A"/>
-          </a:solidFill>
-          <a:ln>
-            <a:noFill/>
-          </a:ln>
-          <a:effectLst/>
-        </p:spPr>
-        <p:style>
-          <a:lnRef idx="1">
-            <a:schemeClr val="accent1"/>
-          </a:lnRef>
-          <a:fillRef idx="3">
-            <a:schemeClr val="accent1"/>
-          </a:fillRef>
-          <a:effectRef idx="2">
-            <a:schemeClr val="accent1"/>
-          </a:effectRef>
-          <a:fontRef idx="minor">
-            <a:schemeClr val="lt1"/>
-          </a:fontRef>
-        </p:style>
-        <p:txBody>
-          <a:bodyPr rtlCol="0" anchor="ctr"/>
-          <a:lstStyle/>
-          <a:p>
-            <a:pPr algn="ctr"/>
-          </a:p>
-        </p:txBody>
-      </p:sp>
-      <p:sp>
-        <p:nvSpPr>
-          <p:cNvPr id="6" name="TextBox 5"/>
-          <p:cNvSpPr txBox="1"/>
-          <p:nvPr/>
-        </p:nvSpPr>
-        <p:spPr>
-          <a:xfrm>
-            <a:off x="1252728" y="1709928"/>
-            <a:ext cx="4069080" cy="822960"/>
-          </a:xfrm>
-          <a:prstGeom prst="rect">
-            <a:avLst/>
-          </a:prstGeom>
-          <a:noFill/>
-        </p:spPr>
-        <p:txBody>
-          <a:bodyPr wrap="square" lIns="0" rIns="0" tIns="0" bIns="0" anchor="ctr">
-            <a:spAutoFit/>
-          </a:bodyPr>
-          <a:lstStyle/>
-          <a:p>
-            <a:pPr algn="l"/>
-            <a:r>
-              <a:rPr sz="2000" b="0">
-                <a:solidFill>
-                  <a:srgbClr val="0B1F2A"/>
-                </a:solidFill>
-                <a:latin typeface="Carlito"/>
-              </a:rPr>
-              <a:t>GET reads data</a:t>
-            </a:r>
-          </a:p>
-        </p:txBody>
-      </p:sp>
-      <p:sp>
-        <p:nvSpPr>
-          <p:cNvPr id="7" name="Rounded Rectangle 6"/>
-          <p:cNvSpPr/>
-          <p:nvPr/>
-        </p:nvSpPr>
-        <p:spPr>
-          <a:xfrm>
-            <a:off x="612648" y="2715768"/>
-            <a:ext cx="4937760" cy="822960"/>
-          </a:xfrm>
-          <a:prstGeom prst="roundRect">
-            <a:avLst>
-              <a:gd name="adj" fmla="val 12000"/>
-            </a:avLst>
-          </a:prstGeom>
-          <a:solidFill>
-            <a:srgbClr val="EEF3F5"/>
-          </a:solidFill>
-          <a:ln>
-            <a:noFill/>
-          </a:ln>
-          <a:effectLst/>
-        </p:spPr>
-        <p:style>
-          <a:lnRef idx="1">
-            <a:schemeClr val="accent1"/>
-          </a:lnRef>
-          <a:fillRef idx="3">
-            <a:schemeClr val="accent1"/>
-          </a:fillRef>
-          <a:effectRef idx="2">
-            <a:schemeClr val="accent1"/>
-          </a:effectRef>
-          <a:fontRef idx="minor">
-            <a:schemeClr val="lt1"/>
-          </a:fontRef>
-        </p:style>
-        <p:txBody>
-          <a:bodyPr rtlCol="0" anchor="ctr"/>
-          <a:lstStyle/>
-          <a:p>
-            <a:pPr algn="ctr"/>
-          </a:p>
-        </p:txBody>
-      </p:sp>
-      <p:sp>
-        <p:nvSpPr>
-          <p:cNvPr id="8" name="Oval 7"/>
-          <p:cNvSpPr/>
-          <p:nvPr/>
-        </p:nvSpPr>
-        <p:spPr>
-          <a:xfrm>
-            <a:off x="841248" y="3026664"/>
-            <a:ext cx="201168" cy="201168"/>
-          </a:xfrm>
-          <a:prstGeom prst="ellipse">
-            <a:avLst/>
-          </a:prstGeom>
-          <a:solidFill>
-            <a:srgbClr val="1FA67A"/>
-          </a:solidFill>
-          <a:ln>
-            <a:noFill/>
-          </a:ln>
-          <a:effectLst/>
-        </p:spPr>
-        <p:style>
-          <a:lnRef idx="1">
-            <a:schemeClr val="accent1"/>
-          </a:lnRef>
-          <a:fillRef idx="3">
-            <a:schemeClr val="accent1"/>
-          </a:fillRef>
-          <a:effectRef idx="2">
-            <a:schemeClr val="accent1"/>
-          </a:effectRef>
-          <a:fontRef idx="minor">
-            <a:schemeClr val="lt1"/>
-          </a:fontRef>
-        </p:style>
-        <p:txBody>
-          <a:bodyPr rtlCol="0" anchor="ctr"/>
-          <a:lstStyle/>
-          <a:p>
-            <a:pPr algn="ctr"/>
-          </a:p>
-        </p:txBody>
-      </p:sp>
-      <p:sp>
-        <p:nvSpPr>
-          <p:cNvPr id="9" name="TextBox 8"/>
-          <p:cNvSpPr txBox="1"/>
-          <p:nvPr/>
-        </p:nvSpPr>
-        <p:spPr>
-          <a:xfrm>
-            <a:off x="1252728" y="2715768"/>
-            <a:ext cx="4069080" cy="822960"/>
-          </a:xfrm>
-          <a:prstGeom prst="rect">
-            <a:avLst/>
-          </a:prstGeom>
-          <a:noFill/>
-        </p:spPr>
-        <p:txBody>
-          <a:bodyPr wrap="square" lIns="0" rIns="0" tIns="0" bIns="0" anchor="ctr">
-            <a:spAutoFit/>
-          </a:bodyPr>
-          <a:lstStyle/>
-          <a:p>
-            <a:pPr algn="l"/>
-            <a:r>
-              <a:rPr sz="2000" b="0">
-                <a:solidFill>
-                  <a:srgbClr val="0B1F2A"/>
-                </a:solidFill>
-                <a:latin typeface="Carlito"/>
-              </a:rPr>
-              <a:t>Return a dict, FastAPI sends JSON</a:t>
-            </a:r>
-          </a:p>
-        </p:txBody>
-      </p:sp>
-      <p:sp>
-        <p:nvSpPr>
-          <p:cNvPr id="10" name="Rounded Rectangle 9"/>
-          <p:cNvSpPr/>
-          <p:nvPr/>
-        </p:nvSpPr>
-        <p:spPr>
-          <a:xfrm>
-            <a:off x="612648" y="3721608"/>
-            <a:ext cx="4937760" cy="822960"/>
-          </a:xfrm>
-          <a:prstGeom prst="roundRect">
-            <a:avLst>
-              <a:gd name="adj" fmla="val 12000"/>
-            </a:avLst>
-          </a:prstGeom>
-          <a:solidFill>
-            <a:srgbClr val="EEF3F5"/>
-          </a:solidFill>
-          <a:ln>
-            <a:noFill/>
-          </a:ln>
-          <a:effectLst/>
-        </p:spPr>
-        <p:style>
-          <a:lnRef idx="1">
-            <a:schemeClr val="accent1"/>
-          </a:lnRef>
-          <a:fillRef idx="3">
-            <a:schemeClr val="accent1"/>
-          </a:fillRef>
-          <a:effectRef idx="2">
-            <a:schemeClr val="accent1"/>
-          </a:effectRef>
-          <a:fontRef idx="minor">
-            <a:schemeClr val="lt1"/>
-          </a:fontRef>
-        </p:style>
-        <p:txBody>
-          <a:bodyPr rtlCol="0" anchor="ctr"/>
-          <a:lstStyle/>
-          <a:p>
-            <a:pPr algn="ctr"/>
-          </a:p>
-        </p:txBody>
-      </p:sp>
-      <p:sp>
-        <p:nvSpPr>
-          <p:cNvPr id="11" name="Oval 10"/>
-          <p:cNvSpPr/>
-          <p:nvPr/>
-        </p:nvSpPr>
-        <p:spPr>
-          <a:xfrm>
-            <a:off x="841248" y="4032504"/>
-            <a:ext cx="201168" cy="201168"/>
-          </a:xfrm>
-          <a:prstGeom prst="ellipse">
-            <a:avLst/>
-          </a:prstGeom>
-          <a:solidFill>
-            <a:srgbClr val="1FA67A"/>
-          </a:solidFill>
-          <a:ln>
-            <a:noFill/>
-          </a:ln>
-          <a:effectLst/>
-        </p:spPr>
-        <p:style>
-          <a:lnRef idx="1">
-            <a:schemeClr val="accent1"/>
-          </a:lnRef>
-          <a:fillRef idx="3">
-            <a:schemeClr val="accent1"/>
-          </a:fillRef>
-          <a:effectRef idx="2">
-            <a:schemeClr val="accent1"/>
-          </a:effectRef>
-          <a:fontRef idx="minor">
-            <a:schemeClr val="lt1"/>
-          </a:fontRef>
-        </p:style>
-        <p:txBody>
-          <a:bodyPr rtlCol="0" anchor="ctr"/>
-          <a:lstStyle/>
-          <a:p>
-            <a:pPr algn="ctr"/>
-          </a:p>
-        </p:txBody>
-      </p:sp>
-      <p:sp>
-        <p:nvSpPr>
-          <p:cNvPr id="12" name="TextBox 11"/>
-          <p:cNvSpPr txBox="1"/>
-          <p:nvPr/>
-        </p:nvSpPr>
-        <p:spPr>
-          <a:xfrm>
-            <a:off x="1252728" y="3721608"/>
-            <a:ext cx="4069080" cy="822960"/>
-          </a:xfrm>
-          <a:prstGeom prst="rect">
-            <a:avLst/>
-          </a:prstGeom>
-          <a:noFill/>
-        </p:spPr>
-        <p:txBody>
-          <a:bodyPr wrap="square" lIns="0" rIns="0" tIns="0" bIns="0" anchor="ctr">
-            <a:spAutoFit/>
-          </a:bodyPr>
-          <a:lstStyle/>
-          <a:p>
-            <a:pPr algn="l"/>
-            <a:r>
-              <a:rPr sz="2000" b="0">
-                <a:solidFill>
-                  <a:srgbClr val="0B1F2A"/>
-                </a:solidFill>
-                <a:latin typeface="Carlito"/>
-              </a:rPr>
-              <a:t>Run: uvicorn 10_get_routes:app --reload</a:t>
-            </a:r>
-          </a:p>
-        </p:txBody>
-      </p:sp>
-      <p:sp>
-        <p:nvSpPr>
-          <p:cNvPr id="13" name="Rounded Rectangle 12"/>
-          <p:cNvSpPr/>
-          <p:nvPr/>
-        </p:nvSpPr>
-        <p:spPr>
-          <a:xfrm>
-            <a:off x="612648" y="4727448"/>
-            <a:ext cx="4937760" cy="822960"/>
-          </a:xfrm>
-          <a:prstGeom prst="roundRect">
-            <a:avLst>
-              <a:gd name="adj" fmla="val 12000"/>
-            </a:avLst>
-          </a:prstGeom>
-          <a:solidFill>
-            <a:srgbClr val="EEF3F5"/>
-          </a:solidFill>
-          <a:ln>
-            <a:noFill/>
-          </a:ln>
-          <a:effectLst/>
-        </p:spPr>
-        <p:style>
-          <a:lnRef idx="1">
-            <a:schemeClr val="accent1"/>
-          </a:lnRef>
-          <a:fillRef idx="3">
-            <a:schemeClr val="accent1"/>
-          </a:fillRef>
-          <a:effectRef idx="2">
-            <a:schemeClr val="accent1"/>
-          </a:effectRef>
-          <a:fontRef idx="minor">
-            <a:schemeClr val="lt1"/>
-          </a:fontRef>
-        </p:style>
-        <p:txBody>
-          <a:bodyPr rtlCol="0" anchor="ctr"/>
-          <a:lstStyle/>
-          <a:p>
-            <a:pPr algn="ctr"/>
-          </a:p>
-        </p:txBody>
-      </p:sp>
-      <p:sp>
-        <p:nvSpPr>
-          <p:cNvPr id="14" name="Oval 13"/>
-          <p:cNvSpPr/>
-          <p:nvPr/>
-        </p:nvSpPr>
-        <p:spPr>
-          <a:xfrm>
-            <a:off x="841248" y="5038344"/>
-            <a:ext cx="201168" cy="201168"/>
-          </a:xfrm>
-          <a:prstGeom prst="ellipse">
-            <a:avLst/>
-          </a:prstGeom>
-          <a:solidFill>
-            <a:srgbClr val="1FA67A"/>
-          </a:solidFill>
-          <a:ln>
-            <a:noFill/>
-          </a:ln>
-          <a:effectLst/>
-        </p:spPr>
-        <p:style>
-          <a:lnRef idx="1">
-            <a:schemeClr val="accent1"/>
-          </a:lnRef>
-          <a:fillRef idx="3">
-            <a:schemeClr val="accent1"/>
-          </a:fillRef>
-          <a:effectRef idx="2">
-            <a:schemeClr val="accent1"/>
-          </a:effectRef>
-          <a:fontRef idx="minor">
-            <a:schemeClr val="lt1"/>
-          </a:fontRef>
-        </p:style>
-        <p:txBody>
-          <a:bodyPr rtlCol="0" anchor="ctr"/>
-          <a:lstStyle/>
-          <a:p>
-            <a:pPr algn="ctr"/>
-          </a:p>
-        </p:txBody>
-      </p:sp>
-      <p:sp>
-        <p:nvSpPr>
-          <p:cNvPr id="15" name="TextBox 14"/>
-          <p:cNvSpPr txBox="1"/>
-          <p:nvPr/>
-        </p:nvSpPr>
-        <p:spPr>
-          <a:xfrm>
-            <a:off x="1252728" y="4727448"/>
-            <a:ext cx="4069080" cy="822960"/>
-          </a:xfrm>
-          <a:prstGeom prst="rect">
-            <a:avLst/>
-          </a:prstGeom>
-          <a:noFill/>
-        </p:spPr>
-        <p:txBody>
-          <a:bodyPr wrap="square" lIns="0" rIns="0" tIns="0" bIns="0" anchor="ctr">
-            <a:spAutoFit/>
-          </a:bodyPr>
-          <a:lstStyle/>
-          <a:p>
-            <a:pPr algn="l"/>
-            <a:r>
-              <a:rPr sz="2000" b="0">
-                <a:solidFill>
-                  <a:srgbClr val="0B1F2A"/>
-                </a:solidFill>
-                <a:latin typeface="Carlito"/>
-              </a:rPr>
-              <a:t>Try /hello/Asha and /docs</a:t>
-            </a:r>
-          </a:p>
-        </p:txBody>
-      </p:sp>
-      <p:sp>
-        <p:nvSpPr>
-          <p:cNvPr id="16" name="Rounded Rectangle 15"/>
-          <p:cNvSpPr/>
-          <p:nvPr/>
-        </p:nvSpPr>
-        <p:spPr>
-          <a:xfrm>
-            <a:off x="5852160" y="1709928"/>
-            <a:ext cx="5733288" cy="4023360"/>
-          </a:xfrm>
-          <a:prstGeom prst="roundRect">
-            <a:avLst>
-              <a:gd name="adj" fmla="val 4000"/>
-            </a:avLst>
-          </a:prstGeom>
-          <a:solidFill>
-            <a:srgbClr val="0B1F2A"/>
-          </a:solidFill>
-          <a:ln>
-            <a:noFill/>
-          </a:ln>
-          <a:effectLst/>
-        </p:spPr>
-        <p:style>
-          <a:lnRef idx="1">
-            <a:schemeClr val="accent1"/>
-          </a:lnRef>
-          <a:fillRef idx="3">
-            <a:schemeClr val="accent1"/>
-          </a:fillRef>
-          <a:effectRef idx="2">
-            <a:schemeClr val="accent1"/>
-          </a:effectRef>
-          <a:fontRef idx="minor">
-            <a:schemeClr val="lt1"/>
-          </a:fontRef>
-        </p:style>
-        <p:txBody>
-          <a:bodyPr rtlCol="0" anchor="ctr"/>
-          <a:lstStyle/>
-          <a:p>
-            <a:pPr algn="ctr"/>
-          </a:p>
-        </p:txBody>
-      </p:sp>
-      <p:sp>
-        <p:nvSpPr>
-          <p:cNvPr id="17" name="TextBox 16"/>
-          <p:cNvSpPr txBox="1"/>
-          <p:nvPr/>
-        </p:nvSpPr>
-        <p:spPr>
-          <a:xfrm>
-            <a:off x="6126480" y="1938528"/>
-            <a:ext cx="5184648" cy="3566160"/>
-          </a:xfrm>
-          <a:prstGeom prst="rect">
-            <a:avLst/>
-          </a:prstGeom>
-          <a:noFill/>
-        </p:spPr>
-        <p:txBody>
-          <a:bodyPr wrap="square" lIns="0" rIns="0" tIns="0" bIns="0" anchor="t">
-            <a:spAutoFit/>
-          </a:bodyPr>
-          <a:lstStyle/>
-          <a:p>
-            <a:pPr algn="l"/>
-            <a:r>
-              <a:rPr sz="1500" b="0">
-                <a:solidFill>
-                  <a:srgbClr val="E2E8F0"/>
-                </a:solidFill>
-                <a:latin typeface="Courier New"/>
-              </a:rPr>
-              <a:t>@app.get("/")</a:t>
-            </a:r>
-          </a:p>
-          <a:p>
-            <a:pPr algn="l"/>
-            <a:r>
-              <a:rPr sz="1500" b="0">
-                <a:solidFill>
-                  <a:srgbClr val="E2E8F0"/>
-                </a:solidFill>
-                <a:latin typeface="Courier New"/>
-              </a:rPr>
-              <a:t>def home():</a:t>
-            </a:r>
-          </a:p>
-          <a:p>
-            <a:pPr algn="l"/>
-            <a:r>
-              <a:rPr sz="1500" b="0">
-                <a:solidFill>
-                  <a:srgbClr val="E2E8F0"/>
-                </a:solidFill>
-                <a:latin typeface="Courier New"/>
-              </a:rPr>
-              <a:t>    return {"message": "Hello"}</a:t>
-            </a:r>
-          </a:p>
-          <a:p>
-            <a:pPr algn="l"/>
-            <a:r>
-              <a:rPr sz="1500" b="0">
-                <a:solidFill>
-                  <a:srgbClr val="E2E8F0"/>
-                </a:solidFill>
-                <a:latin typeface="Courier New"/>
-              </a:rPr>
-              <a:t/>
-            </a:r>
-          </a:p>
-          <a:p>
-            <a:pPr algn="l"/>
-            <a:r>
-              <a:rPr sz="1500" b="0">
-                <a:solidFill>
-                  <a:srgbClr val="E2E8F0"/>
-                </a:solidFill>
-                <a:latin typeface="Courier New"/>
-              </a:rPr>
-              <a:t>@app.get("/hello/{name}")</a:t>
-            </a:r>
-          </a:p>
-          <a:p>
-            <a:pPr algn="l"/>
-            <a:r>
-              <a:rPr sz="1500" b="0">
-                <a:solidFill>
-                  <a:srgbClr val="E2E8F0"/>
-                </a:solidFill>
-                <a:latin typeface="Courier New"/>
-              </a:rPr>
-              <a:t>def hello(name: str):</a:t>
-            </a:r>
-          </a:p>
-          <a:p>
-            <a:pPr algn="l"/>
-            <a:r>
-              <a:rPr sz="1500" b="0">
-                <a:solidFill>
-                  <a:srgbClr val="E2E8F0"/>
-                </a:solidFill>
-                <a:latin typeface="Courier New"/>
-              </a:rPr>
-              <a:t>    return {"message": f"Hello, {name}"}</a:t>
-            </a:r>
-          </a:p>
-        </p:txBody>
-      </p:sp>
-      <p:sp>
-        <p:nvSpPr>
-          <p:cNvPr id="18" name="TextBox 17"/>
-          <p:cNvSpPr txBox="1"/>
-          <p:nvPr/>
-        </p:nvSpPr>
-        <p:spPr>
-          <a:xfrm>
-            <a:off x="612648" y="5943600"/>
-            <a:ext cx="10515600" cy="365760"/>
-          </a:xfrm>
-          <a:prstGeom prst="rect">
-            <a:avLst/>
-          </a:prstGeom>
-          <a:noFill/>
-        </p:spPr>
-        <p:txBody>
-          <a:bodyPr wrap="square" lIns="0" rIns="0" tIns="0" bIns="0" anchor="t">
-            <a:spAutoFit/>
-          </a:bodyPr>
-          <a:lstStyle/>
-          <a:p>
-            <a:pPr algn="l"/>
-            <a:r>
-              <a:rPr sz="1850" b="0">
-                <a:solidFill>
-                  <a:srgbClr val="6B7F8A"/>
-                </a:solidFill>
-                <a:latin typeface="Carlito"/>
-              </a:rPr>
-              <a:t>Live: run the file and try the routes.   |   File: lecture/10_get_routes.py</a:t>
-            </a:r>
+          <p:cNvPr id="2" name="Text 0"/>
+          <p:cNvSpPr/>
+          <p:nvPr/>
+        </p:nvSpPr>
+        <p:spPr>
+          <a:xfrm>
+            <a:off x="1256475" y="2314377"/>
+            <a:ext cx="10484778" cy="1950641"/>
+          </a:xfrm>
+          <a:prstGeom prst="rect">
+            <a:avLst/>
+          </a:prstGeom>
+          <a:noFill/>
+          <a:ln/>
+        </p:spPr>
+        <p:txBody>
+          <a:bodyPr wrap="none" lIns="0" tIns="0" rIns="0" bIns="0" rtlCol="0" anchor="t"/>
+          <a:lstStyle/>
+          <a:p>
+            <a:pPr algn="l" indent="0" marL="0">
+              <a:lnSpc>
+                <a:spcPct val="100000"/>
+              </a:lnSpc>
+              <a:buNone/>
+            </a:pPr>
+            <a:r>
+              <a:rPr lang="en-US" sz="12800" b="1" spc="141" kern="100" dirty="0">
+                <a:solidFill>
+                  <a:srgbClr val="FFFFFF"/>
+                </a:solidFill>
+                <a:latin typeface="Caladea Bold" pitchFamily="34" charset="0"/>
+                <a:ea typeface="Caladea Bold" pitchFamily="34" charset="-122"/>
+                <a:cs typeface="Caladea Bold" pitchFamily="34" charset="-120"/>
+              </a:rPr>
+              <a:t>Thank you</a:t>
+            </a:r>
+            <a:endParaRPr lang="en-US" sz="12800" dirty="0"/>
           </a:p>
         </p:txBody>
       </p:sp>
@@ -15174,3666 +15458,6 @@
 </file>
 
 <file path=ppt/slides/slide46.xml><?xml version="1.0" encoding="utf-8"?>
-<p:sld xmlns:a="http://schemas.openxmlformats.org/drawingml/2006/main" xmlns:p="http://schemas.openxmlformats.org/presentationml/2006/main" xmlns:r="http://schemas.openxmlformats.org/officeDocument/2006/relationships">
-  <p:cSld>
-    <p:spTree>
-      <p:nvGrpSpPr>
-        <p:cNvPr id="1" name=""/>
-        <p:cNvGrpSpPr/>
-        <p:nvPr/>
-      </p:nvGrpSpPr>
-      <p:grpSpPr/>
-      <p:sp>
-        <p:nvSpPr>
-          <p:cNvPr id="2" name="Title"/>
-          <p:cNvSpPr txBox="1"/>
-          <p:nvPr/>
-        </p:nvSpPr>
-        <p:spPr>
-          <a:xfrm>
-            <a:off x="612648" y="594360"/>
-            <a:ext cx="10972800" cy="612648"/>
-          </a:xfrm>
-          <a:prstGeom prst="rect">
-            <a:avLst/>
-          </a:prstGeom>
-          <a:noFill/>
-        </p:spPr>
-        <p:txBody>
-          <a:bodyPr wrap="square" lIns="0" rIns="0" tIns="0" bIns="0" anchor="t">
-            <a:spAutoFit/>
-          </a:bodyPr>
-          <a:lstStyle/>
-          <a:p>
-            <a:pPr algn="l"/>
-            <a:r>
-              <a:rPr sz="4000" b="1">
-                <a:solidFill>
-                  <a:srgbClr val="0B1F2A"/>
-                </a:solidFill>
-                <a:latin typeface="Caladea Bold"/>
-              </a:rPr>
-              <a:t>FastAPI: POST</a:t>
-            </a:r>
-          </a:p>
-        </p:txBody>
-      </p:sp>
-      <p:sp>
-        <p:nvSpPr>
-          <p:cNvPr id="3" name="SlideNo"/>
-          <p:cNvSpPr txBox="1"/>
-          <p:nvPr/>
-        </p:nvSpPr>
-        <p:spPr>
-          <a:xfrm>
-            <a:off x="11219688" y="6373368"/>
-            <a:ext cx="694944" cy="256032"/>
-          </a:xfrm>
-          <a:prstGeom prst="rect">
-            <a:avLst/>
-          </a:prstGeom>
-          <a:noFill/>
-        </p:spPr>
-        <p:txBody>
-          <a:bodyPr wrap="square" lIns="0" rIns="0" tIns="0" bIns="0" anchor="t">
-            <a:spAutoFit/>
-          </a:bodyPr>
-          <a:lstStyle/>
-          <a:p>
-            <a:pPr algn="l"/>
-            <a:r>
-              <a:rPr sz="1350" b="0">
-                <a:solidFill>
-                  <a:srgbClr val="6B7F8A"/>
-                </a:solidFill>
-                <a:latin typeface="Carlito"/>
-              </a:rPr>
-              <a:t>26</a:t>
-            </a:r>
-          </a:p>
-        </p:txBody>
-      </p:sp>
-      <p:sp>
-        <p:nvSpPr>
-          <p:cNvPr id="4" name="Rounded Rectangle 3"/>
-          <p:cNvSpPr/>
-          <p:nvPr/>
-        </p:nvSpPr>
-        <p:spPr>
-          <a:xfrm>
-            <a:off x="612648" y="1709928"/>
-            <a:ext cx="4937760" cy="822960"/>
-          </a:xfrm>
-          <a:prstGeom prst="roundRect">
-            <a:avLst>
-              <a:gd name="adj" fmla="val 12000"/>
-            </a:avLst>
-          </a:prstGeom>
-          <a:solidFill>
-            <a:srgbClr val="EEF3F5"/>
-          </a:solidFill>
-          <a:ln>
-            <a:noFill/>
-          </a:ln>
-          <a:effectLst/>
-        </p:spPr>
-        <p:style>
-          <a:lnRef idx="1">
-            <a:schemeClr val="accent1"/>
-          </a:lnRef>
-          <a:fillRef idx="3">
-            <a:schemeClr val="accent1"/>
-          </a:fillRef>
-          <a:effectRef idx="2">
-            <a:schemeClr val="accent1"/>
-          </a:effectRef>
-          <a:fontRef idx="minor">
-            <a:schemeClr val="lt1"/>
-          </a:fontRef>
-        </p:style>
-        <p:txBody>
-          <a:bodyPr rtlCol="0" anchor="ctr"/>
-          <a:lstStyle/>
-          <a:p>
-            <a:pPr algn="ctr"/>
-          </a:p>
-        </p:txBody>
-      </p:sp>
-      <p:sp>
-        <p:nvSpPr>
-          <p:cNvPr id="5" name="Oval 4"/>
-          <p:cNvSpPr/>
-          <p:nvPr/>
-        </p:nvSpPr>
-        <p:spPr>
-          <a:xfrm>
-            <a:off x="841248" y="2020824"/>
-            <a:ext cx="201168" cy="201168"/>
-          </a:xfrm>
-          <a:prstGeom prst="ellipse">
-            <a:avLst/>
-          </a:prstGeom>
-          <a:solidFill>
-            <a:srgbClr val="1FA67A"/>
-          </a:solidFill>
-          <a:ln>
-            <a:noFill/>
-          </a:ln>
-          <a:effectLst/>
-        </p:spPr>
-        <p:style>
-          <a:lnRef idx="1">
-            <a:schemeClr val="accent1"/>
-          </a:lnRef>
-          <a:fillRef idx="3">
-            <a:schemeClr val="accent1"/>
-          </a:fillRef>
-          <a:effectRef idx="2">
-            <a:schemeClr val="accent1"/>
-          </a:effectRef>
-          <a:fontRef idx="minor">
-            <a:schemeClr val="lt1"/>
-          </a:fontRef>
-        </p:style>
-        <p:txBody>
-          <a:bodyPr rtlCol="0" anchor="ctr"/>
-          <a:lstStyle/>
-          <a:p>
-            <a:pPr algn="ctr"/>
-          </a:p>
-        </p:txBody>
-      </p:sp>
-      <p:sp>
-        <p:nvSpPr>
-          <p:cNvPr id="6" name="TextBox 5"/>
-          <p:cNvSpPr txBox="1"/>
-          <p:nvPr/>
-        </p:nvSpPr>
-        <p:spPr>
-          <a:xfrm>
-            <a:off x="1252728" y="1709928"/>
-            <a:ext cx="4069080" cy="822960"/>
-          </a:xfrm>
-          <a:prstGeom prst="rect">
-            <a:avLst/>
-          </a:prstGeom>
-          <a:noFill/>
-        </p:spPr>
-        <p:txBody>
-          <a:bodyPr wrap="square" lIns="0" rIns="0" tIns="0" bIns="0" anchor="ctr">
-            <a:spAutoFit/>
-          </a:bodyPr>
-          <a:lstStyle/>
-          <a:p>
-            <a:pPr algn="l"/>
-            <a:r>
-              <a:rPr sz="2000" b="0">
-                <a:solidFill>
-                  <a:srgbClr val="0B1F2A"/>
-                </a:solidFill>
-                <a:latin typeface="Carlito"/>
-              </a:rPr>
-              <a:t>POST sends data in the body</a:t>
-            </a:r>
-          </a:p>
-        </p:txBody>
-      </p:sp>
-      <p:sp>
-        <p:nvSpPr>
-          <p:cNvPr id="7" name="Rounded Rectangle 6"/>
-          <p:cNvSpPr/>
-          <p:nvPr/>
-        </p:nvSpPr>
-        <p:spPr>
-          <a:xfrm>
-            <a:off x="612648" y="2715768"/>
-            <a:ext cx="4937760" cy="822960"/>
-          </a:xfrm>
-          <a:prstGeom prst="roundRect">
-            <a:avLst>
-              <a:gd name="adj" fmla="val 12000"/>
-            </a:avLst>
-          </a:prstGeom>
-          <a:solidFill>
-            <a:srgbClr val="EEF3F5"/>
-          </a:solidFill>
-          <a:ln>
-            <a:noFill/>
-          </a:ln>
-          <a:effectLst/>
-        </p:spPr>
-        <p:style>
-          <a:lnRef idx="1">
-            <a:schemeClr val="accent1"/>
-          </a:lnRef>
-          <a:fillRef idx="3">
-            <a:schemeClr val="accent1"/>
-          </a:fillRef>
-          <a:effectRef idx="2">
-            <a:schemeClr val="accent1"/>
-          </a:effectRef>
-          <a:fontRef idx="minor">
-            <a:schemeClr val="lt1"/>
-          </a:fontRef>
-        </p:style>
-        <p:txBody>
-          <a:bodyPr rtlCol="0" anchor="ctr"/>
-          <a:lstStyle/>
-          <a:p>
-            <a:pPr algn="ctr"/>
-          </a:p>
-        </p:txBody>
-      </p:sp>
-      <p:sp>
-        <p:nvSpPr>
-          <p:cNvPr id="8" name="Oval 7"/>
-          <p:cNvSpPr/>
-          <p:nvPr/>
-        </p:nvSpPr>
-        <p:spPr>
-          <a:xfrm>
-            <a:off x="841248" y="3026664"/>
-            <a:ext cx="201168" cy="201168"/>
-          </a:xfrm>
-          <a:prstGeom prst="ellipse">
-            <a:avLst/>
-          </a:prstGeom>
-          <a:solidFill>
-            <a:srgbClr val="1FA67A"/>
-          </a:solidFill>
-          <a:ln>
-            <a:noFill/>
-          </a:ln>
-          <a:effectLst/>
-        </p:spPr>
-        <p:style>
-          <a:lnRef idx="1">
-            <a:schemeClr val="accent1"/>
-          </a:lnRef>
-          <a:fillRef idx="3">
-            <a:schemeClr val="accent1"/>
-          </a:fillRef>
-          <a:effectRef idx="2">
-            <a:schemeClr val="accent1"/>
-          </a:effectRef>
-          <a:fontRef idx="minor">
-            <a:schemeClr val="lt1"/>
-          </a:fontRef>
-        </p:style>
-        <p:txBody>
-          <a:bodyPr rtlCol="0" anchor="ctr"/>
-          <a:lstStyle/>
-          <a:p>
-            <a:pPr algn="ctr"/>
-          </a:p>
-        </p:txBody>
-      </p:sp>
-      <p:sp>
-        <p:nvSpPr>
-          <p:cNvPr id="9" name="TextBox 8"/>
-          <p:cNvSpPr txBox="1"/>
-          <p:nvPr/>
-        </p:nvSpPr>
-        <p:spPr>
-          <a:xfrm>
-            <a:off x="1252728" y="2715768"/>
-            <a:ext cx="4069080" cy="822960"/>
-          </a:xfrm>
-          <a:prstGeom prst="rect">
-            <a:avLst/>
-          </a:prstGeom>
-          <a:noFill/>
-        </p:spPr>
-        <p:txBody>
-          <a:bodyPr wrap="square" lIns="0" rIns="0" tIns="0" bIns="0" anchor="ctr">
-            <a:spAutoFit/>
-          </a:bodyPr>
-          <a:lstStyle/>
-          <a:p>
-            <a:pPr algn="l"/>
-            <a:r>
-              <a:rPr sz="2000" b="0">
-                <a:solidFill>
-                  <a:srgbClr val="0B1F2A"/>
-                </a:solidFill>
-                <a:latin typeface="Carlito"/>
-              </a:rPr>
-              <a:t>The body is JSON: {"name": "Ali"}</a:t>
-            </a:r>
-          </a:p>
-        </p:txBody>
-      </p:sp>
-      <p:sp>
-        <p:nvSpPr>
-          <p:cNvPr id="10" name="Rounded Rectangle 9"/>
-          <p:cNvSpPr/>
-          <p:nvPr/>
-        </p:nvSpPr>
-        <p:spPr>
-          <a:xfrm>
-            <a:off x="612648" y="3721608"/>
-            <a:ext cx="4937760" cy="822960"/>
-          </a:xfrm>
-          <a:prstGeom prst="roundRect">
-            <a:avLst>
-              <a:gd name="adj" fmla="val 12000"/>
-            </a:avLst>
-          </a:prstGeom>
-          <a:solidFill>
-            <a:srgbClr val="EEF3F5"/>
-          </a:solidFill>
-          <a:ln>
-            <a:noFill/>
-          </a:ln>
-          <a:effectLst/>
-        </p:spPr>
-        <p:style>
-          <a:lnRef idx="1">
-            <a:schemeClr val="accent1"/>
-          </a:lnRef>
-          <a:fillRef idx="3">
-            <a:schemeClr val="accent1"/>
-          </a:fillRef>
-          <a:effectRef idx="2">
-            <a:schemeClr val="accent1"/>
-          </a:effectRef>
-          <a:fontRef idx="minor">
-            <a:schemeClr val="lt1"/>
-          </a:fontRef>
-        </p:style>
-        <p:txBody>
-          <a:bodyPr rtlCol="0" anchor="ctr"/>
-          <a:lstStyle/>
-          <a:p>
-            <a:pPr algn="ctr"/>
-          </a:p>
-        </p:txBody>
-      </p:sp>
-      <p:sp>
-        <p:nvSpPr>
-          <p:cNvPr id="11" name="Oval 10"/>
-          <p:cNvSpPr/>
-          <p:nvPr/>
-        </p:nvSpPr>
-        <p:spPr>
-          <a:xfrm>
-            <a:off x="841248" y="4032504"/>
-            <a:ext cx="201168" cy="201168"/>
-          </a:xfrm>
-          <a:prstGeom prst="ellipse">
-            <a:avLst/>
-          </a:prstGeom>
-          <a:solidFill>
-            <a:srgbClr val="1FA67A"/>
-          </a:solidFill>
-          <a:ln>
-            <a:noFill/>
-          </a:ln>
-          <a:effectLst/>
-        </p:spPr>
-        <p:style>
-          <a:lnRef idx="1">
-            <a:schemeClr val="accent1"/>
-          </a:lnRef>
-          <a:fillRef idx="3">
-            <a:schemeClr val="accent1"/>
-          </a:fillRef>
-          <a:effectRef idx="2">
-            <a:schemeClr val="accent1"/>
-          </a:effectRef>
-          <a:fontRef idx="minor">
-            <a:schemeClr val="lt1"/>
-          </a:fontRef>
-        </p:style>
-        <p:txBody>
-          <a:bodyPr rtlCol="0" anchor="ctr"/>
-          <a:lstStyle/>
-          <a:p>
-            <a:pPr algn="ctr"/>
-          </a:p>
-        </p:txBody>
-      </p:sp>
-      <p:sp>
-        <p:nvSpPr>
-          <p:cNvPr id="12" name="TextBox 11"/>
-          <p:cNvSpPr txBox="1"/>
-          <p:nvPr/>
-        </p:nvSpPr>
-        <p:spPr>
-          <a:xfrm>
-            <a:off x="1252728" y="3721608"/>
-            <a:ext cx="4069080" cy="822960"/>
-          </a:xfrm>
-          <a:prstGeom prst="rect">
-            <a:avLst/>
-          </a:prstGeom>
-          <a:noFill/>
-        </p:spPr>
-        <p:txBody>
-          <a:bodyPr wrap="square" lIns="0" rIns="0" tIns="0" bIns="0" anchor="ctr">
-            <a:spAutoFit/>
-          </a:bodyPr>
-          <a:lstStyle/>
-          <a:p>
-            <a:pPr algn="l"/>
-            <a:r>
-              <a:rPr sz="2000" b="0">
-                <a:solidFill>
-                  <a:srgbClr val="0B1F2A"/>
-                </a:solidFill>
-                <a:latin typeface="Carlito"/>
-              </a:rPr>
-              <a:t>BaseModel checks the data</a:t>
-            </a:r>
-          </a:p>
-        </p:txBody>
-      </p:sp>
-      <p:sp>
-        <p:nvSpPr>
-          <p:cNvPr id="13" name="Rounded Rectangle 12"/>
-          <p:cNvSpPr/>
-          <p:nvPr/>
-        </p:nvSpPr>
-        <p:spPr>
-          <a:xfrm>
-            <a:off x="612648" y="4727448"/>
-            <a:ext cx="4937760" cy="822960"/>
-          </a:xfrm>
-          <a:prstGeom prst="roundRect">
-            <a:avLst>
-              <a:gd name="adj" fmla="val 12000"/>
-            </a:avLst>
-          </a:prstGeom>
-          <a:solidFill>
-            <a:srgbClr val="EEF3F5"/>
-          </a:solidFill>
-          <a:ln>
-            <a:noFill/>
-          </a:ln>
-          <a:effectLst/>
-        </p:spPr>
-        <p:style>
-          <a:lnRef idx="1">
-            <a:schemeClr val="accent1"/>
-          </a:lnRef>
-          <a:fillRef idx="3">
-            <a:schemeClr val="accent1"/>
-          </a:fillRef>
-          <a:effectRef idx="2">
-            <a:schemeClr val="accent1"/>
-          </a:effectRef>
-          <a:fontRef idx="minor">
-            <a:schemeClr val="lt1"/>
-          </a:fontRef>
-        </p:style>
-        <p:txBody>
-          <a:bodyPr rtlCol="0" anchor="ctr"/>
-          <a:lstStyle/>
-          <a:p>
-            <a:pPr algn="ctr"/>
-          </a:p>
-        </p:txBody>
-      </p:sp>
-      <p:sp>
-        <p:nvSpPr>
-          <p:cNvPr id="14" name="Oval 13"/>
-          <p:cNvSpPr/>
-          <p:nvPr/>
-        </p:nvSpPr>
-        <p:spPr>
-          <a:xfrm>
-            <a:off x="841248" y="5038344"/>
-            <a:ext cx="201168" cy="201168"/>
-          </a:xfrm>
-          <a:prstGeom prst="ellipse">
-            <a:avLst/>
-          </a:prstGeom>
-          <a:solidFill>
-            <a:srgbClr val="1FA67A"/>
-          </a:solidFill>
-          <a:ln>
-            <a:noFill/>
-          </a:ln>
-          <a:effectLst/>
-        </p:spPr>
-        <p:style>
-          <a:lnRef idx="1">
-            <a:schemeClr val="accent1"/>
-          </a:lnRef>
-          <a:fillRef idx="3">
-            <a:schemeClr val="accent1"/>
-          </a:fillRef>
-          <a:effectRef idx="2">
-            <a:schemeClr val="accent1"/>
-          </a:effectRef>
-          <a:fontRef idx="minor">
-            <a:schemeClr val="lt1"/>
-          </a:fontRef>
-        </p:style>
-        <p:txBody>
-          <a:bodyPr rtlCol="0" anchor="ctr"/>
-          <a:lstStyle/>
-          <a:p>
-            <a:pPr algn="ctr"/>
-          </a:p>
-        </p:txBody>
-      </p:sp>
-      <p:sp>
-        <p:nvSpPr>
-          <p:cNvPr id="15" name="TextBox 14"/>
-          <p:cNvSpPr txBox="1"/>
-          <p:nvPr/>
-        </p:nvSpPr>
-        <p:spPr>
-          <a:xfrm>
-            <a:off x="1252728" y="4727448"/>
-            <a:ext cx="4069080" cy="822960"/>
-          </a:xfrm>
-          <a:prstGeom prst="rect">
-            <a:avLst/>
-          </a:prstGeom>
-          <a:noFill/>
-        </p:spPr>
-        <p:txBody>
-          <a:bodyPr wrap="square" lIns="0" rIns="0" tIns="0" bIns="0" anchor="ctr">
-            <a:spAutoFit/>
-          </a:bodyPr>
-          <a:lstStyle/>
-          <a:p>
-            <a:pPr algn="l"/>
-            <a:r>
-              <a:rPr sz="2000" b="0">
-                <a:solidFill>
-                  <a:srgbClr val="0B1F2A"/>
-                </a:solidFill>
-                <a:latin typeface="Carlito"/>
-              </a:rPr>
-              <a:t>Test it in /docs with Try it out</a:t>
-            </a:r>
-          </a:p>
-        </p:txBody>
-      </p:sp>
-      <p:sp>
-        <p:nvSpPr>
-          <p:cNvPr id="16" name="Rounded Rectangle 15"/>
-          <p:cNvSpPr/>
-          <p:nvPr/>
-        </p:nvSpPr>
-        <p:spPr>
-          <a:xfrm>
-            <a:off x="5852160" y="1709928"/>
-            <a:ext cx="5733288" cy="4023360"/>
-          </a:xfrm>
-          <a:prstGeom prst="roundRect">
-            <a:avLst>
-              <a:gd name="adj" fmla="val 4000"/>
-            </a:avLst>
-          </a:prstGeom>
-          <a:solidFill>
-            <a:srgbClr val="0B1F2A"/>
-          </a:solidFill>
-          <a:ln>
-            <a:noFill/>
-          </a:ln>
-          <a:effectLst/>
-        </p:spPr>
-        <p:style>
-          <a:lnRef idx="1">
-            <a:schemeClr val="accent1"/>
-          </a:lnRef>
-          <a:fillRef idx="3">
-            <a:schemeClr val="accent1"/>
-          </a:fillRef>
-          <a:effectRef idx="2">
-            <a:schemeClr val="accent1"/>
-          </a:effectRef>
-          <a:fontRef idx="minor">
-            <a:schemeClr val="lt1"/>
-          </a:fontRef>
-        </p:style>
-        <p:txBody>
-          <a:bodyPr rtlCol="0" anchor="ctr"/>
-          <a:lstStyle/>
-          <a:p>
-            <a:pPr algn="ctr"/>
-          </a:p>
-        </p:txBody>
-      </p:sp>
-      <p:sp>
-        <p:nvSpPr>
-          <p:cNvPr id="17" name="TextBox 16"/>
-          <p:cNvSpPr txBox="1"/>
-          <p:nvPr/>
-        </p:nvSpPr>
-        <p:spPr>
-          <a:xfrm>
-            <a:off x="6126480" y="1938528"/>
-            <a:ext cx="5184648" cy="3566160"/>
-          </a:xfrm>
-          <a:prstGeom prst="rect">
-            <a:avLst/>
-          </a:prstGeom>
-          <a:noFill/>
-        </p:spPr>
-        <p:txBody>
-          <a:bodyPr wrap="square" lIns="0" rIns="0" tIns="0" bIns="0" anchor="t">
-            <a:spAutoFit/>
-          </a:bodyPr>
-          <a:lstStyle/>
-          <a:p>
-            <a:pPr algn="l"/>
-            <a:r>
-              <a:rPr sz="1400" b="0">
-                <a:solidFill>
-                  <a:srgbClr val="E2E8F0"/>
-                </a:solidFill>
-                <a:latin typeface="Courier New"/>
-              </a:rPr>
-              <a:t>from pydantic import BaseModel</a:t>
-            </a:r>
-          </a:p>
-          <a:p>
-            <a:pPr algn="l"/>
-            <a:r>
-              <a:rPr sz="1400" b="0">
-                <a:solidFill>
-                  <a:srgbClr val="E2E8F0"/>
-                </a:solidFill>
-                <a:latin typeface="Courier New"/>
-              </a:rPr>
-              <a:t/>
-            </a:r>
-          </a:p>
-          <a:p>
-            <a:pPr algn="l"/>
-            <a:r>
-              <a:rPr sz="1400" b="0">
-                <a:solidFill>
-                  <a:srgbClr val="E2E8F0"/>
-                </a:solidFill>
-                <a:latin typeface="Courier New"/>
-              </a:rPr>
-              <a:t>class Person(BaseModel):</a:t>
-            </a:r>
-          </a:p>
-          <a:p>
-            <a:pPr algn="l"/>
-            <a:r>
-              <a:rPr sz="1400" b="0">
-                <a:solidFill>
-                  <a:srgbClr val="E2E8F0"/>
-                </a:solidFill>
-                <a:latin typeface="Courier New"/>
-              </a:rPr>
-              <a:t>    name: str</a:t>
-            </a:r>
-          </a:p>
-          <a:p>
-            <a:pPr algn="l"/>
-            <a:r>
-              <a:rPr sz="1400" b="0">
-                <a:solidFill>
-                  <a:srgbClr val="E2E8F0"/>
-                </a:solidFill>
-                <a:latin typeface="Courier New"/>
-              </a:rPr>
-              <a:t/>
-            </a:r>
-          </a:p>
-          <a:p>
-            <a:pPr algn="l"/>
-            <a:r>
-              <a:rPr sz="1400" b="0">
-                <a:solidFill>
-                  <a:srgbClr val="E2E8F0"/>
-                </a:solidFill>
-                <a:latin typeface="Courier New"/>
-              </a:rPr>
-              <a:t>@app.post("/greet")</a:t>
-            </a:r>
-          </a:p>
-          <a:p>
-            <a:pPr algn="l"/>
-            <a:r>
-              <a:rPr sz="1400" b="0">
-                <a:solidFill>
-                  <a:srgbClr val="E2E8F0"/>
-                </a:solidFill>
-                <a:latin typeface="Courier New"/>
-              </a:rPr>
-              <a:t>def greet(person: Person):</a:t>
-            </a:r>
-          </a:p>
-          <a:p>
-            <a:pPr algn="l"/>
-            <a:r>
-              <a:rPr sz="1400" b="0">
-                <a:solidFill>
-                  <a:srgbClr val="E2E8F0"/>
-                </a:solidFill>
-                <a:latin typeface="Courier New"/>
-              </a:rPr>
-              <a:t>    return {"message": f"Hello, {person.name}"}</a:t>
-            </a:r>
-          </a:p>
-        </p:txBody>
-      </p:sp>
-      <p:sp>
-        <p:nvSpPr>
-          <p:cNvPr id="18" name="TextBox 17"/>
-          <p:cNvSpPr txBox="1"/>
-          <p:nvPr/>
-        </p:nvSpPr>
-        <p:spPr>
-          <a:xfrm>
-            <a:off x="612648" y="5943600"/>
-            <a:ext cx="10515600" cy="365760"/>
-          </a:xfrm>
-          <a:prstGeom prst="rect">
-            <a:avLst/>
-          </a:prstGeom>
-          <a:noFill/>
-        </p:spPr>
-        <p:txBody>
-          <a:bodyPr wrap="square" lIns="0" rIns="0" tIns="0" bIns="0" anchor="t">
-            <a:spAutoFit/>
-          </a:bodyPr>
-          <a:lstStyle/>
-          <a:p>
-            <a:pPr algn="l"/>
-            <a:r>
-              <a:rPr sz="1850" b="0">
-                <a:solidFill>
-                  <a:srgbClr val="6B7F8A"/>
-                </a:solidFill>
-                <a:latin typeface="Carlito"/>
-              </a:rPr>
-              <a:t>Live: run the file and send a POST from /docs.   |   File: lecture/11_post_route.py</a:t>
-            </a:r>
-          </a:p>
-        </p:txBody>
-      </p:sp>
-    </p:spTree>
-  </p:cSld>
-  <p:clrMapOvr>
-    <a:masterClrMapping/>
-  </p:clrMapOvr>
-</p:sld>
-</file>
-
-<file path=ppt/slides/slide47.xml><?xml version="1.0" encoding="utf-8"?>
-<p:sld xmlns:a="http://schemas.openxmlformats.org/drawingml/2006/main" xmlns:p="http://schemas.openxmlformats.org/presentationml/2006/main" xmlns:r="http://schemas.openxmlformats.org/officeDocument/2006/relationships">
-  <p:cSld>
-    <p:spTree>
-      <p:nvGrpSpPr>
-        <p:cNvPr id="1" name=""/>
-        <p:cNvGrpSpPr/>
-        <p:nvPr/>
-      </p:nvGrpSpPr>
-      <p:grpSpPr/>
-      <p:sp>
-        <p:nvSpPr>
-          <p:cNvPr id="2" name="Title"/>
-          <p:cNvSpPr txBox="1"/>
-          <p:nvPr/>
-        </p:nvSpPr>
-        <p:spPr>
-          <a:xfrm>
-            <a:off x="612648" y="594360"/>
-            <a:ext cx="10972800" cy="612648"/>
-          </a:xfrm>
-          <a:prstGeom prst="rect">
-            <a:avLst/>
-          </a:prstGeom>
-          <a:noFill/>
-        </p:spPr>
-        <p:txBody>
-          <a:bodyPr wrap="square" lIns="0" rIns="0" tIns="0" bIns="0" anchor="t">
-            <a:spAutoFit/>
-          </a:bodyPr>
-          <a:lstStyle/>
-          <a:p>
-            <a:pPr algn="l"/>
-            <a:r>
-              <a:rPr sz="4000" b="1">
-                <a:solidFill>
-                  <a:srgbClr val="0B1F2A"/>
-                </a:solidFill>
-                <a:latin typeface="Caladea Bold"/>
-              </a:rPr>
-              <a:t>Live practice 5: GET and POST</a:t>
-            </a:r>
-          </a:p>
-        </p:txBody>
-      </p:sp>
-      <p:sp>
-        <p:nvSpPr>
-          <p:cNvPr id="3" name="SlideNo"/>
-          <p:cNvSpPr txBox="1"/>
-          <p:nvPr/>
-        </p:nvSpPr>
-        <p:spPr>
-          <a:xfrm>
-            <a:off x="11219688" y="6373368"/>
-            <a:ext cx="694944" cy="256032"/>
-          </a:xfrm>
-          <a:prstGeom prst="rect">
-            <a:avLst/>
-          </a:prstGeom>
-          <a:noFill/>
-        </p:spPr>
-        <p:txBody>
-          <a:bodyPr wrap="square" lIns="0" rIns="0" tIns="0" bIns="0" anchor="t">
-            <a:spAutoFit/>
-          </a:bodyPr>
-          <a:lstStyle/>
-          <a:p>
-            <a:pPr algn="l"/>
-            <a:r>
-              <a:rPr sz="1350" b="0">
-                <a:solidFill>
-                  <a:srgbClr val="6B7F8A"/>
-                </a:solidFill>
-                <a:latin typeface="Carlito"/>
-              </a:rPr>
-              <a:t>27</a:t>
-            </a:r>
-          </a:p>
-        </p:txBody>
-      </p:sp>
-      <p:sp>
-        <p:nvSpPr>
-          <p:cNvPr id="4" name="Rounded Rectangle 3"/>
-          <p:cNvSpPr/>
-          <p:nvPr/>
-        </p:nvSpPr>
-        <p:spPr>
-          <a:xfrm>
-            <a:off x="612648" y="1709928"/>
-            <a:ext cx="10972800" cy="1207008"/>
-          </a:xfrm>
-          <a:prstGeom prst="roundRect">
-            <a:avLst>
-              <a:gd name="adj" fmla="val 12000"/>
-            </a:avLst>
-          </a:prstGeom>
-          <a:solidFill>
-            <a:srgbClr val="EEF3F5"/>
-          </a:solidFill>
-          <a:ln>
-            <a:noFill/>
-          </a:ln>
-          <a:effectLst/>
-        </p:spPr>
-        <p:style>
-          <a:lnRef idx="1">
-            <a:schemeClr val="accent1"/>
-          </a:lnRef>
-          <a:fillRef idx="3">
-            <a:schemeClr val="accent1"/>
-          </a:fillRef>
-          <a:effectRef idx="2">
-            <a:schemeClr val="accent1"/>
-          </a:effectRef>
-          <a:fontRef idx="minor">
-            <a:schemeClr val="lt1"/>
-          </a:fontRef>
-        </p:style>
-        <p:txBody>
-          <a:bodyPr rtlCol="0" anchor="ctr"/>
-          <a:lstStyle/>
-          <a:p>
-            <a:pPr algn="ctr"/>
-          </a:p>
-        </p:txBody>
-      </p:sp>
-      <p:sp>
-        <p:nvSpPr>
-          <p:cNvPr id="5" name="Oval 4"/>
-          <p:cNvSpPr/>
-          <p:nvPr/>
-        </p:nvSpPr>
-        <p:spPr>
-          <a:xfrm>
-            <a:off x="868680" y="2057400"/>
-            <a:ext cx="512064" cy="512064"/>
-          </a:xfrm>
-          <a:prstGeom prst="ellipse">
-            <a:avLst/>
-          </a:prstGeom>
-          <a:solidFill>
-            <a:srgbClr val="3B82C4"/>
-          </a:solidFill>
-          <a:ln>
-            <a:noFill/>
-          </a:ln>
-          <a:effectLst/>
-        </p:spPr>
-        <p:style>
-          <a:lnRef idx="1">
-            <a:schemeClr val="accent1"/>
-          </a:lnRef>
-          <a:fillRef idx="3">
-            <a:schemeClr val="accent1"/>
-          </a:fillRef>
-          <a:effectRef idx="2">
-            <a:schemeClr val="accent1"/>
-          </a:effectRef>
-          <a:fontRef idx="minor">
-            <a:schemeClr val="lt1"/>
-          </a:fontRef>
-        </p:style>
-        <p:txBody>
-          <a:bodyPr rtlCol="0" anchor="ctr"/>
-          <a:lstStyle/>
-          <a:p>
-            <a:pPr algn="ctr"/>
-          </a:p>
-        </p:txBody>
-      </p:sp>
-      <p:sp>
-        <p:nvSpPr>
-          <p:cNvPr id="6" name="TextBox 5"/>
-          <p:cNvSpPr txBox="1"/>
-          <p:nvPr/>
-        </p:nvSpPr>
-        <p:spPr>
-          <a:xfrm>
-            <a:off x="868680" y="2057400"/>
-            <a:ext cx="512064" cy="512064"/>
-          </a:xfrm>
-          <a:prstGeom prst="rect">
-            <a:avLst/>
-          </a:prstGeom>
-          <a:noFill/>
-        </p:spPr>
-        <p:txBody>
-          <a:bodyPr wrap="square" lIns="0" rIns="0" tIns="0" bIns="0" anchor="ctr">
-            <a:spAutoFit/>
-          </a:bodyPr>
-          <a:lstStyle/>
-          <a:p>
-            <a:pPr algn="ctr"/>
-            <a:r>
-              <a:rPr sz="2000" b="1">
-                <a:solidFill>
-                  <a:srgbClr val="FFFFFF"/>
-                </a:solidFill>
-                <a:latin typeface="Carlito"/>
-              </a:rPr>
-              <a:t>1</a:t>
-            </a:r>
-          </a:p>
-        </p:txBody>
-      </p:sp>
-      <p:sp>
-        <p:nvSpPr>
-          <p:cNvPr id="7" name="TextBox 6"/>
-          <p:cNvSpPr txBox="1"/>
-          <p:nvPr/>
-        </p:nvSpPr>
-        <p:spPr>
-          <a:xfrm>
-            <a:off x="1645920" y="1801368"/>
-            <a:ext cx="9601200" cy="411480"/>
-          </a:xfrm>
-          <a:prstGeom prst="rect">
-            <a:avLst/>
-          </a:prstGeom>
-          <a:noFill/>
-        </p:spPr>
-        <p:txBody>
-          <a:bodyPr wrap="square" lIns="0" rIns="0" tIns="0" bIns="0" anchor="t">
-            <a:spAutoFit/>
-          </a:bodyPr>
-          <a:lstStyle/>
-          <a:p>
-            <a:pPr algn="l"/>
-            <a:r>
-              <a:rPr sz="2250" b="1">
-                <a:solidFill>
-                  <a:srgbClr val="0B1F2A"/>
-                </a:solidFill>
-                <a:latin typeface="Carlito"/>
-              </a:rPr>
-              <a:t>GET /ping</a:t>
-            </a:r>
-          </a:p>
-        </p:txBody>
-      </p:sp>
-      <p:sp>
-        <p:nvSpPr>
-          <p:cNvPr id="8" name="TextBox 7"/>
-          <p:cNvSpPr txBox="1"/>
-          <p:nvPr/>
-        </p:nvSpPr>
-        <p:spPr>
-          <a:xfrm>
-            <a:off x="1645920" y="2167128"/>
-            <a:ext cx="9601200" cy="365760"/>
-          </a:xfrm>
-          <a:prstGeom prst="rect">
-            <a:avLst/>
-          </a:prstGeom>
-          <a:noFill/>
-        </p:spPr>
-        <p:txBody>
-          <a:bodyPr wrap="square" lIns="0" rIns="0" tIns="0" bIns="0" anchor="t">
-            <a:spAutoFit/>
-          </a:bodyPr>
-          <a:lstStyle/>
-          <a:p>
-            <a:pPr algn="l"/>
-            <a:r>
-              <a:rPr sz="1850" b="0">
-                <a:solidFill>
-                  <a:srgbClr val="6B7F8A"/>
-                </a:solidFill>
-                <a:latin typeface="Carlito"/>
-              </a:rPr>
-              <a:t>Return {"status": "ok"}</a:t>
-            </a:r>
-          </a:p>
-        </p:txBody>
-      </p:sp>
-      <p:sp>
-        <p:nvSpPr>
-          <p:cNvPr id="9" name="Rounded Rectangle 8"/>
-          <p:cNvSpPr/>
-          <p:nvPr/>
-        </p:nvSpPr>
-        <p:spPr>
-          <a:xfrm>
-            <a:off x="612648" y="3081528"/>
-            <a:ext cx="10972800" cy="1207008"/>
-          </a:xfrm>
-          <a:prstGeom prst="roundRect">
-            <a:avLst>
-              <a:gd name="adj" fmla="val 12000"/>
-            </a:avLst>
-          </a:prstGeom>
-          <a:solidFill>
-            <a:srgbClr val="EEF3F5"/>
-          </a:solidFill>
-          <a:ln>
-            <a:noFill/>
-          </a:ln>
-          <a:effectLst/>
-        </p:spPr>
-        <p:style>
-          <a:lnRef idx="1">
-            <a:schemeClr val="accent1"/>
-          </a:lnRef>
-          <a:fillRef idx="3">
-            <a:schemeClr val="accent1"/>
-          </a:fillRef>
-          <a:effectRef idx="2">
-            <a:schemeClr val="accent1"/>
-          </a:effectRef>
-          <a:fontRef idx="minor">
-            <a:schemeClr val="lt1"/>
-          </a:fontRef>
-        </p:style>
-        <p:txBody>
-          <a:bodyPr rtlCol="0" anchor="ctr"/>
-          <a:lstStyle/>
-          <a:p>
-            <a:pPr algn="ctr"/>
-          </a:p>
-        </p:txBody>
-      </p:sp>
-      <p:sp>
-        <p:nvSpPr>
-          <p:cNvPr id="10" name="Oval 9"/>
-          <p:cNvSpPr/>
-          <p:nvPr/>
-        </p:nvSpPr>
-        <p:spPr>
-          <a:xfrm>
-            <a:off x="868680" y="3429000"/>
-            <a:ext cx="512064" cy="512064"/>
-          </a:xfrm>
-          <a:prstGeom prst="ellipse">
-            <a:avLst/>
-          </a:prstGeom>
-          <a:solidFill>
-            <a:srgbClr val="3B82C4"/>
-          </a:solidFill>
-          <a:ln>
-            <a:noFill/>
-          </a:ln>
-          <a:effectLst/>
-        </p:spPr>
-        <p:style>
-          <a:lnRef idx="1">
-            <a:schemeClr val="accent1"/>
-          </a:lnRef>
-          <a:fillRef idx="3">
-            <a:schemeClr val="accent1"/>
-          </a:fillRef>
-          <a:effectRef idx="2">
-            <a:schemeClr val="accent1"/>
-          </a:effectRef>
-          <a:fontRef idx="minor">
-            <a:schemeClr val="lt1"/>
-          </a:fontRef>
-        </p:style>
-        <p:txBody>
-          <a:bodyPr rtlCol="0" anchor="ctr"/>
-          <a:lstStyle/>
-          <a:p>
-            <a:pPr algn="ctr"/>
-          </a:p>
-        </p:txBody>
-      </p:sp>
-      <p:sp>
-        <p:nvSpPr>
-          <p:cNvPr id="11" name="TextBox 10"/>
-          <p:cNvSpPr txBox="1"/>
-          <p:nvPr/>
-        </p:nvSpPr>
-        <p:spPr>
-          <a:xfrm>
-            <a:off x="868680" y="3429000"/>
-            <a:ext cx="512064" cy="512064"/>
-          </a:xfrm>
-          <a:prstGeom prst="rect">
-            <a:avLst/>
-          </a:prstGeom>
-          <a:noFill/>
-        </p:spPr>
-        <p:txBody>
-          <a:bodyPr wrap="square" lIns="0" rIns="0" tIns="0" bIns="0" anchor="ctr">
-            <a:spAutoFit/>
-          </a:bodyPr>
-          <a:lstStyle/>
-          <a:p>
-            <a:pPr algn="ctr"/>
-            <a:r>
-              <a:rPr sz="2000" b="1">
-                <a:solidFill>
-                  <a:srgbClr val="FFFFFF"/>
-                </a:solidFill>
-                <a:latin typeface="Carlito"/>
-              </a:rPr>
-              <a:t>2</a:t>
-            </a:r>
-          </a:p>
-        </p:txBody>
-      </p:sp>
-      <p:sp>
-        <p:nvSpPr>
-          <p:cNvPr id="12" name="TextBox 11"/>
-          <p:cNvSpPr txBox="1"/>
-          <p:nvPr/>
-        </p:nvSpPr>
-        <p:spPr>
-          <a:xfrm>
-            <a:off x="1645920" y="3172968"/>
-            <a:ext cx="9601200" cy="411480"/>
-          </a:xfrm>
-          <a:prstGeom prst="rect">
-            <a:avLst/>
-          </a:prstGeom>
-          <a:noFill/>
-        </p:spPr>
-        <p:txBody>
-          <a:bodyPr wrap="square" lIns="0" rIns="0" tIns="0" bIns="0" anchor="t">
-            <a:spAutoFit/>
-          </a:bodyPr>
-          <a:lstStyle/>
-          <a:p>
-            <a:pPr algn="l"/>
-            <a:r>
-              <a:rPr sz="2250" b="1">
-                <a:solidFill>
-                  <a:srgbClr val="0B1F2A"/>
-                </a:solidFill>
-                <a:latin typeface="Carlito"/>
-              </a:rPr>
-              <a:t>GET /hello/{name}</a:t>
-            </a:r>
-          </a:p>
-        </p:txBody>
-      </p:sp>
-      <p:sp>
-        <p:nvSpPr>
-          <p:cNvPr id="13" name="TextBox 12"/>
-          <p:cNvSpPr txBox="1"/>
-          <p:nvPr/>
-        </p:nvSpPr>
-        <p:spPr>
-          <a:xfrm>
-            <a:off x="1645920" y="3538728"/>
-            <a:ext cx="9601200" cy="365760"/>
-          </a:xfrm>
-          <a:prstGeom prst="rect">
-            <a:avLst/>
-          </a:prstGeom>
-          <a:noFill/>
-        </p:spPr>
-        <p:txBody>
-          <a:bodyPr wrap="square" lIns="0" rIns="0" tIns="0" bIns="0" anchor="t">
-            <a:spAutoFit/>
-          </a:bodyPr>
-          <a:lstStyle/>
-          <a:p>
-            <a:pPr algn="l"/>
-            <a:r>
-              <a:rPr sz="1850" b="0">
-                <a:solidFill>
-                  <a:srgbClr val="6B7F8A"/>
-                </a:solidFill>
-                <a:latin typeface="Carlito"/>
-              </a:rPr>
-              <a:t>Return {"message": "Hello, Asha"}</a:t>
-            </a:r>
-          </a:p>
-        </p:txBody>
-      </p:sp>
-      <p:sp>
-        <p:nvSpPr>
-          <p:cNvPr id="14" name="Rounded Rectangle 13"/>
-          <p:cNvSpPr/>
-          <p:nvPr/>
-        </p:nvSpPr>
-        <p:spPr>
-          <a:xfrm>
-            <a:off x="612648" y="4453128"/>
-            <a:ext cx="10972800" cy="1207008"/>
-          </a:xfrm>
-          <a:prstGeom prst="roundRect">
-            <a:avLst>
-              <a:gd name="adj" fmla="val 12000"/>
-            </a:avLst>
-          </a:prstGeom>
-          <a:solidFill>
-            <a:srgbClr val="EEF3F5"/>
-          </a:solidFill>
-          <a:ln>
-            <a:noFill/>
-          </a:ln>
-          <a:effectLst/>
-        </p:spPr>
-        <p:style>
-          <a:lnRef idx="1">
-            <a:schemeClr val="accent1"/>
-          </a:lnRef>
-          <a:fillRef idx="3">
-            <a:schemeClr val="accent1"/>
-          </a:fillRef>
-          <a:effectRef idx="2">
-            <a:schemeClr val="accent1"/>
-          </a:effectRef>
-          <a:fontRef idx="minor">
-            <a:schemeClr val="lt1"/>
-          </a:fontRef>
-        </p:style>
-        <p:txBody>
-          <a:bodyPr rtlCol="0" anchor="ctr"/>
-          <a:lstStyle/>
-          <a:p>
-            <a:pPr algn="ctr"/>
-          </a:p>
-        </p:txBody>
-      </p:sp>
-      <p:sp>
-        <p:nvSpPr>
-          <p:cNvPr id="15" name="Oval 14"/>
-          <p:cNvSpPr/>
-          <p:nvPr/>
-        </p:nvSpPr>
-        <p:spPr>
-          <a:xfrm>
-            <a:off x="868680" y="4800600"/>
-            <a:ext cx="512064" cy="512064"/>
-          </a:xfrm>
-          <a:prstGeom prst="ellipse">
-            <a:avLst/>
-          </a:prstGeom>
-          <a:solidFill>
-            <a:srgbClr val="3B82C4"/>
-          </a:solidFill>
-          <a:ln>
-            <a:noFill/>
-          </a:ln>
-          <a:effectLst/>
-        </p:spPr>
-        <p:style>
-          <a:lnRef idx="1">
-            <a:schemeClr val="accent1"/>
-          </a:lnRef>
-          <a:fillRef idx="3">
-            <a:schemeClr val="accent1"/>
-          </a:fillRef>
-          <a:effectRef idx="2">
-            <a:schemeClr val="accent1"/>
-          </a:effectRef>
-          <a:fontRef idx="minor">
-            <a:schemeClr val="lt1"/>
-          </a:fontRef>
-        </p:style>
-        <p:txBody>
-          <a:bodyPr rtlCol="0" anchor="ctr"/>
-          <a:lstStyle/>
-          <a:p>
-            <a:pPr algn="ctr"/>
-          </a:p>
-        </p:txBody>
-      </p:sp>
-      <p:sp>
-        <p:nvSpPr>
-          <p:cNvPr id="16" name="TextBox 15"/>
-          <p:cNvSpPr txBox="1"/>
-          <p:nvPr/>
-        </p:nvSpPr>
-        <p:spPr>
-          <a:xfrm>
-            <a:off x="868680" y="4800600"/>
-            <a:ext cx="512064" cy="512064"/>
-          </a:xfrm>
-          <a:prstGeom prst="rect">
-            <a:avLst/>
-          </a:prstGeom>
-          <a:noFill/>
-        </p:spPr>
-        <p:txBody>
-          <a:bodyPr wrap="square" lIns="0" rIns="0" tIns="0" bIns="0" anchor="ctr">
-            <a:spAutoFit/>
-          </a:bodyPr>
-          <a:lstStyle/>
-          <a:p>
-            <a:pPr algn="ctr"/>
-            <a:r>
-              <a:rPr sz="2000" b="1">
-                <a:solidFill>
-                  <a:srgbClr val="FFFFFF"/>
-                </a:solidFill>
-                <a:latin typeface="Carlito"/>
-              </a:rPr>
-              <a:t>3</a:t>
-            </a:r>
-          </a:p>
-        </p:txBody>
-      </p:sp>
-      <p:sp>
-        <p:nvSpPr>
-          <p:cNvPr id="17" name="TextBox 16"/>
-          <p:cNvSpPr txBox="1"/>
-          <p:nvPr/>
-        </p:nvSpPr>
-        <p:spPr>
-          <a:xfrm>
-            <a:off x="1645920" y="4544568"/>
-            <a:ext cx="9601200" cy="411480"/>
-          </a:xfrm>
-          <a:prstGeom prst="rect">
-            <a:avLst/>
-          </a:prstGeom>
-          <a:noFill/>
-        </p:spPr>
-        <p:txBody>
-          <a:bodyPr wrap="square" lIns="0" rIns="0" tIns="0" bIns="0" anchor="t">
-            <a:spAutoFit/>
-          </a:bodyPr>
-          <a:lstStyle/>
-          <a:p>
-            <a:pPr algn="l"/>
-            <a:r>
-              <a:rPr sz="2250" b="1">
-                <a:solidFill>
-                  <a:srgbClr val="0B1F2A"/>
-                </a:solidFill>
-                <a:latin typeface="Carlito"/>
-              </a:rPr>
-              <a:t>POST /echo</a:t>
-            </a:r>
-          </a:p>
-        </p:txBody>
-      </p:sp>
-      <p:sp>
-        <p:nvSpPr>
-          <p:cNvPr id="18" name="TextBox 17"/>
-          <p:cNvSpPr txBox="1"/>
-          <p:nvPr/>
-        </p:nvSpPr>
-        <p:spPr>
-          <a:xfrm>
-            <a:off x="1645920" y="4910328"/>
-            <a:ext cx="9601200" cy="365760"/>
-          </a:xfrm>
-          <a:prstGeom prst="rect">
-            <a:avLst/>
-          </a:prstGeom>
-          <a:noFill/>
-        </p:spPr>
-        <p:txBody>
-          <a:bodyPr wrap="square" lIns="0" rIns="0" tIns="0" bIns="0" anchor="t">
-            <a:spAutoFit/>
-          </a:bodyPr>
-          <a:lstStyle/>
-          <a:p>
-            <a:pPr algn="l"/>
-            <a:r>
-              <a:rPr sz="1850" b="0">
-                <a:solidFill>
-                  <a:srgbClr val="6B7F8A"/>
-                </a:solidFill>
-                <a:latin typeface="Carlito"/>
-              </a:rPr>
-              <a:t>Body {"name": "Ali"}, return {"message": "Hello, Ali"}</a:t>
-            </a:r>
-          </a:p>
-        </p:txBody>
-      </p:sp>
-      <p:sp>
-        <p:nvSpPr>
-          <p:cNvPr id="19" name="TextBox 18"/>
-          <p:cNvSpPr txBox="1"/>
-          <p:nvPr/>
-        </p:nvSpPr>
-        <p:spPr>
-          <a:xfrm>
-            <a:off x="612648" y="5989320"/>
-            <a:ext cx="10515600" cy="365760"/>
-          </a:xfrm>
-          <a:prstGeom prst="rect">
-            <a:avLst/>
-          </a:prstGeom>
-          <a:noFill/>
-        </p:spPr>
-        <p:txBody>
-          <a:bodyPr wrap="square" lIns="0" rIns="0" tIns="0" bIns="0" anchor="t">
-            <a:spAutoFit/>
-          </a:bodyPr>
-          <a:lstStyle/>
-          <a:p>
-            <a:pPr algn="l"/>
-            <a:r>
-              <a:rPr sz="1850" b="0">
-                <a:solidFill>
-                  <a:srgbClr val="6B7F8A"/>
-                </a:solidFill>
-                <a:latin typeface="Carlito"/>
-              </a:rPr>
-              <a:t>Files: live-practice/05_ping_api.py, 06_hello_api.py, 07_echo_api.py.  Test every route in /docs.</a:t>
-            </a:r>
-          </a:p>
-        </p:txBody>
-      </p:sp>
-    </p:spTree>
-  </p:cSld>
-  <p:clrMapOvr>
-    <a:masterClrMapping/>
-  </p:clrMapOvr>
-</p:sld>
-</file>
-
-<file path=ppt/slides/slide48.xml><?xml version="1.0" encoding="utf-8"?>
-<p:sld xmlns:a="http://schemas.openxmlformats.org/drawingml/2006/main" xmlns:p="http://schemas.openxmlformats.org/presentationml/2006/main" xmlns:r="http://schemas.openxmlformats.org/officeDocument/2006/relationships">
-  <p:cSld>
-    <p:spTree>
-      <p:nvGrpSpPr>
-        <p:cNvPr id="1" name=""/>
-        <p:cNvGrpSpPr/>
-        <p:nvPr/>
-      </p:nvGrpSpPr>
-      <p:grpSpPr/>
-      <p:sp>
-        <p:nvSpPr>
-          <p:cNvPr id="2" name="Title"/>
-          <p:cNvSpPr txBox="1"/>
-          <p:nvPr/>
-        </p:nvSpPr>
-        <p:spPr>
-          <a:xfrm>
-            <a:off x="612648" y="594360"/>
-            <a:ext cx="10972800" cy="612648"/>
-          </a:xfrm>
-          <a:prstGeom prst="rect">
-            <a:avLst/>
-          </a:prstGeom>
-          <a:noFill/>
-        </p:spPr>
-        <p:txBody>
-          <a:bodyPr wrap="square" lIns="0" rIns="0" tIns="0" bIns="0" anchor="t">
-            <a:spAutoFit/>
-          </a:bodyPr>
-          <a:lstStyle/>
-          <a:p>
-            <a:pPr algn="l"/>
-            <a:r>
-              <a:rPr sz="4000" b="1">
-                <a:solidFill>
-                  <a:srgbClr val="0B1F2A"/>
-                </a:solidFill>
-                <a:latin typeface="Caladea Bold"/>
-              </a:rPr>
-              <a:t>Homework</a:t>
-            </a:r>
-          </a:p>
-        </p:txBody>
-      </p:sp>
-      <p:sp>
-        <p:nvSpPr>
-          <p:cNvPr id="3" name="SlideNo"/>
-          <p:cNvSpPr txBox="1"/>
-          <p:nvPr/>
-        </p:nvSpPr>
-        <p:spPr>
-          <a:xfrm>
-            <a:off x="11219688" y="6373368"/>
-            <a:ext cx="694944" cy="256032"/>
-          </a:xfrm>
-          <a:prstGeom prst="rect">
-            <a:avLst/>
-          </a:prstGeom>
-          <a:noFill/>
-        </p:spPr>
-        <p:txBody>
-          <a:bodyPr wrap="square" lIns="0" rIns="0" tIns="0" bIns="0" anchor="t">
-            <a:spAutoFit/>
-          </a:bodyPr>
-          <a:lstStyle/>
-          <a:p>
-            <a:pPr algn="l"/>
-            <a:r>
-              <a:rPr sz="1350" b="0">
-                <a:solidFill>
-                  <a:srgbClr val="6B7F8A"/>
-                </a:solidFill>
-                <a:latin typeface="Carlito"/>
-              </a:rPr>
-              <a:t>28</a:t>
-            </a:r>
-          </a:p>
-        </p:txBody>
-      </p:sp>
-      <p:sp>
-        <p:nvSpPr>
-          <p:cNvPr id="4" name="Rounded Rectangle 3"/>
-          <p:cNvSpPr/>
-          <p:nvPr/>
-        </p:nvSpPr>
-        <p:spPr>
-          <a:xfrm>
-            <a:off x="612648" y="1709928"/>
-            <a:ext cx="5367528" cy="4023360"/>
-          </a:xfrm>
-          <a:prstGeom prst="roundRect">
-            <a:avLst>
-              <a:gd name="adj" fmla="val 12000"/>
-            </a:avLst>
-          </a:prstGeom>
-          <a:solidFill>
-            <a:srgbClr val="EEF3F5"/>
-          </a:solidFill>
-          <a:ln>
-            <a:noFill/>
-          </a:ln>
-          <a:effectLst/>
-        </p:spPr>
-        <p:style>
-          <a:lnRef idx="1">
-            <a:schemeClr val="accent1"/>
-          </a:lnRef>
-          <a:fillRef idx="3">
-            <a:schemeClr val="accent1"/>
-          </a:fillRef>
-          <a:effectRef idx="2">
-            <a:schemeClr val="accent1"/>
-          </a:effectRef>
-          <a:fontRef idx="minor">
-            <a:schemeClr val="lt1"/>
-          </a:fontRef>
-        </p:style>
-        <p:txBody>
-          <a:bodyPr rtlCol="0" anchor="ctr"/>
-          <a:lstStyle/>
-          <a:p>
-            <a:pPr algn="ctr"/>
-          </a:p>
-        </p:txBody>
-      </p:sp>
-      <p:sp>
-        <p:nvSpPr>
-          <p:cNvPr id="5" name="TextBox 4"/>
-          <p:cNvSpPr txBox="1"/>
-          <p:nvPr/>
-        </p:nvSpPr>
-        <p:spPr>
-          <a:xfrm>
-            <a:off x="932688" y="1920240"/>
-            <a:ext cx="4572000" cy="457200"/>
-          </a:xfrm>
-          <a:prstGeom prst="rect">
-            <a:avLst/>
-          </a:prstGeom>
-          <a:noFill/>
-        </p:spPr>
-        <p:txBody>
-          <a:bodyPr wrap="square" lIns="0" rIns="0" tIns="0" bIns="0" anchor="t">
-            <a:spAutoFit/>
-          </a:bodyPr>
-          <a:lstStyle/>
-          <a:p>
-            <a:pPr algn="l"/>
-            <a:r>
-              <a:rPr sz="2800" b="1">
-                <a:solidFill>
-                  <a:srgbClr val="1FA67A"/>
-                </a:solidFill>
-                <a:latin typeface="Caladea Bold"/>
-              </a:rPr>
-              <a:t>Build a POST API</a:t>
-            </a:r>
-          </a:p>
-        </p:txBody>
-      </p:sp>
-      <p:sp>
-        <p:nvSpPr>
-          <p:cNvPr id="6" name="TextBox 5"/>
-          <p:cNvSpPr txBox="1"/>
-          <p:nvPr/>
-        </p:nvSpPr>
-        <p:spPr>
-          <a:xfrm>
-            <a:off x="932688" y="2651760"/>
-            <a:ext cx="4754880" cy="2926080"/>
-          </a:xfrm>
-          <a:prstGeom prst="rect">
-            <a:avLst/>
-          </a:prstGeom>
-          <a:noFill/>
-        </p:spPr>
-        <p:txBody>
-          <a:bodyPr wrap="square" lIns="0" rIns="0" tIns="0" bIns="0" anchor="t">
-            <a:spAutoFit/>
-          </a:bodyPr>
-          <a:lstStyle/>
-          <a:p>
-            <a:pPr algn="l" marL="285750" indent="-285750">
-              <a:spcAft>
-                <a:spcPts val="1000"/>
-              </a:spcAft>
-              <a:buChar char="•"/>
-            </a:pPr>
-            <a:r>
-              <a:rPr sz="2000" b="0">
-                <a:solidFill>
-                  <a:srgbClr val="0B1F2A"/>
-                </a:solidFill>
-                <a:latin typeface="Carlito"/>
-              </a:rPr>
-              <a:t>One POST route in FastAPI</a:t>
-            </a:r>
-          </a:p>
-          <a:p>
-            <a:pPr algn="l" marL="285750" indent="-285750">
-              <a:spcAft>
-                <a:spcPts val="1000"/>
-              </a:spcAft>
-              <a:buChar char="•"/>
-            </a:pPr>
-            <a:r>
-              <a:rPr sz="2000" b="0">
-                <a:solidFill>
-                  <a:srgbClr val="0B1F2A"/>
-                </a:solidFill>
-                <a:latin typeface="Carlito"/>
-              </a:rPr>
-              <a:t>It takes JSON and returns JSON</a:t>
-            </a:r>
-          </a:p>
-          <a:p>
-            <a:pPr algn="l" marL="285750" indent="-285750">
-              <a:spcAft>
-                <a:spcPts val="1000"/>
-              </a:spcAft>
-              <a:buChar char="•"/>
-            </a:pPr>
-            <a:r>
-              <a:rPr sz="2000" b="0">
-                <a:solidFill>
-                  <a:srgbClr val="0B1F2A"/>
-                </a:solidFill>
-                <a:latin typeface="Carlito"/>
-              </a:rPr>
-              <a:t>Test it with the Talend API Tester browser extension</a:t>
-            </a:r>
-          </a:p>
-        </p:txBody>
-      </p:sp>
-      <p:sp>
-        <p:nvSpPr>
-          <p:cNvPr id="7" name="Rounded Rectangle 6"/>
-          <p:cNvSpPr/>
-          <p:nvPr/>
-        </p:nvSpPr>
-        <p:spPr>
-          <a:xfrm>
-            <a:off x="6217920" y="1709928"/>
-            <a:ext cx="5367528" cy="4023360"/>
-          </a:xfrm>
-          <a:prstGeom prst="roundRect">
-            <a:avLst>
-              <a:gd name="adj" fmla="val 12000"/>
-            </a:avLst>
-          </a:prstGeom>
-          <a:solidFill>
-            <a:srgbClr val="EEF3F5"/>
-          </a:solidFill>
-          <a:ln>
-            <a:noFill/>
-          </a:ln>
-          <a:effectLst/>
-        </p:spPr>
-        <p:style>
-          <a:lnRef idx="1">
-            <a:schemeClr val="accent1"/>
-          </a:lnRef>
-          <a:fillRef idx="3">
-            <a:schemeClr val="accent1"/>
-          </a:fillRef>
-          <a:effectRef idx="2">
-            <a:schemeClr val="accent1"/>
-          </a:effectRef>
-          <a:fontRef idx="minor">
-            <a:schemeClr val="lt1"/>
-          </a:fontRef>
-        </p:style>
-        <p:txBody>
-          <a:bodyPr rtlCol="0" anchor="ctr"/>
-          <a:lstStyle/>
-          <a:p>
-            <a:pPr algn="ctr"/>
-          </a:p>
-        </p:txBody>
-      </p:sp>
-      <p:sp>
-        <p:nvSpPr>
-          <p:cNvPr id="8" name="TextBox 7"/>
-          <p:cNvSpPr txBox="1"/>
-          <p:nvPr/>
-        </p:nvSpPr>
-        <p:spPr>
-          <a:xfrm>
-            <a:off x="6537959" y="1920240"/>
-            <a:ext cx="4572000" cy="457200"/>
-          </a:xfrm>
-          <a:prstGeom prst="rect">
-            <a:avLst/>
-          </a:prstGeom>
-          <a:noFill/>
-        </p:spPr>
-        <p:txBody>
-          <a:bodyPr wrap="square" lIns="0" rIns="0" tIns="0" bIns="0" anchor="t">
-            <a:spAutoFit/>
-          </a:bodyPr>
-          <a:lstStyle/>
-          <a:p>
-            <a:pPr algn="l"/>
-            <a:r>
-              <a:rPr sz="2800" b="1">
-                <a:solidFill>
-                  <a:srgbClr val="3B82C4"/>
-                </a:solidFill>
-                <a:latin typeface="Caladea Bold"/>
-              </a:rPr>
-              <a:t>Build a UI</a:t>
-            </a:r>
-          </a:p>
-        </p:txBody>
-      </p:sp>
-      <p:sp>
-        <p:nvSpPr>
-          <p:cNvPr id="9" name="TextBox 8"/>
-          <p:cNvSpPr txBox="1"/>
-          <p:nvPr/>
-        </p:nvSpPr>
-        <p:spPr>
-          <a:xfrm>
-            <a:off x="6537959" y="2651760"/>
-            <a:ext cx="4754880" cy="2926080"/>
-          </a:xfrm>
-          <a:prstGeom prst="rect">
-            <a:avLst/>
-          </a:prstGeom>
-          <a:noFill/>
-        </p:spPr>
-        <p:txBody>
-          <a:bodyPr wrap="square" lIns="0" rIns="0" tIns="0" bIns="0" anchor="t">
-            <a:spAutoFit/>
-          </a:bodyPr>
-          <a:lstStyle/>
-          <a:p>
-            <a:pPr algn="l" marL="285750" indent="-285750">
-              <a:spcAft>
-                <a:spcPts val="1000"/>
-              </a:spcAft>
-              <a:buChar char="•"/>
-            </a:pPr>
-            <a:r>
-              <a:rPr sz="2000" b="0">
-                <a:solidFill>
-                  <a:srgbClr val="0B1F2A"/>
-                </a:solidFill>
-                <a:latin typeface="Carlito"/>
-              </a:rPr>
-              <a:t>One GET route that returns an HTML page</a:t>
-            </a:r>
-          </a:p>
-          <a:p>
-            <a:pPr algn="l" marL="285750" indent="-285750">
-              <a:spcAft>
-                <a:spcPts val="1000"/>
-              </a:spcAft>
-              <a:buChar char="•"/>
-            </a:pPr>
-            <a:r>
-              <a:rPr sz="2000" b="0">
-                <a:solidFill>
-                  <a:srgbClr val="0B1F2A"/>
-                </a:solidFill>
-                <a:latin typeface="Carlito"/>
-              </a:rPr>
-              <a:t>Use ChatGPT or any AI to help</a:t>
-            </a:r>
-          </a:p>
-          <a:p>
-            <a:pPr algn="l" marL="285750" indent="-285750">
-              <a:spcAft>
-                <a:spcPts val="1000"/>
-              </a:spcAft>
-              <a:buChar char="•"/>
-            </a:pPr>
-            <a:r>
-              <a:rPr sz="2000" b="0">
-                <a:solidFill>
-                  <a:srgbClr val="0B1F2A"/>
-                </a:solidFill>
-                <a:latin typeface="Carlito"/>
-              </a:rPr>
-              <a:t>Research how it works, then do it</a:t>
-            </a:r>
-          </a:p>
-        </p:txBody>
-      </p:sp>
-      <p:sp>
-        <p:nvSpPr>
-          <p:cNvPr id="10" name="TextBox 9"/>
-          <p:cNvSpPr txBox="1"/>
-          <p:nvPr/>
-        </p:nvSpPr>
-        <p:spPr>
-          <a:xfrm>
-            <a:off x="612648" y="5943600"/>
-            <a:ext cx="10515600" cy="365760"/>
-          </a:xfrm>
-          <a:prstGeom prst="rect">
-            <a:avLst/>
-          </a:prstGeom>
-          <a:noFill/>
-        </p:spPr>
-        <p:txBody>
-          <a:bodyPr wrap="square" lIns="0" rIns="0" tIns="0" bIns="0" anchor="t">
-            <a:spAutoFit/>
-          </a:bodyPr>
-          <a:lstStyle/>
-          <a:p>
-            <a:pPr algn="l"/>
-            <a:r>
-              <a:rPr sz="1850" b="0">
-                <a:solidFill>
-                  <a:srgbClr val="6B7F8A"/>
-                </a:solidFill>
-                <a:latin typeface="Carlito"/>
-              </a:rPr>
-              <a:t>Files are in the homework folder. Push your work to your GitHub repo.</a:t>
-            </a:r>
-          </a:p>
-        </p:txBody>
-      </p:sp>
-    </p:spTree>
-  </p:cSld>
-  <p:clrMapOvr>
-    <a:masterClrMapping/>
-  </p:clrMapOvr>
-</p:sld>
-</file>
-
-<file path=ppt/slides/slide49.xml><?xml version="1.0" encoding="utf-8"?>
-<p:sld xmlns:a="http://schemas.openxmlformats.org/drawingml/2006/main" xmlns:p="http://schemas.openxmlformats.org/presentationml/2006/main" xmlns:r="http://schemas.openxmlformats.org/officeDocument/2006/relationships">
-  <p:cSld>
-    <p:spTree>
-      <p:nvGrpSpPr>
-        <p:cNvPr id="1" name=""/>
-        <p:cNvGrpSpPr/>
-        <p:nvPr/>
-      </p:nvGrpSpPr>
-      <p:grpSpPr/>
-      <p:sp>
-        <p:nvSpPr>
-          <p:cNvPr id="2" name="Text 0"/>
-          <p:cNvSpPr/>
-          <p:nvPr/>
-        </p:nvSpPr>
-        <p:spPr>
-          <a:xfrm>
-            <a:off x="1256475" y="2314377"/>
-            <a:ext cx="10484778" cy="1950641"/>
-          </a:xfrm>
-          <a:prstGeom prst="rect">
-            <a:avLst/>
-          </a:prstGeom>
-          <a:noFill/>
-          <a:ln/>
-        </p:spPr>
-        <p:txBody>
-          <a:bodyPr wrap="none" lIns="0" tIns="0" rIns="0" bIns="0" rtlCol="0" anchor="t"/>
-          <a:lstStyle/>
-          <a:p>
-            <a:pPr algn="l" indent="0" marL="0">
-              <a:lnSpc>
-                <a:spcPct val="100000"/>
-              </a:lnSpc>
-              <a:buNone/>
-            </a:pPr>
-            <a:r>
-              <a:rPr lang="en-US" sz="12800" b="1" spc="141" kern="100" dirty="0">
-                <a:solidFill>
-                  <a:srgbClr val="FFFFFF"/>
-                </a:solidFill>
-                <a:latin typeface="Caladea Bold" pitchFamily="34" charset="0"/>
-                <a:ea typeface="Caladea Bold" pitchFamily="34" charset="-122"/>
-                <a:cs typeface="Caladea Bold" pitchFamily="34" charset="-120"/>
-              </a:rPr>
-              <a:t>Q&amp;A</a:t>
-            </a:r>
-            <a:endParaRPr lang="en-US" sz="12800" dirty="0"/>
-          </a:p>
-        </p:txBody>
-      </p:sp>
-    </p:spTree>
-  </p:cSld>
-  <p:clrMapOvr>
-    <a:masterClrMapping/>
-  </p:clrMapOvr>
-</p:sld>
-</file>
-
-<file path=ppt/slides/slide50.xml><?xml version="1.0" encoding="utf-8"?>
-<p:sld xmlns:a="http://schemas.openxmlformats.org/drawingml/2006/main" xmlns:p="http://schemas.openxmlformats.org/presentationml/2006/main" xmlns:r="http://schemas.openxmlformats.org/officeDocument/2006/relationships">
-  <p:cSld>
-    <p:spTree>
-      <p:nvGrpSpPr>
-        <p:cNvPr id="1" name=""/>
-        <p:cNvGrpSpPr/>
-        <p:nvPr/>
-      </p:nvGrpSpPr>
-      <p:grpSpPr/>
-      <p:sp>
-        <p:nvSpPr>
-          <p:cNvPr id="2" name="Title"/>
-          <p:cNvSpPr txBox="1"/>
-          <p:nvPr/>
-        </p:nvSpPr>
-        <p:spPr>
-          <a:xfrm>
-            <a:off x="612648" y="594360"/>
-            <a:ext cx="10972800" cy="612648"/>
-          </a:xfrm>
-          <a:prstGeom prst="rect">
-            <a:avLst/>
-          </a:prstGeom>
-          <a:noFill/>
-        </p:spPr>
-        <p:txBody>
-          <a:bodyPr wrap="square" lIns="0" rIns="0" tIns="0" bIns="0" anchor="t">
-            <a:spAutoFit/>
-          </a:bodyPr>
-          <a:lstStyle/>
-          <a:p>
-            <a:pPr algn="l"/>
-            <a:r>
-              <a:rPr sz="4000" b="1">
-                <a:solidFill>
-                  <a:srgbClr val="0B1F2A"/>
-                </a:solidFill>
-                <a:latin typeface="Caladea Bold"/>
-              </a:rPr>
-              <a:t>The 8-week roadmap</a:t>
-            </a:r>
-          </a:p>
-        </p:txBody>
-      </p:sp>
-      <p:sp>
-        <p:nvSpPr>
-          <p:cNvPr id="3" name="SlideNo"/>
-          <p:cNvSpPr txBox="1"/>
-          <p:nvPr/>
-        </p:nvSpPr>
-        <p:spPr>
-          <a:xfrm>
-            <a:off x="11219688" y="6373368"/>
-            <a:ext cx="694944" cy="256032"/>
-          </a:xfrm>
-          <a:prstGeom prst="rect">
-            <a:avLst/>
-          </a:prstGeom>
-          <a:noFill/>
-        </p:spPr>
-        <p:txBody>
-          <a:bodyPr wrap="square" lIns="0" rIns="0" tIns="0" bIns="0" anchor="t">
-            <a:spAutoFit/>
-          </a:bodyPr>
-          <a:lstStyle/>
-          <a:p>
-            <a:pPr algn="l"/>
-            <a:r>
-              <a:rPr sz="1350" b="0">
-                <a:solidFill>
-                  <a:srgbClr val="6B7F8A"/>
-                </a:solidFill>
-                <a:latin typeface="Carlito"/>
-              </a:rPr>
-              <a:t>30</a:t>
-            </a:r>
-          </a:p>
-        </p:txBody>
-      </p:sp>
-      <p:sp>
-        <p:nvSpPr>
-          <p:cNvPr id="4" name="Rounded Rectangle 3"/>
-          <p:cNvSpPr/>
-          <p:nvPr/>
-        </p:nvSpPr>
-        <p:spPr>
-          <a:xfrm>
-            <a:off x="612648" y="1709928"/>
-            <a:ext cx="5367528" cy="978408"/>
-          </a:xfrm>
-          <a:prstGeom prst="roundRect">
-            <a:avLst>
-              <a:gd name="adj" fmla="val 12000"/>
-            </a:avLst>
-          </a:prstGeom>
-          <a:solidFill>
-            <a:srgbClr val="1FA67A"/>
-          </a:solidFill>
-          <a:ln>
-            <a:noFill/>
-          </a:ln>
-          <a:effectLst/>
-        </p:spPr>
-        <p:style>
-          <a:lnRef idx="1">
-            <a:schemeClr val="accent1"/>
-          </a:lnRef>
-          <a:fillRef idx="3">
-            <a:schemeClr val="accent1"/>
-          </a:fillRef>
-          <a:effectRef idx="2">
-            <a:schemeClr val="accent1"/>
-          </a:effectRef>
-          <a:fontRef idx="minor">
-            <a:schemeClr val="lt1"/>
-          </a:fontRef>
-        </p:style>
-        <p:txBody>
-          <a:bodyPr rtlCol="0" anchor="ctr"/>
-          <a:lstStyle/>
-          <a:p>
-            <a:pPr algn="ctr"/>
-          </a:p>
-        </p:txBody>
-      </p:sp>
-      <p:sp>
-        <p:nvSpPr>
-          <p:cNvPr id="5" name="Oval 4"/>
-          <p:cNvSpPr/>
-          <p:nvPr/>
-        </p:nvSpPr>
-        <p:spPr>
-          <a:xfrm>
-            <a:off x="850392" y="1920240"/>
-            <a:ext cx="557784" cy="557784"/>
-          </a:xfrm>
-          <a:prstGeom prst="ellipse">
-            <a:avLst/>
-          </a:prstGeom>
-          <a:solidFill>
-            <a:srgbClr val="FFFFFF"/>
-          </a:solidFill>
-          <a:ln>
-            <a:noFill/>
-          </a:ln>
-          <a:effectLst/>
-        </p:spPr>
-        <p:style>
-          <a:lnRef idx="1">
-            <a:schemeClr val="accent1"/>
-          </a:lnRef>
-          <a:fillRef idx="3">
-            <a:schemeClr val="accent1"/>
-          </a:fillRef>
-          <a:effectRef idx="2">
-            <a:schemeClr val="accent1"/>
-          </a:effectRef>
-          <a:fontRef idx="minor">
-            <a:schemeClr val="lt1"/>
-          </a:fontRef>
-        </p:style>
-        <p:txBody>
-          <a:bodyPr rtlCol="0" anchor="ctr"/>
-          <a:lstStyle/>
-          <a:p>
-            <a:pPr algn="ctr"/>
-          </a:p>
-        </p:txBody>
-      </p:sp>
-      <p:sp>
-        <p:nvSpPr>
-          <p:cNvPr id="6" name="TextBox 5"/>
-          <p:cNvSpPr txBox="1"/>
-          <p:nvPr/>
-        </p:nvSpPr>
-        <p:spPr>
-          <a:xfrm>
-            <a:off x="850392" y="1920240"/>
-            <a:ext cx="557784" cy="557784"/>
-          </a:xfrm>
-          <a:prstGeom prst="rect">
-            <a:avLst/>
-          </a:prstGeom>
-          <a:noFill/>
-        </p:spPr>
-        <p:txBody>
-          <a:bodyPr wrap="square" lIns="0" rIns="0" tIns="0" bIns="0" anchor="ctr">
-            <a:spAutoFit/>
-          </a:bodyPr>
-          <a:lstStyle/>
-          <a:p>
-            <a:pPr algn="ctr"/>
-            <a:r>
-              <a:rPr sz="2000" b="1">
-                <a:solidFill>
-                  <a:srgbClr val="1FA67A"/>
-                </a:solidFill>
-                <a:latin typeface="Carlito"/>
-              </a:rPr>
-              <a:t>1</a:t>
-            </a:r>
-          </a:p>
-        </p:txBody>
-      </p:sp>
-      <p:sp>
-        <p:nvSpPr>
-          <p:cNvPr id="7" name="TextBox 6"/>
-          <p:cNvSpPr txBox="1"/>
-          <p:nvPr/>
-        </p:nvSpPr>
-        <p:spPr>
-          <a:xfrm>
-            <a:off x="1645919" y="1709928"/>
-            <a:ext cx="3108960" cy="978408"/>
-          </a:xfrm>
-          <a:prstGeom prst="rect">
-            <a:avLst/>
-          </a:prstGeom>
-          <a:noFill/>
-        </p:spPr>
-        <p:txBody>
-          <a:bodyPr wrap="square" lIns="0" rIns="0" tIns="0" bIns="0" anchor="ctr">
-            <a:spAutoFit/>
-          </a:bodyPr>
-          <a:lstStyle/>
-          <a:p>
-            <a:pPr algn="l"/>
-            <a:r>
-              <a:rPr sz="2250" b="1">
-                <a:solidFill>
-                  <a:srgbClr val="FFFFFF"/>
-                </a:solidFill>
-                <a:latin typeface="Carlito"/>
-              </a:rPr>
-              <a:t>Setup &amp; Tooling</a:t>
-            </a:r>
-          </a:p>
-        </p:txBody>
-      </p:sp>
-      <p:sp>
-        <p:nvSpPr>
-          <p:cNvPr id="8" name="Rounded Rectangle 7"/>
-          <p:cNvSpPr/>
-          <p:nvPr/>
-        </p:nvSpPr>
-        <p:spPr>
-          <a:xfrm>
-            <a:off x="4507992" y="2011680"/>
-            <a:ext cx="1344168" cy="365760"/>
-          </a:xfrm>
-          <a:prstGeom prst="roundRect">
-            <a:avLst>
-              <a:gd name="adj" fmla="val 30000"/>
-            </a:avLst>
-          </a:prstGeom>
-          <a:solidFill>
-            <a:srgbClr val="0B1F2A"/>
-          </a:solidFill>
-          <a:ln>
-            <a:noFill/>
-          </a:ln>
-          <a:effectLst/>
-        </p:spPr>
-        <p:style>
-          <a:lnRef idx="1">
-            <a:schemeClr val="accent1"/>
-          </a:lnRef>
-          <a:fillRef idx="3">
-            <a:schemeClr val="accent1"/>
-          </a:fillRef>
-          <a:effectRef idx="2">
-            <a:schemeClr val="accent1"/>
-          </a:effectRef>
-          <a:fontRef idx="minor">
-            <a:schemeClr val="lt1"/>
-          </a:fontRef>
-        </p:style>
-        <p:txBody>
-          <a:bodyPr rtlCol="0" anchor="ctr"/>
-          <a:lstStyle/>
-          <a:p>
-            <a:pPr algn="ctr"/>
-          </a:p>
-        </p:txBody>
-      </p:sp>
-      <p:sp>
-        <p:nvSpPr>
-          <p:cNvPr id="9" name="TextBox 8"/>
-          <p:cNvSpPr txBox="1"/>
-          <p:nvPr/>
-        </p:nvSpPr>
-        <p:spPr>
-          <a:xfrm>
-            <a:off x="4507992" y="2011680"/>
-            <a:ext cx="1344168" cy="365760"/>
-          </a:xfrm>
-          <a:prstGeom prst="rect">
-            <a:avLst/>
-          </a:prstGeom>
-          <a:noFill/>
-        </p:spPr>
-        <p:txBody>
-          <a:bodyPr wrap="square" lIns="0" rIns="0" tIns="0" bIns="0" anchor="ctr">
-            <a:spAutoFit/>
-          </a:bodyPr>
-          <a:lstStyle/>
-          <a:p>
-            <a:pPr algn="ctr"/>
-            <a:r>
-              <a:rPr sz="1600" b="1">
-                <a:solidFill>
-                  <a:srgbClr val="FFFFFF"/>
-                </a:solidFill>
-                <a:latin typeface="Carlito"/>
-              </a:rPr>
-              <a:t>Complete</a:t>
-            </a:r>
-          </a:p>
-        </p:txBody>
-      </p:sp>
-      <p:sp>
-        <p:nvSpPr>
-          <p:cNvPr id="10" name="Rounded Rectangle 9"/>
-          <p:cNvSpPr/>
-          <p:nvPr/>
-        </p:nvSpPr>
-        <p:spPr>
-          <a:xfrm>
-            <a:off x="612648" y="2871216"/>
-            <a:ext cx="5367528" cy="978408"/>
-          </a:xfrm>
-          <a:prstGeom prst="roundRect">
-            <a:avLst>
-              <a:gd name="adj" fmla="val 12000"/>
-            </a:avLst>
-          </a:prstGeom>
-          <a:solidFill>
-            <a:srgbClr val="1FA67A"/>
-          </a:solidFill>
-          <a:ln>
-            <a:noFill/>
-          </a:ln>
-          <a:effectLst/>
-        </p:spPr>
-        <p:style>
-          <a:lnRef idx="1">
-            <a:schemeClr val="accent1"/>
-          </a:lnRef>
-          <a:fillRef idx="3">
-            <a:schemeClr val="accent1"/>
-          </a:fillRef>
-          <a:effectRef idx="2">
-            <a:schemeClr val="accent1"/>
-          </a:effectRef>
-          <a:fontRef idx="minor">
-            <a:schemeClr val="lt1"/>
-          </a:fontRef>
-        </p:style>
-        <p:txBody>
-          <a:bodyPr rtlCol="0" anchor="ctr"/>
-          <a:lstStyle/>
-          <a:p>
-            <a:pPr algn="ctr"/>
-          </a:p>
-        </p:txBody>
-      </p:sp>
-      <p:sp>
-        <p:nvSpPr>
-          <p:cNvPr id="11" name="Oval 10"/>
-          <p:cNvSpPr/>
-          <p:nvPr/>
-        </p:nvSpPr>
-        <p:spPr>
-          <a:xfrm>
-            <a:off x="850392" y="3081528"/>
-            <a:ext cx="557784" cy="557784"/>
-          </a:xfrm>
-          <a:prstGeom prst="ellipse">
-            <a:avLst/>
-          </a:prstGeom>
-          <a:solidFill>
-            <a:srgbClr val="FFFFFF"/>
-          </a:solidFill>
-          <a:ln>
-            <a:noFill/>
-          </a:ln>
-          <a:effectLst/>
-        </p:spPr>
-        <p:style>
-          <a:lnRef idx="1">
-            <a:schemeClr val="accent1"/>
-          </a:lnRef>
-          <a:fillRef idx="3">
-            <a:schemeClr val="accent1"/>
-          </a:fillRef>
-          <a:effectRef idx="2">
-            <a:schemeClr val="accent1"/>
-          </a:effectRef>
-          <a:fontRef idx="minor">
-            <a:schemeClr val="lt1"/>
-          </a:fontRef>
-        </p:style>
-        <p:txBody>
-          <a:bodyPr rtlCol="0" anchor="ctr"/>
-          <a:lstStyle/>
-          <a:p>
-            <a:pPr algn="ctr"/>
-          </a:p>
-        </p:txBody>
-      </p:sp>
-      <p:sp>
-        <p:nvSpPr>
-          <p:cNvPr id="12" name="TextBox 11"/>
-          <p:cNvSpPr txBox="1"/>
-          <p:nvPr/>
-        </p:nvSpPr>
-        <p:spPr>
-          <a:xfrm>
-            <a:off x="850392" y="3081528"/>
-            <a:ext cx="557784" cy="557784"/>
-          </a:xfrm>
-          <a:prstGeom prst="rect">
-            <a:avLst/>
-          </a:prstGeom>
-          <a:noFill/>
-        </p:spPr>
-        <p:txBody>
-          <a:bodyPr wrap="square" lIns="0" rIns="0" tIns="0" bIns="0" anchor="ctr">
-            <a:spAutoFit/>
-          </a:bodyPr>
-          <a:lstStyle/>
-          <a:p>
-            <a:pPr algn="ctr"/>
-            <a:r>
-              <a:rPr sz="2000" b="1">
-                <a:solidFill>
-                  <a:srgbClr val="1FA67A"/>
-                </a:solidFill>
-                <a:latin typeface="Carlito"/>
-              </a:rPr>
-              <a:t>2</a:t>
-            </a:r>
-          </a:p>
-        </p:txBody>
-      </p:sp>
-      <p:sp>
-        <p:nvSpPr>
-          <p:cNvPr id="13" name="TextBox 12"/>
-          <p:cNvSpPr txBox="1"/>
-          <p:nvPr/>
-        </p:nvSpPr>
-        <p:spPr>
-          <a:xfrm>
-            <a:off x="1645919" y="2871216"/>
-            <a:ext cx="3108960" cy="978408"/>
-          </a:xfrm>
-          <a:prstGeom prst="rect">
-            <a:avLst/>
-          </a:prstGeom>
-          <a:noFill/>
-        </p:spPr>
-        <p:txBody>
-          <a:bodyPr wrap="square" lIns="0" rIns="0" tIns="0" bIns="0" anchor="ctr">
-            <a:spAutoFit/>
-          </a:bodyPr>
-          <a:lstStyle/>
-          <a:p>
-            <a:pPr algn="l"/>
-            <a:r>
-              <a:rPr sz="2250" b="1">
-                <a:solidFill>
-                  <a:srgbClr val="FFFFFF"/>
-                </a:solidFill>
-                <a:latin typeface="Carlito"/>
-              </a:rPr>
-              <a:t>Python Fundamentals</a:t>
-            </a:r>
-          </a:p>
-        </p:txBody>
-      </p:sp>
-      <p:sp>
-        <p:nvSpPr>
-          <p:cNvPr id="14" name="Rounded Rectangle 13"/>
-          <p:cNvSpPr/>
-          <p:nvPr/>
-        </p:nvSpPr>
-        <p:spPr>
-          <a:xfrm>
-            <a:off x="4507992" y="3172968"/>
-            <a:ext cx="1344168" cy="365760"/>
-          </a:xfrm>
-          <a:prstGeom prst="roundRect">
-            <a:avLst>
-              <a:gd name="adj" fmla="val 30000"/>
-            </a:avLst>
-          </a:prstGeom>
-          <a:solidFill>
-            <a:srgbClr val="0B1F2A"/>
-          </a:solidFill>
-          <a:ln>
-            <a:noFill/>
-          </a:ln>
-          <a:effectLst/>
-        </p:spPr>
-        <p:style>
-          <a:lnRef idx="1">
-            <a:schemeClr val="accent1"/>
-          </a:lnRef>
-          <a:fillRef idx="3">
-            <a:schemeClr val="accent1"/>
-          </a:fillRef>
-          <a:effectRef idx="2">
-            <a:schemeClr val="accent1"/>
-          </a:effectRef>
-          <a:fontRef idx="minor">
-            <a:schemeClr val="lt1"/>
-          </a:fontRef>
-        </p:style>
-        <p:txBody>
-          <a:bodyPr rtlCol="0" anchor="ctr"/>
-          <a:lstStyle/>
-          <a:p>
-            <a:pPr algn="ctr"/>
-          </a:p>
-        </p:txBody>
-      </p:sp>
-      <p:sp>
-        <p:nvSpPr>
-          <p:cNvPr id="15" name="TextBox 14"/>
-          <p:cNvSpPr txBox="1"/>
-          <p:nvPr/>
-        </p:nvSpPr>
-        <p:spPr>
-          <a:xfrm>
-            <a:off x="4507992" y="3172968"/>
-            <a:ext cx="1344168" cy="365760"/>
-          </a:xfrm>
-          <a:prstGeom prst="rect">
-            <a:avLst/>
-          </a:prstGeom>
-          <a:noFill/>
-        </p:spPr>
-        <p:txBody>
-          <a:bodyPr wrap="square" lIns="0" rIns="0" tIns="0" bIns="0" anchor="ctr">
-            <a:spAutoFit/>
-          </a:bodyPr>
-          <a:lstStyle/>
-          <a:p>
-            <a:pPr algn="ctr"/>
-            <a:r>
-              <a:rPr sz="1600" b="1">
-                <a:solidFill>
-                  <a:srgbClr val="FFFFFF"/>
-                </a:solidFill>
-                <a:latin typeface="Carlito"/>
-              </a:rPr>
-              <a:t>Complete</a:t>
-            </a:r>
-          </a:p>
-        </p:txBody>
-      </p:sp>
-      <p:sp>
-        <p:nvSpPr>
-          <p:cNvPr id="16" name="Rounded Rectangle 15"/>
-          <p:cNvSpPr/>
-          <p:nvPr/>
-        </p:nvSpPr>
-        <p:spPr>
-          <a:xfrm>
-            <a:off x="612648" y="4032504"/>
-            <a:ext cx="5367528" cy="978408"/>
-          </a:xfrm>
-          <a:prstGeom prst="roundRect">
-            <a:avLst>
-              <a:gd name="adj" fmla="val 12000"/>
-            </a:avLst>
-          </a:prstGeom>
-          <a:solidFill>
-            <a:srgbClr val="3B82C4"/>
-          </a:solidFill>
-          <a:ln>
-            <a:noFill/>
-          </a:ln>
-          <a:effectLst/>
-        </p:spPr>
-        <p:style>
-          <a:lnRef idx="1">
-            <a:schemeClr val="accent1"/>
-          </a:lnRef>
-          <a:fillRef idx="3">
-            <a:schemeClr val="accent1"/>
-          </a:fillRef>
-          <a:effectRef idx="2">
-            <a:schemeClr val="accent1"/>
-          </a:effectRef>
-          <a:fontRef idx="minor">
-            <a:schemeClr val="lt1"/>
-          </a:fontRef>
-        </p:style>
-        <p:txBody>
-          <a:bodyPr rtlCol="0" anchor="ctr"/>
-          <a:lstStyle/>
-          <a:p>
-            <a:pPr algn="ctr"/>
-          </a:p>
-        </p:txBody>
-      </p:sp>
-      <p:sp>
-        <p:nvSpPr>
-          <p:cNvPr id="17" name="Oval 16"/>
-          <p:cNvSpPr/>
-          <p:nvPr/>
-        </p:nvSpPr>
-        <p:spPr>
-          <a:xfrm>
-            <a:off x="850392" y="4242816"/>
-            <a:ext cx="557784" cy="557784"/>
-          </a:xfrm>
-          <a:prstGeom prst="ellipse">
-            <a:avLst/>
-          </a:prstGeom>
-          <a:solidFill>
-            <a:srgbClr val="FFFFFF"/>
-          </a:solidFill>
-          <a:ln>
-            <a:noFill/>
-          </a:ln>
-          <a:effectLst/>
-        </p:spPr>
-        <p:style>
-          <a:lnRef idx="1">
-            <a:schemeClr val="accent1"/>
-          </a:lnRef>
-          <a:fillRef idx="3">
-            <a:schemeClr val="accent1"/>
-          </a:fillRef>
-          <a:effectRef idx="2">
-            <a:schemeClr val="accent1"/>
-          </a:effectRef>
-          <a:fontRef idx="minor">
-            <a:schemeClr val="lt1"/>
-          </a:fontRef>
-        </p:style>
-        <p:txBody>
-          <a:bodyPr rtlCol="0" anchor="ctr"/>
-          <a:lstStyle/>
-          <a:p>
-            <a:pPr algn="ctr"/>
-          </a:p>
-        </p:txBody>
-      </p:sp>
-      <p:sp>
-        <p:nvSpPr>
-          <p:cNvPr id="18" name="TextBox 17"/>
-          <p:cNvSpPr txBox="1"/>
-          <p:nvPr/>
-        </p:nvSpPr>
-        <p:spPr>
-          <a:xfrm>
-            <a:off x="850392" y="4242816"/>
-            <a:ext cx="557784" cy="557784"/>
-          </a:xfrm>
-          <a:prstGeom prst="rect">
-            <a:avLst/>
-          </a:prstGeom>
-          <a:noFill/>
-        </p:spPr>
-        <p:txBody>
-          <a:bodyPr wrap="square" lIns="0" rIns="0" tIns="0" bIns="0" anchor="ctr">
-            <a:spAutoFit/>
-          </a:bodyPr>
-          <a:lstStyle/>
-          <a:p>
-            <a:pPr algn="ctr"/>
-            <a:r>
-              <a:rPr sz="2000" b="1">
-                <a:solidFill>
-                  <a:srgbClr val="3B82C4"/>
-                </a:solidFill>
-                <a:latin typeface="Carlito"/>
-              </a:rPr>
-              <a:t>3</a:t>
-            </a:r>
-          </a:p>
-        </p:txBody>
-      </p:sp>
-      <p:sp>
-        <p:nvSpPr>
-          <p:cNvPr id="19" name="TextBox 18"/>
-          <p:cNvSpPr txBox="1"/>
-          <p:nvPr/>
-        </p:nvSpPr>
-        <p:spPr>
-          <a:xfrm>
-            <a:off x="1645919" y="4032504"/>
-            <a:ext cx="3108960" cy="978408"/>
-          </a:xfrm>
-          <a:prstGeom prst="rect">
-            <a:avLst/>
-          </a:prstGeom>
-          <a:noFill/>
-        </p:spPr>
-        <p:txBody>
-          <a:bodyPr wrap="square" lIns="0" rIns="0" tIns="0" bIns="0" anchor="ctr">
-            <a:spAutoFit/>
-          </a:bodyPr>
-          <a:lstStyle/>
-          <a:p>
-            <a:pPr algn="l"/>
-            <a:r>
-              <a:rPr sz="2250" b="1">
-                <a:solidFill>
-                  <a:srgbClr val="FFFFFF"/>
-                </a:solidFill>
-                <a:latin typeface="Carlito"/>
-              </a:rPr>
-              <a:t>JavaScript Fundamentals</a:t>
-            </a:r>
-          </a:p>
-        </p:txBody>
-      </p:sp>
-      <p:sp>
-        <p:nvSpPr>
-          <p:cNvPr id="20" name="Rounded Rectangle 19"/>
-          <p:cNvSpPr/>
-          <p:nvPr/>
-        </p:nvSpPr>
-        <p:spPr>
-          <a:xfrm>
-            <a:off x="4507992" y="4334256"/>
-            <a:ext cx="1344168" cy="365760"/>
-          </a:xfrm>
-          <a:prstGeom prst="roundRect">
-            <a:avLst>
-              <a:gd name="adj" fmla="val 30000"/>
-            </a:avLst>
-          </a:prstGeom>
-          <a:solidFill>
-            <a:srgbClr val="0B1F2A"/>
-          </a:solidFill>
-          <a:ln>
-            <a:noFill/>
-          </a:ln>
-          <a:effectLst/>
-        </p:spPr>
-        <p:style>
-          <a:lnRef idx="1">
-            <a:schemeClr val="accent1"/>
-          </a:lnRef>
-          <a:fillRef idx="3">
-            <a:schemeClr val="accent1"/>
-          </a:fillRef>
-          <a:effectRef idx="2">
-            <a:schemeClr val="accent1"/>
-          </a:effectRef>
-          <a:fontRef idx="minor">
-            <a:schemeClr val="lt1"/>
-          </a:fontRef>
-        </p:style>
-        <p:txBody>
-          <a:bodyPr rtlCol="0" anchor="ctr"/>
-          <a:lstStyle/>
-          <a:p>
-            <a:pPr algn="ctr"/>
-          </a:p>
-        </p:txBody>
-      </p:sp>
-      <p:sp>
-        <p:nvSpPr>
-          <p:cNvPr id="21" name="TextBox 20"/>
-          <p:cNvSpPr txBox="1"/>
-          <p:nvPr/>
-        </p:nvSpPr>
-        <p:spPr>
-          <a:xfrm>
-            <a:off x="4507992" y="4334256"/>
-            <a:ext cx="1344168" cy="365760"/>
-          </a:xfrm>
-          <a:prstGeom prst="rect">
-            <a:avLst/>
-          </a:prstGeom>
-          <a:noFill/>
-        </p:spPr>
-        <p:txBody>
-          <a:bodyPr wrap="square" lIns="0" rIns="0" tIns="0" bIns="0" anchor="ctr">
-            <a:spAutoFit/>
-          </a:bodyPr>
-          <a:lstStyle/>
-          <a:p>
-            <a:pPr algn="ctr"/>
-            <a:r>
-              <a:rPr sz="1600" b="1">
-                <a:solidFill>
-                  <a:srgbClr val="FFFFFF"/>
-                </a:solidFill>
-                <a:latin typeface="Carlito"/>
-              </a:rPr>
-              <a:t>Next Class</a:t>
-            </a:r>
-          </a:p>
-        </p:txBody>
-      </p:sp>
-      <p:sp>
-        <p:nvSpPr>
-          <p:cNvPr id="22" name="Rounded Rectangle 21"/>
-          <p:cNvSpPr/>
-          <p:nvPr/>
-        </p:nvSpPr>
-        <p:spPr>
-          <a:xfrm>
-            <a:off x="612648" y="5193792"/>
-            <a:ext cx="5367528" cy="978408"/>
-          </a:xfrm>
-          <a:prstGeom prst="roundRect">
-            <a:avLst>
-              <a:gd name="adj" fmla="val 12000"/>
-            </a:avLst>
-          </a:prstGeom>
-          <a:solidFill>
-            <a:srgbClr val="EEF3F5"/>
-          </a:solidFill>
-          <a:ln>
-            <a:noFill/>
-          </a:ln>
-          <a:effectLst/>
-        </p:spPr>
-        <p:style>
-          <a:lnRef idx="1">
-            <a:schemeClr val="accent1"/>
-          </a:lnRef>
-          <a:fillRef idx="3">
-            <a:schemeClr val="accent1"/>
-          </a:fillRef>
-          <a:effectRef idx="2">
-            <a:schemeClr val="accent1"/>
-          </a:effectRef>
-          <a:fontRef idx="minor">
-            <a:schemeClr val="lt1"/>
-          </a:fontRef>
-        </p:style>
-        <p:txBody>
-          <a:bodyPr rtlCol="0" anchor="ctr"/>
-          <a:lstStyle/>
-          <a:p>
-            <a:pPr algn="ctr"/>
-          </a:p>
-        </p:txBody>
-      </p:sp>
-      <p:sp>
-        <p:nvSpPr>
-          <p:cNvPr id="23" name="Oval 22"/>
-          <p:cNvSpPr/>
-          <p:nvPr/>
-        </p:nvSpPr>
-        <p:spPr>
-          <a:xfrm>
-            <a:off x="850392" y="5404104"/>
-            <a:ext cx="557784" cy="557784"/>
-          </a:xfrm>
-          <a:prstGeom prst="ellipse">
-            <a:avLst/>
-          </a:prstGeom>
-          <a:solidFill>
-            <a:srgbClr val="3B82C4"/>
-          </a:solidFill>
-          <a:ln>
-            <a:noFill/>
-          </a:ln>
-          <a:effectLst/>
-        </p:spPr>
-        <p:style>
-          <a:lnRef idx="1">
-            <a:schemeClr val="accent1"/>
-          </a:lnRef>
-          <a:fillRef idx="3">
-            <a:schemeClr val="accent1"/>
-          </a:fillRef>
-          <a:effectRef idx="2">
-            <a:schemeClr val="accent1"/>
-          </a:effectRef>
-          <a:fontRef idx="minor">
-            <a:schemeClr val="lt1"/>
-          </a:fontRef>
-        </p:style>
-        <p:txBody>
-          <a:bodyPr rtlCol="0" anchor="ctr"/>
-          <a:lstStyle/>
-          <a:p>
-            <a:pPr algn="ctr"/>
-          </a:p>
-        </p:txBody>
-      </p:sp>
-      <p:sp>
-        <p:nvSpPr>
-          <p:cNvPr id="24" name="TextBox 23"/>
-          <p:cNvSpPr txBox="1"/>
-          <p:nvPr/>
-        </p:nvSpPr>
-        <p:spPr>
-          <a:xfrm>
-            <a:off x="850392" y="5404104"/>
-            <a:ext cx="557784" cy="557784"/>
-          </a:xfrm>
-          <a:prstGeom prst="rect">
-            <a:avLst/>
-          </a:prstGeom>
-          <a:noFill/>
-        </p:spPr>
-        <p:txBody>
-          <a:bodyPr wrap="square" lIns="0" rIns="0" tIns="0" bIns="0" anchor="ctr">
-            <a:spAutoFit/>
-          </a:bodyPr>
-          <a:lstStyle/>
-          <a:p>
-            <a:pPr algn="ctr"/>
-            <a:r>
-              <a:rPr sz="2000" b="1">
-                <a:solidFill>
-                  <a:srgbClr val="FFFFFF"/>
-                </a:solidFill>
-                <a:latin typeface="Carlito"/>
-              </a:rPr>
-              <a:t>4</a:t>
-            </a:r>
-          </a:p>
-        </p:txBody>
-      </p:sp>
-      <p:sp>
-        <p:nvSpPr>
-          <p:cNvPr id="25" name="TextBox 24"/>
-          <p:cNvSpPr txBox="1"/>
-          <p:nvPr/>
-        </p:nvSpPr>
-        <p:spPr>
-          <a:xfrm>
-            <a:off x="1645919" y="5193792"/>
-            <a:ext cx="4206240" cy="978408"/>
-          </a:xfrm>
-          <a:prstGeom prst="rect">
-            <a:avLst/>
-          </a:prstGeom>
-          <a:noFill/>
-        </p:spPr>
-        <p:txBody>
-          <a:bodyPr wrap="square" lIns="0" rIns="0" tIns="0" bIns="0" anchor="ctr">
-            <a:spAutoFit/>
-          </a:bodyPr>
-          <a:lstStyle/>
-          <a:p>
-            <a:pPr algn="l"/>
-            <a:r>
-              <a:rPr sz="2250" b="1">
-                <a:solidFill>
-                  <a:srgbClr val="0B1F2A"/>
-                </a:solidFill>
-                <a:latin typeface="Carlito"/>
-              </a:rPr>
-              <a:t>Backend with FastAPI</a:t>
-            </a:r>
-          </a:p>
-        </p:txBody>
-      </p:sp>
-      <p:sp>
-        <p:nvSpPr>
-          <p:cNvPr id="26" name="Rounded Rectangle 25"/>
-          <p:cNvSpPr/>
-          <p:nvPr/>
-        </p:nvSpPr>
-        <p:spPr>
-          <a:xfrm>
-            <a:off x="6217920" y="1709928"/>
-            <a:ext cx="5367528" cy="978408"/>
-          </a:xfrm>
-          <a:prstGeom prst="roundRect">
-            <a:avLst>
-              <a:gd name="adj" fmla="val 12000"/>
-            </a:avLst>
-          </a:prstGeom>
-          <a:solidFill>
-            <a:srgbClr val="EEF3F5"/>
-          </a:solidFill>
-          <a:ln>
-            <a:noFill/>
-          </a:ln>
-          <a:effectLst/>
-        </p:spPr>
-        <p:style>
-          <a:lnRef idx="1">
-            <a:schemeClr val="accent1"/>
-          </a:lnRef>
-          <a:fillRef idx="3">
-            <a:schemeClr val="accent1"/>
-          </a:fillRef>
-          <a:effectRef idx="2">
-            <a:schemeClr val="accent1"/>
-          </a:effectRef>
-          <a:fontRef idx="minor">
-            <a:schemeClr val="lt1"/>
-          </a:fontRef>
-        </p:style>
-        <p:txBody>
-          <a:bodyPr rtlCol="0" anchor="ctr"/>
-          <a:lstStyle/>
-          <a:p>
-            <a:pPr algn="ctr"/>
-          </a:p>
-        </p:txBody>
-      </p:sp>
-      <p:sp>
-        <p:nvSpPr>
-          <p:cNvPr id="27" name="Oval 26"/>
-          <p:cNvSpPr/>
-          <p:nvPr/>
-        </p:nvSpPr>
-        <p:spPr>
-          <a:xfrm>
-            <a:off x="6455664" y="1920240"/>
-            <a:ext cx="557784" cy="557784"/>
-          </a:xfrm>
-          <a:prstGeom prst="ellipse">
-            <a:avLst/>
-          </a:prstGeom>
-          <a:solidFill>
-            <a:srgbClr val="3B82C4"/>
-          </a:solidFill>
-          <a:ln>
-            <a:noFill/>
-          </a:ln>
-          <a:effectLst/>
-        </p:spPr>
-        <p:style>
-          <a:lnRef idx="1">
-            <a:schemeClr val="accent1"/>
-          </a:lnRef>
-          <a:fillRef idx="3">
-            <a:schemeClr val="accent1"/>
-          </a:fillRef>
-          <a:effectRef idx="2">
-            <a:schemeClr val="accent1"/>
-          </a:effectRef>
-          <a:fontRef idx="minor">
-            <a:schemeClr val="lt1"/>
-          </a:fontRef>
-        </p:style>
-        <p:txBody>
-          <a:bodyPr rtlCol="0" anchor="ctr"/>
-          <a:lstStyle/>
-          <a:p>
-            <a:pPr algn="ctr"/>
-          </a:p>
-        </p:txBody>
-      </p:sp>
-      <p:sp>
-        <p:nvSpPr>
-          <p:cNvPr id="28" name="TextBox 27"/>
-          <p:cNvSpPr txBox="1"/>
-          <p:nvPr/>
-        </p:nvSpPr>
-        <p:spPr>
-          <a:xfrm>
-            <a:off x="6455664" y="1920240"/>
-            <a:ext cx="557784" cy="557784"/>
-          </a:xfrm>
-          <a:prstGeom prst="rect">
-            <a:avLst/>
-          </a:prstGeom>
-          <a:noFill/>
-        </p:spPr>
-        <p:txBody>
-          <a:bodyPr wrap="square" lIns="0" rIns="0" tIns="0" bIns="0" anchor="ctr">
-            <a:spAutoFit/>
-          </a:bodyPr>
-          <a:lstStyle/>
-          <a:p>
-            <a:pPr algn="ctr"/>
-            <a:r>
-              <a:rPr sz="2000" b="1">
-                <a:solidFill>
-                  <a:srgbClr val="FFFFFF"/>
-                </a:solidFill>
-                <a:latin typeface="Carlito"/>
-              </a:rPr>
-              <a:t>5</a:t>
-            </a:r>
-          </a:p>
-        </p:txBody>
-      </p:sp>
-      <p:sp>
-        <p:nvSpPr>
-          <p:cNvPr id="29" name="TextBox 28"/>
-          <p:cNvSpPr txBox="1"/>
-          <p:nvPr/>
-        </p:nvSpPr>
-        <p:spPr>
-          <a:xfrm>
-            <a:off x="7251192" y="1709928"/>
-            <a:ext cx="4206240" cy="978408"/>
-          </a:xfrm>
-          <a:prstGeom prst="rect">
-            <a:avLst/>
-          </a:prstGeom>
-          <a:noFill/>
-        </p:spPr>
-        <p:txBody>
-          <a:bodyPr wrap="square" lIns="0" rIns="0" tIns="0" bIns="0" anchor="ctr">
-            <a:spAutoFit/>
-          </a:bodyPr>
-          <a:lstStyle/>
-          <a:p>
-            <a:pPr algn="l"/>
-            <a:r>
-              <a:rPr sz="2250" b="1">
-                <a:solidFill>
-                  <a:srgbClr val="0B1F2A"/>
-                </a:solidFill>
-                <a:latin typeface="Carlito"/>
-              </a:rPr>
-              <a:t>HTML, CSS &amp; Vanilla JS</a:t>
-            </a:r>
-          </a:p>
-        </p:txBody>
-      </p:sp>
-      <p:sp>
-        <p:nvSpPr>
-          <p:cNvPr id="30" name="Rounded Rectangle 29"/>
-          <p:cNvSpPr/>
-          <p:nvPr/>
-        </p:nvSpPr>
-        <p:spPr>
-          <a:xfrm>
-            <a:off x="6217920" y="2871216"/>
-            <a:ext cx="5367528" cy="978408"/>
-          </a:xfrm>
-          <a:prstGeom prst="roundRect">
-            <a:avLst>
-              <a:gd name="adj" fmla="val 12000"/>
-            </a:avLst>
-          </a:prstGeom>
-          <a:solidFill>
-            <a:srgbClr val="EEF3F5"/>
-          </a:solidFill>
-          <a:ln>
-            <a:noFill/>
-          </a:ln>
-          <a:effectLst/>
-        </p:spPr>
-        <p:style>
-          <a:lnRef idx="1">
-            <a:schemeClr val="accent1"/>
-          </a:lnRef>
-          <a:fillRef idx="3">
-            <a:schemeClr val="accent1"/>
-          </a:fillRef>
-          <a:effectRef idx="2">
-            <a:schemeClr val="accent1"/>
-          </a:effectRef>
-          <a:fontRef idx="minor">
-            <a:schemeClr val="lt1"/>
-          </a:fontRef>
-        </p:style>
-        <p:txBody>
-          <a:bodyPr rtlCol="0" anchor="ctr"/>
-          <a:lstStyle/>
-          <a:p>
-            <a:pPr algn="ctr"/>
-          </a:p>
-        </p:txBody>
-      </p:sp>
-      <p:sp>
-        <p:nvSpPr>
-          <p:cNvPr id="31" name="Oval 30"/>
-          <p:cNvSpPr/>
-          <p:nvPr/>
-        </p:nvSpPr>
-        <p:spPr>
-          <a:xfrm>
-            <a:off x="6455664" y="3081528"/>
-            <a:ext cx="557784" cy="557784"/>
-          </a:xfrm>
-          <a:prstGeom prst="ellipse">
-            <a:avLst/>
-          </a:prstGeom>
-          <a:solidFill>
-            <a:srgbClr val="3B82C4"/>
-          </a:solidFill>
-          <a:ln>
-            <a:noFill/>
-          </a:ln>
-          <a:effectLst/>
-        </p:spPr>
-        <p:style>
-          <a:lnRef idx="1">
-            <a:schemeClr val="accent1"/>
-          </a:lnRef>
-          <a:fillRef idx="3">
-            <a:schemeClr val="accent1"/>
-          </a:fillRef>
-          <a:effectRef idx="2">
-            <a:schemeClr val="accent1"/>
-          </a:effectRef>
-          <a:fontRef idx="minor">
-            <a:schemeClr val="lt1"/>
-          </a:fontRef>
-        </p:style>
-        <p:txBody>
-          <a:bodyPr rtlCol="0" anchor="ctr"/>
-          <a:lstStyle/>
-          <a:p>
-            <a:pPr algn="ctr"/>
-          </a:p>
-        </p:txBody>
-      </p:sp>
-      <p:sp>
-        <p:nvSpPr>
-          <p:cNvPr id="32" name="TextBox 31"/>
-          <p:cNvSpPr txBox="1"/>
-          <p:nvPr/>
-        </p:nvSpPr>
-        <p:spPr>
-          <a:xfrm>
-            <a:off x="6455664" y="3081528"/>
-            <a:ext cx="557784" cy="557784"/>
-          </a:xfrm>
-          <a:prstGeom prst="rect">
-            <a:avLst/>
-          </a:prstGeom>
-          <a:noFill/>
-        </p:spPr>
-        <p:txBody>
-          <a:bodyPr wrap="square" lIns="0" rIns="0" tIns="0" bIns="0" anchor="ctr">
-            <a:spAutoFit/>
-          </a:bodyPr>
-          <a:lstStyle/>
-          <a:p>
-            <a:pPr algn="ctr"/>
-            <a:r>
-              <a:rPr sz="2000" b="1">
-                <a:solidFill>
-                  <a:srgbClr val="FFFFFF"/>
-                </a:solidFill>
-                <a:latin typeface="Carlito"/>
-              </a:rPr>
-              <a:t>6</a:t>
-            </a:r>
-          </a:p>
-        </p:txBody>
-      </p:sp>
-      <p:sp>
-        <p:nvSpPr>
-          <p:cNvPr id="33" name="TextBox 32"/>
-          <p:cNvSpPr txBox="1"/>
-          <p:nvPr/>
-        </p:nvSpPr>
-        <p:spPr>
-          <a:xfrm>
-            <a:off x="7251192" y="2871216"/>
-            <a:ext cx="4206240" cy="978408"/>
-          </a:xfrm>
-          <a:prstGeom prst="rect">
-            <a:avLst/>
-          </a:prstGeom>
-          <a:noFill/>
-        </p:spPr>
-        <p:txBody>
-          <a:bodyPr wrap="square" lIns="0" rIns="0" tIns="0" bIns="0" anchor="ctr">
-            <a:spAutoFit/>
-          </a:bodyPr>
-          <a:lstStyle/>
-          <a:p>
-            <a:pPr algn="l"/>
-            <a:r>
-              <a:rPr sz="2250" b="1">
-                <a:solidFill>
-                  <a:srgbClr val="0B1F2A"/>
-                </a:solidFill>
-                <a:latin typeface="Carlito"/>
-              </a:rPr>
-              <a:t>React, Rebuilt</a:t>
-            </a:r>
-          </a:p>
-        </p:txBody>
-      </p:sp>
-      <p:sp>
-        <p:nvSpPr>
-          <p:cNvPr id="34" name="Rounded Rectangle 33"/>
-          <p:cNvSpPr/>
-          <p:nvPr/>
-        </p:nvSpPr>
-        <p:spPr>
-          <a:xfrm>
-            <a:off x="6217920" y="4032504"/>
-            <a:ext cx="5367528" cy="978408"/>
-          </a:xfrm>
-          <a:prstGeom prst="roundRect">
-            <a:avLst>
-              <a:gd name="adj" fmla="val 12000"/>
-            </a:avLst>
-          </a:prstGeom>
-          <a:solidFill>
-            <a:srgbClr val="EEF3F5"/>
-          </a:solidFill>
-          <a:ln>
-            <a:noFill/>
-          </a:ln>
-          <a:effectLst/>
-        </p:spPr>
-        <p:style>
-          <a:lnRef idx="1">
-            <a:schemeClr val="accent1"/>
-          </a:lnRef>
-          <a:fillRef idx="3">
-            <a:schemeClr val="accent1"/>
-          </a:fillRef>
-          <a:effectRef idx="2">
-            <a:schemeClr val="accent1"/>
-          </a:effectRef>
-          <a:fontRef idx="minor">
-            <a:schemeClr val="lt1"/>
-          </a:fontRef>
-        </p:style>
-        <p:txBody>
-          <a:bodyPr rtlCol="0" anchor="ctr"/>
-          <a:lstStyle/>
-          <a:p>
-            <a:pPr algn="ctr"/>
-          </a:p>
-        </p:txBody>
-      </p:sp>
-      <p:sp>
-        <p:nvSpPr>
-          <p:cNvPr id="35" name="Oval 34"/>
-          <p:cNvSpPr/>
-          <p:nvPr/>
-        </p:nvSpPr>
-        <p:spPr>
-          <a:xfrm>
-            <a:off x="6455664" y="4242816"/>
-            <a:ext cx="557784" cy="557784"/>
-          </a:xfrm>
-          <a:prstGeom prst="ellipse">
-            <a:avLst/>
-          </a:prstGeom>
-          <a:solidFill>
-            <a:srgbClr val="3B82C4"/>
-          </a:solidFill>
-          <a:ln>
-            <a:noFill/>
-          </a:ln>
-          <a:effectLst/>
-        </p:spPr>
-        <p:style>
-          <a:lnRef idx="1">
-            <a:schemeClr val="accent1"/>
-          </a:lnRef>
-          <a:fillRef idx="3">
-            <a:schemeClr val="accent1"/>
-          </a:fillRef>
-          <a:effectRef idx="2">
-            <a:schemeClr val="accent1"/>
-          </a:effectRef>
-          <a:fontRef idx="minor">
-            <a:schemeClr val="lt1"/>
-          </a:fontRef>
-        </p:style>
-        <p:txBody>
-          <a:bodyPr rtlCol="0" anchor="ctr"/>
-          <a:lstStyle/>
-          <a:p>
-            <a:pPr algn="ctr"/>
-          </a:p>
-        </p:txBody>
-      </p:sp>
-      <p:sp>
-        <p:nvSpPr>
-          <p:cNvPr id="36" name="TextBox 35"/>
-          <p:cNvSpPr txBox="1"/>
-          <p:nvPr/>
-        </p:nvSpPr>
-        <p:spPr>
-          <a:xfrm>
-            <a:off x="6455664" y="4242816"/>
-            <a:ext cx="557784" cy="557784"/>
-          </a:xfrm>
-          <a:prstGeom prst="rect">
-            <a:avLst/>
-          </a:prstGeom>
-          <a:noFill/>
-        </p:spPr>
-        <p:txBody>
-          <a:bodyPr wrap="square" lIns="0" rIns="0" tIns="0" bIns="0" anchor="ctr">
-            <a:spAutoFit/>
-          </a:bodyPr>
-          <a:lstStyle/>
-          <a:p>
-            <a:pPr algn="ctr"/>
-            <a:r>
-              <a:rPr sz="2000" b="1">
-                <a:solidFill>
-                  <a:srgbClr val="FFFFFF"/>
-                </a:solidFill>
-                <a:latin typeface="Carlito"/>
-              </a:rPr>
-              <a:t>7</a:t>
-            </a:r>
-          </a:p>
-        </p:txBody>
-      </p:sp>
-      <p:sp>
-        <p:nvSpPr>
-          <p:cNvPr id="37" name="TextBox 36"/>
-          <p:cNvSpPr txBox="1"/>
-          <p:nvPr/>
-        </p:nvSpPr>
-        <p:spPr>
-          <a:xfrm>
-            <a:off x="7251192" y="4032504"/>
-            <a:ext cx="4206240" cy="978408"/>
-          </a:xfrm>
-          <a:prstGeom prst="rect">
-            <a:avLst/>
-          </a:prstGeom>
-          <a:noFill/>
-        </p:spPr>
-        <p:txBody>
-          <a:bodyPr wrap="square" lIns="0" rIns="0" tIns="0" bIns="0" anchor="ctr">
-            <a:spAutoFit/>
-          </a:bodyPr>
-          <a:lstStyle/>
-          <a:p>
-            <a:pPr algn="l"/>
-            <a:r>
-              <a:rPr sz="2250" b="1">
-                <a:solidFill>
-                  <a:srgbClr val="0B1F2A"/>
-                </a:solidFill>
-                <a:latin typeface="Carlito"/>
-              </a:rPr>
-              <a:t>Full-Stack Integration</a:t>
-            </a:r>
-          </a:p>
-        </p:txBody>
-      </p:sp>
-      <p:sp>
-        <p:nvSpPr>
-          <p:cNvPr id="38" name="Rounded Rectangle 37"/>
-          <p:cNvSpPr/>
-          <p:nvPr/>
-        </p:nvSpPr>
-        <p:spPr>
-          <a:xfrm>
-            <a:off x="6217920" y="5193792"/>
-            <a:ext cx="5367528" cy="978408"/>
-          </a:xfrm>
-          <a:prstGeom prst="roundRect">
-            <a:avLst>
-              <a:gd name="adj" fmla="val 12000"/>
-            </a:avLst>
-          </a:prstGeom>
-          <a:solidFill>
-            <a:srgbClr val="EEF3F5"/>
-          </a:solidFill>
-          <a:ln>
-            <a:noFill/>
-          </a:ln>
-          <a:effectLst/>
-        </p:spPr>
-        <p:style>
-          <a:lnRef idx="1">
-            <a:schemeClr val="accent1"/>
-          </a:lnRef>
-          <a:fillRef idx="3">
-            <a:schemeClr val="accent1"/>
-          </a:fillRef>
-          <a:effectRef idx="2">
-            <a:schemeClr val="accent1"/>
-          </a:effectRef>
-          <a:fontRef idx="minor">
-            <a:schemeClr val="lt1"/>
-          </a:fontRef>
-        </p:style>
-        <p:txBody>
-          <a:bodyPr rtlCol="0" anchor="ctr"/>
-          <a:lstStyle/>
-          <a:p>
-            <a:pPr algn="ctr"/>
-          </a:p>
-        </p:txBody>
-      </p:sp>
-      <p:sp>
-        <p:nvSpPr>
-          <p:cNvPr id="39" name="Oval 38"/>
-          <p:cNvSpPr/>
-          <p:nvPr/>
-        </p:nvSpPr>
-        <p:spPr>
-          <a:xfrm>
-            <a:off x="6455664" y="5404104"/>
-            <a:ext cx="557784" cy="557784"/>
-          </a:xfrm>
-          <a:prstGeom prst="ellipse">
-            <a:avLst/>
-          </a:prstGeom>
-          <a:solidFill>
-            <a:srgbClr val="3B82C4"/>
-          </a:solidFill>
-          <a:ln>
-            <a:noFill/>
-          </a:ln>
-          <a:effectLst/>
-        </p:spPr>
-        <p:style>
-          <a:lnRef idx="1">
-            <a:schemeClr val="accent1"/>
-          </a:lnRef>
-          <a:fillRef idx="3">
-            <a:schemeClr val="accent1"/>
-          </a:fillRef>
-          <a:effectRef idx="2">
-            <a:schemeClr val="accent1"/>
-          </a:effectRef>
-          <a:fontRef idx="minor">
-            <a:schemeClr val="lt1"/>
-          </a:fontRef>
-        </p:style>
-        <p:txBody>
-          <a:bodyPr rtlCol="0" anchor="ctr"/>
-          <a:lstStyle/>
-          <a:p>
-            <a:pPr algn="ctr"/>
-          </a:p>
-        </p:txBody>
-      </p:sp>
-      <p:sp>
-        <p:nvSpPr>
-          <p:cNvPr id="40" name="TextBox 39"/>
-          <p:cNvSpPr txBox="1"/>
-          <p:nvPr/>
-        </p:nvSpPr>
-        <p:spPr>
-          <a:xfrm>
-            <a:off x="6455664" y="5404104"/>
-            <a:ext cx="557784" cy="557784"/>
-          </a:xfrm>
-          <a:prstGeom prst="rect">
-            <a:avLst/>
-          </a:prstGeom>
-          <a:noFill/>
-        </p:spPr>
-        <p:txBody>
-          <a:bodyPr wrap="square" lIns="0" rIns="0" tIns="0" bIns="0" anchor="ctr">
-            <a:spAutoFit/>
-          </a:bodyPr>
-          <a:lstStyle/>
-          <a:p>
-            <a:pPr algn="ctr"/>
-            <a:r>
-              <a:rPr sz="2000" b="1">
-                <a:solidFill>
-                  <a:srgbClr val="FFFFFF"/>
-                </a:solidFill>
-                <a:latin typeface="Carlito"/>
-              </a:rPr>
-              <a:t>8</a:t>
-            </a:r>
-          </a:p>
-        </p:txBody>
-      </p:sp>
-      <p:sp>
-        <p:nvSpPr>
-          <p:cNvPr id="41" name="TextBox 40"/>
-          <p:cNvSpPr txBox="1"/>
-          <p:nvPr/>
-        </p:nvSpPr>
-        <p:spPr>
-          <a:xfrm>
-            <a:off x="7251192" y="5193792"/>
-            <a:ext cx="4206240" cy="978408"/>
-          </a:xfrm>
-          <a:prstGeom prst="rect">
-            <a:avLst/>
-          </a:prstGeom>
-          <a:noFill/>
-        </p:spPr>
-        <p:txBody>
-          <a:bodyPr wrap="square" lIns="0" rIns="0" tIns="0" bIns="0" anchor="ctr">
-            <a:spAutoFit/>
-          </a:bodyPr>
-          <a:lstStyle/>
-          <a:p>
-            <a:pPr algn="l"/>
-            <a:r>
-              <a:rPr sz="2250" b="1">
-                <a:solidFill>
-                  <a:srgbClr val="0B1F2A"/>
-                </a:solidFill>
-                <a:latin typeface="Carlito"/>
-              </a:rPr>
-              <a:t>Capstone &amp; Demo Day</a:t>
-            </a:r>
-          </a:p>
-        </p:txBody>
-      </p:sp>
-    </p:spTree>
-  </p:cSld>
-  <p:clrMapOvr>
-    <a:masterClrMapping/>
-  </p:clrMapOvr>
-</p:sld>
-</file>
-
-<file path=ppt/slides/slide51.xml><?xml version="1.0" encoding="utf-8"?>
-<p:sld xmlns:a="http://schemas.openxmlformats.org/drawingml/2006/main" xmlns:p="http://schemas.openxmlformats.org/presentationml/2006/main" xmlns:r="http://schemas.openxmlformats.org/officeDocument/2006/relationships">
-  <p:cSld>
-    <p:spTree>
-      <p:nvGrpSpPr>
-        <p:cNvPr id="1" name=""/>
-        <p:cNvGrpSpPr/>
-        <p:nvPr/>
-      </p:nvGrpSpPr>
-      <p:grpSpPr/>
-      <p:sp>
-        <p:nvSpPr>
-          <p:cNvPr id="2" name="Text 0"/>
-          <p:cNvSpPr/>
-          <p:nvPr/>
-        </p:nvSpPr>
-        <p:spPr>
-          <a:xfrm>
-            <a:off x="1256475" y="2314377"/>
-            <a:ext cx="10484778" cy="1950641"/>
-          </a:xfrm>
-          <a:prstGeom prst="rect">
-            <a:avLst/>
-          </a:prstGeom>
-          <a:noFill/>
-          <a:ln/>
-        </p:spPr>
-        <p:txBody>
-          <a:bodyPr wrap="none" lIns="0" tIns="0" rIns="0" bIns="0" rtlCol="0" anchor="t"/>
-          <a:lstStyle/>
-          <a:p>
-            <a:pPr algn="l" indent="0" marL="0">
-              <a:lnSpc>
-                <a:spcPct val="100000"/>
-              </a:lnSpc>
-              <a:buNone/>
-            </a:pPr>
-            <a:r>
-              <a:rPr lang="en-US" sz="12800" b="1" spc="141" kern="100" dirty="0">
-                <a:solidFill>
-                  <a:srgbClr val="FFFFFF"/>
-                </a:solidFill>
-                <a:latin typeface="Caladea Bold" pitchFamily="34" charset="0"/>
-                <a:ea typeface="Caladea Bold" pitchFamily="34" charset="-122"/>
-                <a:cs typeface="Caladea Bold" pitchFamily="34" charset="-120"/>
-              </a:rPr>
-              <a:t>Thank you</a:t>
-            </a:r>
-            <a:endParaRPr lang="en-US" sz="12800" dirty="0"/>
-          </a:p>
-        </p:txBody>
-      </p:sp>
-    </p:spTree>
-  </p:cSld>
-  <p:clrMapOvr>
-    <a:masterClrMapping/>
-  </p:clrMapOvr>
-</p:sld>
-</file>
-
-<file path=ppt/slides/slide52.xml><?xml version="1.0" encoding="utf-8"?>
 <p:sld xmlns:a="http://schemas.openxmlformats.org/drawingml/2006/main" xmlns:p="http://schemas.openxmlformats.org/presentationml/2006/main" xmlns:r="http://schemas.openxmlformats.org/officeDocument/2006/relationships">
   <p:cSld>
     <p:spTree>
@@ -20064,7 +16688,7 @@
                 <a:ea typeface="Caladea Bold" pitchFamily="34" charset="-122"/>
                 <a:cs typeface="Caladea Bold" pitchFamily="34" charset="-120"/>
               </a:rPr>
-              <a:t>then your first server</a:t>
+              <a:t>your first real programs</a:t>
             </a:r>
             <a:endParaRPr lang="en-US" sz="5350" dirty="0"/>
           </a:p>
@@ -20106,7 +16730,7 @@
                 <a:ea typeface="Carlito" pitchFamily="34" charset="-122"/>
                 <a:cs typeface="Carlito" pitchFamily="34" charset="-120"/>
               </a:rPr>
-              <a:t>Python  ·  Functions  ·  FastAPI GET and POST</a:t>
+              <a:t>Variables  ·  Conditions  ·  Loops  ·  Functions</a:t>
             </a:r>
             <a:endParaRPr lang="en-US" sz="2400" dirty="0"/>
           </a:p>
@@ -20977,7 +17601,7 @@
                 <a:ea typeface="Carlito Bold" pitchFamily="34" charset="-122"/>
                 <a:cs typeface="Carlito Bold" pitchFamily="34" charset="-120"/>
               </a:rPr>
-              <a:t>Servers</a:t>
+              <a:t>Live practice</a:t>
             </a:r>
             <a:endParaRPr lang="en-US" sz="2250" dirty="0"/>
           </a:p>
@@ -21021,7 +17645,7 @@
                 <a:ea typeface="Carlito" pitchFamily="34" charset="-122"/>
                 <a:cs typeface="Carlito" pitchFamily="34" charset="-120"/>
               </a:rPr>
-              <a:t>Your first FastAPI server, GET and POST</a:t>
+              <a:t>Four practices together</a:t>
             </a:r>
             <a:endParaRPr lang="en-US" sz="1850" dirty="0"/>
           </a:p>
@@ -21157,7 +17781,7 @@
                 <a:ea typeface="Carlito Bold" pitchFamily="34" charset="-122"/>
                 <a:cs typeface="Carlito Bold" pitchFamily="34" charset="-120"/>
               </a:rPr>
-              <a:t>Practice</a:t>
+              <a:t>Homework</a:t>
             </a:r>
             <a:endParaRPr lang="en-US" sz="2250" dirty="0"/>
           </a:p>
@@ -21201,7 +17825,7 @@
                 <a:ea typeface="Carlito" pitchFamily="34" charset="-122"/>
                 <a:cs typeface="Carlito" pitchFamily="34" charset="-120"/>
               </a:rPr>
-              <a:t>In class, then homework</a:t>
+              <a:t>Practice after class</a:t>
             </a:r>
             <a:endParaRPr lang="en-US" sz="1850" dirty="0"/>
           </a:p>
@@ -21243,7 +17867,7 @@
                 <a:ea typeface="Carlito" pitchFamily="34" charset="-122"/>
                 <a:cs typeface="Carlito" pitchFamily="34" charset="-120"/>
               </a:rPr>
-              <a:t>Green = Python ideas.  Blue = servers, built live together.</a:t>
+              <a:t>Green = Python ideas.  Blue = we practise.</a:t>
             </a:r>
             <a:endParaRPr lang="en-US" sz="1850" dirty="0"/>
           </a:p>
